--- a/wireframes/NVC-Maps-защита.pptx
+++ b/wireframes/NVC-Maps-защита.pptx
@@ -14,12 +14,9 @@
     <p:sldId id="262" r:id="rId8"/>
     <p:sldId id="263" r:id="rId9"/>
     <p:sldId id="264" r:id="rId10"/>
-    <p:sldId id="265" r:id="rId11"/>
-    <p:sldId id="266" r:id="rId12"/>
-    <p:sldId id="267" r:id="rId13"/>
   </p:sldIdLst>
   <p:notesMasterIdLst>
-    <p:notesMasterId r:id="rId14"/>
+    <p:notesMasterId r:id="rId11"/>
   </p:notesMasterIdLst>
   <p:sldSz cx="9144000" cy="5143500"/>
   <p:notesSz cx="5143500" cy="9144000"/>
@@ -118,7 +115,7 @@
   <p:extLst>
     <p:ext uri="{521415D9-36F7-43E2-AB2F-B90AF26B5E84}">
       <p14:sectionLst xmlns:p14="http://schemas.microsoft.com/office/powerpoint/2010/main">
-        <p14:section name="Доклад" id="{9cd36d0a-1601-760f-136c-213195c045f8}">
+        <p14:section name="Доклад" id="{7730ad37-03f6-44cd-6874-0d99136de096}">
           <p14:sldIdLst>
             <p14:sldId id="256"/>
             <p14:sldId id="257"/>
@@ -129,13 +126,6 @@
             <p14:sldId id="262"/>
             <p14:sldId id="263"/>
             <p14:sldId id="264"/>
-          </p14:sldIdLst>
-        </p14:section>
-        <p14:section name="После доклада" id="{958a8ca6-ff79-a2c0-418e-b88959c5a8c0}">
-          <p14:sldIdLst>
-            <p14:sldId id="265"/>
-            <p14:sldId id="266"/>
-            <p14:sldId id="267"/>
           </p14:sldIdLst>
         </p14:section>
       </p14:sectionLst>
@@ -584,270 +574,6 @@
 </p:notes>
 </file>
 
-<file path=ppt/notesSlides/notesSlide10.xml><?xml version="1.0" encoding="utf-8"?>
-<p:notes xmlns:a="http://schemas.openxmlformats.org/drawingml/2006/main" xmlns:r="http://schemas.openxmlformats.org/officeDocument/2006/relationships" xmlns:p="http://schemas.openxmlformats.org/presentationml/2006/main">
-  <p:cSld>
-    <p:spTree>
-      <p:nvGrpSpPr>
-        <p:cNvPr id="1" name=""/>
-        <p:cNvGrpSpPr/>
-        <p:nvPr/>
-      </p:nvGrpSpPr>
-      <p:grpSpPr>
-        <a:xfrm>
-          <a:off x="0" y="0"/>
-          <a:ext cx="0" cy="0"/>
-          <a:chOff x="0" y="0"/>
-          <a:chExt cx="0" cy="0"/>
-        </a:xfrm>
-      </p:grpSpPr>
-      <p:sp>
-        <p:nvSpPr>
-          <p:cNvPr id="2" name="Slide Image Placeholder 1"/>
-          <p:cNvSpPr>
-            <a:spLocks noGrp="1" noRot="1" noChangeAspect="1"/>
-          </p:cNvSpPr>
-          <p:nvPr>
-            <p:ph type="sldImg"/>
-          </p:nvPr>
-        </p:nvSpPr>
-        <p:spPr/>
-      </p:sp>
-      <p:sp>
-        <p:nvSpPr>
-          <p:cNvPr id="3" name="Notes Placeholder 2"/>
-          <p:cNvSpPr>
-            <a:spLocks noGrp="1"/>
-          </p:cNvSpPr>
-          <p:nvPr>
-            <p:ph type="body" idx="1"/>
-          </p:nvPr>
-        </p:nvSpPr>
-        <p:spPr/>
-        <p:txBody>
-          <a:bodyPr/>
-          <a:lstStyle/>
-          <a:p>
-            <a:r>
-              <a:rPr lang="en-US" dirty="0"/>
-              <a:t/>
-            </a:r>
-            <a:endParaRPr lang="en-US" dirty="0"/>
-          </a:p>
-        </p:txBody>
-      </p:sp>
-      <p:sp>
-        <p:nvSpPr>
-          <p:cNvPr id="4" name="Slide Number Placeholder 3"/>
-          <p:cNvSpPr>
-            <a:spLocks noGrp="1"/>
-          </p:cNvSpPr>
-          <p:nvPr>
-            <p:ph type="sldNum" sz="quarter" idx="10"/>
-          </p:nvPr>
-        </p:nvSpPr>
-        <p:spPr/>
-        <p:txBody>
-          <a:bodyPr/>
-          <a:lstStyle/>
-          <a:p>
-            <a:fld id="{F7021451-1387-4CA6-816F-3879F97B5CBC}" type="slidenum">
-              <a:rPr lang="en-US"/>
-              <a:t>10</a:t>
-            </a:fld>
-            <a:endParaRPr lang="en-US"/>
-          </a:p>
-        </p:txBody>
-      </p:sp>
-    </p:spTree>
-    <p:extLst>
-      <p:ext uri="{BB962C8B-B14F-4D97-AF65-F5344CB8AC3E}">
-        <p14:creationId xmlns:p14="http://schemas.microsoft.com/office/powerpoint/2010/main" val="1024086991"/>
-      </p:ext>
-    </p:extLst>
-  </p:cSld>
-  <p:clrMapOvr>
-    <a:masterClrMapping/>
-  </p:clrMapOvr>
-</p:notes>
-</file>
-
-<file path=ppt/notesSlides/notesSlide11.xml><?xml version="1.0" encoding="utf-8"?>
-<p:notes xmlns:a="http://schemas.openxmlformats.org/drawingml/2006/main" xmlns:r="http://schemas.openxmlformats.org/officeDocument/2006/relationships" xmlns:p="http://schemas.openxmlformats.org/presentationml/2006/main">
-  <p:cSld>
-    <p:spTree>
-      <p:nvGrpSpPr>
-        <p:cNvPr id="1" name=""/>
-        <p:cNvGrpSpPr/>
-        <p:nvPr/>
-      </p:nvGrpSpPr>
-      <p:grpSpPr>
-        <a:xfrm>
-          <a:off x="0" y="0"/>
-          <a:ext cx="0" cy="0"/>
-          <a:chOff x="0" y="0"/>
-          <a:chExt cx="0" cy="0"/>
-        </a:xfrm>
-      </p:grpSpPr>
-      <p:sp>
-        <p:nvSpPr>
-          <p:cNvPr id="2" name="Slide Image Placeholder 1"/>
-          <p:cNvSpPr>
-            <a:spLocks noGrp="1" noRot="1" noChangeAspect="1"/>
-          </p:cNvSpPr>
-          <p:nvPr>
-            <p:ph type="sldImg"/>
-          </p:nvPr>
-        </p:nvSpPr>
-        <p:spPr/>
-      </p:sp>
-      <p:sp>
-        <p:nvSpPr>
-          <p:cNvPr id="3" name="Notes Placeholder 2"/>
-          <p:cNvSpPr>
-            <a:spLocks noGrp="1"/>
-          </p:cNvSpPr>
-          <p:nvPr>
-            <p:ph type="body" idx="1"/>
-          </p:nvPr>
-        </p:nvSpPr>
-        <p:spPr/>
-        <p:txBody>
-          <a:bodyPr/>
-          <a:lstStyle/>
-          <a:p>
-            <a:r>
-              <a:rPr lang="en-US" dirty="0"/>
-              <a:t/>
-            </a:r>
-            <a:endParaRPr lang="en-US" dirty="0"/>
-          </a:p>
-        </p:txBody>
-      </p:sp>
-      <p:sp>
-        <p:nvSpPr>
-          <p:cNvPr id="4" name="Slide Number Placeholder 3"/>
-          <p:cNvSpPr>
-            <a:spLocks noGrp="1"/>
-          </p:cNvSpPr>
-          <p:nvPr>
-            <p:ph type="sldNum" sz="quarter" idx="10"/>
-          </p:nvPr>
-        </p:nvSpPr>
-        <p:spPr/>
-        <p:txBody>
-          <a:bodyPr/>
-          <a:lstStyle/>
-          <a:p>
-            <a:fld id="{F7021451-1387-4CA6-816F-3879F97B5CBC}" type="slidenum">
-              <a:rPr lang="en-US"/>
-              <a:t>11</a:t>
-            </a:fld>
-            <a:endParaRPr lang="en-US"/>
-          </a:p>
-        </p:txBody>
-      </p:sp>
-    </p:spTree>
-    <p:extLst>
-      <p:ext uri="{BB962C8B-B14F-4D97-AF65-F5344CB8AC3E}">
-        <p14:creationId xmlns:p14="http://schemas.microsoft.com/office/powerpoint/2010/main" val="1024086991"/>
-      </p:ext>
-    </p:extLst>
-  </p:cSld>
-  <p:clrMapOvr>
-    <a:masterClrMapping/>
-  </p:clrMapOvr>
-</p:notes>
-</file>
-
-<file path=ppt/notesSlides/notesSlide12.xml><?xml version="1.0" encoding="utf-8"?>
-<p:notes xmlns:a="http://schemas.openxmlformats.org/drawingml/2006/main" xmlns:r="http://schemas.openxmlformats.org/officeDocument/2006/relationships" xmlns:p="http://schemas.openxmlformats.org/presentationml/2006/main">
-  <p:cSld>
-    <p:spTree>
-      <p:nvGrpSpPr>
-        <p:cNvPr id="1" name=""/>
-        <p:cNvGrpSpPr/>
-        <p:nvPr/>
-      </p:nvGrpSpPr>
-      <p:grpSpPr>
-        <a:xfrm>
-          <a:off x="0" y="0"/>
-          <a:ext cx="0" cy="0"/>
-          <a:chOff x="0" y="0"/>
-          <a:chExt cx="0" cy="0"/>
-        </a:xfrm>
-      </p:grpSpPr>
-      <p:sp>
-        <p:nvSpPr>
-          <p:cNvPr id="2" name="Slide Image Placeholder 1"/>
-          <p:cNvSpPr>
-            <a:spLocks noGrp="1" noRot="1" noChangeAspect="1"/>
-          </p:cNvSpPr>
-          <p:nvPr>
-            <p:ph type="sldImg"/>
-          </p:nvPr>
-        </p:nvSpPr>
-        <p:spPr/>
-      </p:sp>
-      <p:sp>
-        <p:nvSpPr>
-          <p:cNvPr id="3" name="Notes Placeholder 2"/>
-          <p:cNvSpPr>
-            <a:spLocks noGrp="1"/>
-          </p:cNvSpPr>
-          <p:nvPr>
-            <p:ph type="body" idx="1"/>
-          </p:nvPr>
-        </p:nvSpPr>
-        <p:spPr/>
-        <p:txBody>
-          <a:bodyPr/>
-          <a:lstStyle/>
-          <a:p>
-            <a:r>
-              <a:rPr lang="en-US" dirty="0"/>
-              <a:t/>
-            </a:r>
-            <a:endParaRPr lang="en-US" dirty="0"/>
-          </a:p>
-        </p:txBody>
-      </p:sp>
-      <p:sp>
-        <p:nvSpPr>
-          <p:cNvPr id="4" name="Slide Number Placeholder 3"/>
-          <p:cNvSpPr>
-            <a:spLocks noGrp="1"/>
-          </p:cNvSpPr>
-          <p:nvPr>
-            <p:ph type="sldNum" sz="quarter" idx="10"/>
-          </p:nvPr>
-        </p:nvSpPr>
-        <p:spPr/>
-        <p:txBody>
-          <a:bodyPr/>
-          <a:lstStyle/>
-          <a:p>
-            <a:fld id="{F7021451-1387-4CA6-816F-3879F97B5CBC}" type="slidenum">
-              <a:rPr lang="en-US"/>
-              <a:t>12</a:t>
-            </a:fld>
-            <a:endParaRPr lang="en-US"/>
-          </a:p>
-        </p:txBody>
-      </p:sp>
-    </p:spTree>
-    <p:extLst>
-      <p:ext uri="{BB962C8B-B14F-4D97-AF65-F5344CB8AC3E}">
-        <p14:creationId xmlns:p14="http://schemas.microsoft.com/office/powerpoint/2010/main" val="1024086991"/>
-      </p:ext>
-    </p:extLst>
-  </p:cSld>
-  <p:clrMapOvr>
-    <a:masterClrMapping/>
-  </p:clrMapOvr>
-</p:notes>
-</file>
-
 <file path=ppt/notesSlides/notesSlide2.xml><?xml version="1.0" encoding="utf-8"?>
 <p:notes xmlns:a="http://schemas.openxmlformats.org/drawingml/2006/main" xmlns:r="http://schemas.openxmlformats.org/officeDocument/2006/relationships" xmlns:p="http://schemas.openxmlformats.org/presentationml/2006/main">
   <p:cSld>
@@ -1648,7 +1374,7 @@
         </p:nvSpPr>
         <p:spPr>
           <a:xfrm>
-            <a:off x="457200" y="658368"/>
+            <a:off x="457200" y="411480"/>
             <a:ext cx="8229600" cy="914400"/>
           </a:xfrm>
           <a:prstGeom prst="rect">
@@ -2267,1410 +1993,6 @@
 </p:sld>
 </file>
 
-<file path=ppt/slides/slide10.xml><?xml version="1.0" encoding="utf-8"?>
-<p:sld xmlns:a="http://schemas.openxmlformats.org/drawingml/2006/main" xmlns:r="http://schemas.openxmlformats.org/officeDocument/2006/relationships" xmlns:p="http://schemas.openxmlformats.org/presentationml/2006/main">
-  <p:cSld name="Slide 10">
-    <p:spTree>
-      <p:nvGrpSpPr>
-        <p:cNvPr id="1" name=""/>
-        <p:cNvGrpSpPr/>
-        <p:nvPr/>
-      </p:nvGrpSpPr>
-      <p:grpSpPr>
-        <a:xfrm>
-          <a:off x="0" y="0"/>
-          <a:ext cx="0" cy="0"/>
-          <a:chOff x="0" y="0"/>
-          <a:chExt cx="0" cy="0"/>
-        </a:xfrm>
-      </p:grpSpPr>
-      <p:sp>
-        <p:nvSpPr>
-          <p:cNvPr id="2" name="Text 0"/>
-          <p:cNvSpPr/>
-          <p:nvPr>
-            <p:ph idx="100" type="title" hasCustomPrompt="1"/>
-          </p:nvPr>
-        </p:nvSpPr>
-        <p:spPr>
-          <a:xfrm>
-            <a:off x="457200" y="658368"/>
-            <a:ext cx="8229600" cy="914400"/>
-          </a:xfrm>
-          <a:prstGeom prst="rect">
-            <a:avLst/>
-          </a:prstGeom>
-          <a:noFill/>
-          <a:ln/>
-        </p:spPr>
-        <p:txBody>
-          <a:bodyPr wrap="square" lIns="0" tIns="0" rIns="0" bIns="0" rtlCol="0" anchor="t"/>
-          <a:lstStyle/>
-          <a:p>
-            <a:pPr algn="l" indent="0" marL="0">
-              <a:buNone/>
-            </a:pPr>
-            <a:r>
-              <a:rPr lang="en-US" sz="2600" b="1" dirty="0">
-                <a:solidFill>
-                  <a:srgbClr val="111827"/>
-                </a:solidFill>
-                <a:latin typeface="Calibri" pitchFamily="34" charset="0"/>
-                <a:ea typeface="Calibri" pitchFamily="34" charset="-122"/>
-                <a:cs typeface="Calibri" pitchFamily="34" charset="-120"/>
-              </a:rPr>
-              <a:t>Запасные слайды</a:t>
-            </a:r>
-            <a:endParaRPr lang="en-US" sz="2600" dirty="0"/>
-          </a:p>
-        </p:txBody>
-      </p:sp>
-      <p:sp>
-        <p:nvSpPr>
-          <p:cNvPr id="3" name="backup-0"/>
-          <p:cNvSpPr/>
-          <p:nvPr/>
-        </p:nvSpPr>
-        <p:spPr>
-          <a:xfrm>
-            <a:off x="457200" y="1325880"/>
-            <a:ext cx="4000500" cy="914400"/>
-          </a:xfrm>
-          <a:prstGeom prst="roundRect">
-            <a:avLst>
-              <a:gd name="adj" fmla="val 8000"/>
-            </a:avLst>
-          </a:prstGeom>
-          <a:solidFill>
-            <a:srgbClr val="FFFFFF"/>
-          </a:solidFill>
-          <a:ln w="12700">
-            <a:solidFill>
-              <a:srgbClr val="E5E7EB"/>
-            </a:solidFill>
-            <a:prstDash val="solid"/>
-          </a:ln>
-        </p:spPr>
-      </p:sp>
-      <p:sp>
-        <p:nvSpPr>
-          <p:cNvPr id="4" name="Text 2"/>
-          <p:cNvSpPr txBox="1"/>
-          <p:nvPr/>
-        </p:nvSpPr>
-        <p:spPr>
-          <a:xfrm>
-            <a:off x="548640" y="1399032"/>
-            <a:ext cx="3817620" cy="768096"/>
-          </a:xfrm>
-          <a:prstGeom prst="rect">
-            <a:avLst/>
-          </a:prstGeom>
-          <a:noFill/>
-          <a:ln/>
-        </p:spPr>
-        <p:txBody>
-          <a:bodyPr wrap="square" lIns="1016" tIns="1016" rIns="1016" bIns="1016" rtlCol="0" anchor="t"/>
-          <a:lstStyle/>
-          <a:p>
-            <a:pPr algn="l" indent="0" marL="0">
-              <a:buNone/>
-            </a:pPr>
-            <a:r>
-              <a:rPr lang="en-US" sz="1100" dirty="0">
-                <a:solidFill>
-                  <a:srgbClr val="0F766E"/>
-                </a:solidFill>
-                <a:latin typeface="Calibri" pitchFamily="34" charset="0"/>
-                <a:ea typeface="Calibri" pitchFamily="34" charset="-122"/>
-                <a:cs typeface="Calibri" pitchFamily="34" charset="-120"/>
-              </a:rPr>
-              <a:t>Раздел 1.3</a:t>
-            </a:r>
-            <a:endParaRPr lang="en-US" sz="1400" dirty="0"/>
-          </a:p>
-          <a:p>
-            <a:pPr algn="l" indent="0" marL="0">
-              <a:buNone/>
-            </a:pPr>
-            <a:r>
-              <a:rPr lang="en-US" sz="1800" b="1" u="sng" dirty="0">
-                <a:solidFill>
-                  <a:srgbClr val="111827"/>
-                </a:solidFill>
-                <a:latin typeface="Calibri" pitchFamily="34" charset="0"/>
-                <a:ea typeface="Calibri" pitchFamily="34" charset="-122"/>
-                <a:cs typeface="Calibri" pitchFamily="34" charset="-120"/>
-                <a:hlinkClick r:id="rId1" invalidUrl="" action="" tgtFrame="" tooltip="" history="1" highlightClick="0" endSnd="0">
-                  <a:extLst>
-                    <a:ext uri="{A12FA001-AC4F-418D-AE19-62706E023703}">
-                      <ahyp:hlinkClr xmlns:ahyp="http://schemas.microsoft.com/office/drawing/2018/hyperlinkcolor" val="tx"/>
-                    </a:ext>
-                  </a:extLst>
-                </a:hlinkClick>
-              </a:rPr>
-              <a:t>Полная таблица аналогов</a:t>
-            </a:r>
-            <a:endParaRPr lang="en-US" sz="1400" dirty="0"/>
-          </a:p>
-        </p:txBody>
-      </p:sp>
-      <p:sp>
-        <p:nvSpPr>
-          <p:cNvPr id="5" name="backup-1"/>
-          <p:cNvSpPr/>
-          <p:nvPr/>
-        </p:nvSpPr>
-        <p:spPr>
-          <a:xfrm>
-            <a:off x="4686300" y="1325880"/>
-            <a:ext cx="4000500" cy="914400"/>
-          </a:xfrm>
-          <a:prstGeom prst="roundRect">
-            <a:avLst>
-              <a:gd name="adj" fmla="val 8000"/>
-            </a:avLst>
-          </a:prstGeom>
-          <a:solidFill>
-            <a:srgbClr val="FFFFFF"/>
-          </a:solidFill>
-          <a:ln w="12700">
-            <a:solidFill>
-              <a:srgbClr val="E5E7EB"/>
-            </a:solidFill>
-            <a:prstDash val="solid"/>
-          </a:ln>
-        </p:spPr>
-      </p:sp>
-      <p:sp>
-        <p:nvSpPr>
-          <p:cNvPr id="6" name="Text 4"/>
-          <p:cNvSpPr txBox="1"/>
-          <p:nvPr/>
-        </p:nvSpPr>
-        <p:spPr>
-          <a:xfrm>
-            <a:off x="4777740" y="1399032"/>
-            <a:ext cx="3817620" cy="768096"/>
-          </a:xfrm>
-          <a:prstGeom prst="rect">
-            <a:avLst/>
-          </a:prstGeom>
-          <a:noFill/>
-          <a:ln/>
-        </p:spPr>
-        <p:txBody>
-          <a:bodyPr wrap="square" lIns="1016" tIns="1016" rIns="1016" bIns="1016" rtlCol="0" anchor="t"/>
-          <a:lstStyle/>
-          <a:p>
-            <a:pPr algn="l" indent="0" marL="0">
-              <a:buNone/>
-            </a:pPr>
-            <a:r>
-              <a:rPr lang="en-US" sz="1100" dirty="0">
-                <a:solidFill>
-                  <a:srgbClr val="0F766E"/>
-                </a:solidFill>
-                <a:latin typeface="Calibri" pitchFamily="34" charset="0"/>
-                <a:ea typeface="Calibri" pitchFamily="34" charset="-122"/>
-                <a:cs typeface="Calibri" pitchFamily="34" charset="-120"/>
-              </a:rPr>
-              <a:t>Приложение 1</a:t>
-            </a:r>
-            <a:endParaRPr lang="en-US" sz="1400" dirty="0"/>
-          </a:p>
-          <a:p>
-            <a:pPr algn="l" indent="0" marL="0">
-              <a:buNone/>
-            </a:pPr>
-            <a:r>
-              <a:rPr lang="en-US" sz="1800" b="1" u="sng" dirty="0">
-                <a:solidFill>
-                  <a:srgbClr val="111827"/>
-                </a:solidFill>
-                <a:latin typeface="Calibri" pitchFamily="34" charset="0"/>
-                <a:ea typeface="Calibri" pitchFamily="34" charset="-122"/>
-                <a:cs typeface="Calibri" pitchFamily="34" charset="-120"/>
-                <a:hlinkClick r:id="rId2" invalidUrl="" action="" tgtFrame="" tooltip="" history="1" highlightClick="0" endSnd="0">
-                  <a:extLst>
-                    <a:ext uri="{A12FA001-AC4F-418D-AE19-62706E023703}">
-                      <ahyp:hlinkClr xmlns:ahyp="http://schemas.microsoft.com/office/drawing/2018/hyperlinkcolor" val="tx"/>
-                    </a:ext>
-                  </a:extLst>
-                </a:hlinkClick>
-              </a:rPr>
-              <a:t>Все эпики и истории</a:t>
-            </a:r>
-            <a:endParaRPr lang="en-US" sz="1400" dirty="0"/>
-          </a:p>
-        </p:txBody>
-      </p:sp>
-      <p:sp>
-        <p:nvSpPr>
-          <p:cNvPr id="7" name="backup-2"/>
-          <p:cNvSpPr/>
-          <p:nvPr/>
-        </p:nvSpPr>
-        <p:spPr>
-          <a:xfrm>
-            <a:off x="457200" y="2468880"/>
-            <a:ext cx="4000500" cy="914400"/>
-          </a:xfrm>
-          <a:prstGeom prst="roundRect">
-            <a:avLst>
-              <a:gd name="adj" fmla="val 8000"/>
-            </a:avLst>
-          </a:prstGeom>
-          <a:solidFill>
-            <a:srgbClr val="FFFFFF"/>
-          </a:solidFill>
-          <a:ln w="12700">
-            <a:solidFill>
-              <a:srgbClr val="E5E7EB"/>
-            </a:solidFill>
-            <a:prstDash val="solid"/>
-          </a:ln>
-        </p:spPr>
-      </p:sp>
-      <p:sp>
-        <p:nvSpPr>
-          <p:cNvPr id="8" name="Text 6"/>
-          <p:cNvSpPr txBox="1"/>
-          <p:nvPr/>
-        </p:nvSpPr>
-        <p:spPr>
-          <a:xfrm>
-            <a:off x="548640" y="2542032"/>
-            <a:ext cx="3817620" cy="768096"/>
-          </a:xfrm>
-          <a:prstGeom prst="rect">
-            <a:avLst/>
-          </a:prstGeom>
-          <a:noFill/>
-          <a:ln/>
-        </p:spPr>
-        <p:txBody>
-          <a:bodyPr wrap="square" lIns="1016" tIns="1016" rIns="1016" bIns="1016" rtlCol="0" anchor="t"/>
-          <a:lstStyle/>
-          <a:p>
-            <a:pPr algn="l" indent="0" marL="0">
-              <a:buNone/>
-            </a:pPr>
-            <a:r>
-              <a:rPr lang="en-US" sz="1100" dirty="0">
-                <a:solidFill>
-                  <a:srgbClr val="0F766E"/>
-                </a:solidFill>
-                <a:latin typeface="Calibri" pitchFamily="34" charset="0"/>
-                <a:ea typeface="Calibri" pitchFamily="34" charset="-122"/>
-                <a:cs typeface="Calibri" pitchFamily="34" charset="-120"/>
-              </a:rPr>
-              <a:t>Раздел 2.9</a:t>
-            </a:r>
-            <a:endParaRPr lang="en-US" sz="1400" dirty="0"/>
-          </a:p>
-          <a:p>
-            <a:pPr algn="l" indent="0" marL="0">
-              <a:buNone/>
-            </a:pPr>
-            <a:r>
-              <a:rPr lang="en-US" sz="1800" b="1" u="sng" dirty="0">
-                <a:solidFill>
-                  <a:srgbClr val="111827"/>
-                </a:solidFill>
-                <a:latin typeface="Calibri" pitchFamily="34" charset="0"/>
-                <a:ea typeface="Calibri" pitchFamily="34" charset="-122"/>
-                <a:cs typeface="Calibri" pitchFamily="34" charset="-120"/>
-                <a:hlinkClick r:id="rId3" invalidUrl="" action="" tgtFrame="" tooltip="" history="1" highlightClick="0" endSnd="0">
-                  <a:extLst>
-                    <a:ext uri="{A12FA001-AC4F-418D-AE19-62706E023703}">
-                      <ahyp:hlinkClr xmlns:ahyp="http://schemas.microsoft.com/office/drawing/2018/hyperlinkcolor" val="tx"/>
-                    </a:ext>
-                  </a:extLst>
-                </a:hlinkClick>
-              </a:rPr>
-              <a:t>Таблица рисков</a:t>
-            </a:r>
-            <a:endParaRPr lang="en-US" sz="1400" dirty="0"/>
-          </a:p>
-        </p:txBody>
-      </p:sp>
-      <p:sp>
-        <p:nvSpPr>
-          <p:cNvPr id="9" name="backup-3"/>
-          <p:cNvSpPr/>
-          <p:nvPr/>
-        </p:nvSpPr>
-        <p:spPr>
-          <a:xfrm>
-            <a:off x="4686300" y="2468880"/>
-            <a:ext cx="4000500" cy="914400"/>
-          </a:xfrm>
-          <a:prstGeom prst="roundRect">
-            <a:avLst>
-              <a:gd name="adj" fmla="val 8000"/>
-            </a:avLst>
-          </a:prstGeom>
-          <a:solidFill>
-            <a:srgbClr val="FFFFFF"/>
-          </a:solidFill>
-          <a:ln w="12700">
-            <a:solidFill>
-              <a:srgbClr val="E5E7EB"/>
-            </a:solidFill>
-            <a:prstDash val="solid"/>
-          </a:ln>
-        </p:spPr>
-      </p:sp>
-      <p:sp>
-        <p:nvSpPr>
-          <p:cNvPr id="10" name="Text 8"/>
-          <p:cNvSpPr txBox="1"/>
-          <p:nvPr/>
-        </p:nvSpPr>
-        <p:spPr>
-          <a:xfrm>
-            <a:off x="4777740" y="2542032"/>
-            <a:ext cx="3817620" cy="768096"/>
-          </a:xfrm>
-          <a:prstGeom prst="rect">
-            <a:avLst/>
-          </a:prstGeom>
-          <a:noFill/>
-          <a:ln/>
-        </p:spPr>
-        <p:txBody>
-          <a:bodyPr wrap="square" lIns="1016" tIns="1016" rIns="1016" bIns="1016" rtlCol="0" anchor="t"/>
-          <a:lstStyle/>
-          <a:p>
-            <a:pPr algn="l" indent="0" marL="0">
-              <a:buNone/>
-            </a:pPr>
-            <a:r>
-              <a:rPr lang="en-US" sz="1100" dirty="0">
-                <a:solidFill>
-                  <a:srgbClr val="0F766E"/>
-                </a:solidFill>
-                <a:latin typeface="Calibri" pitchFamily="34" charset="0"/>
-                <a:ea typeface="Calibri" pitchFamily="34" charset="-122"/>
-                <a:cs typeface="Calibri" pitchFamily="34" charset="-120"/>
-              </a:rPr>
-              <a:t>Раздел 2.6</a:t>
-            </a:r>
-            <a:endParaRPr lang="en-US" sz="1400" dirty="0"/>
-          </a:p>
-          <a:p>
-            <a:pPr algn="l" indent="0" marL="0">
-              <a:buNone/>
-            </a:pPr>
-            <a:r>
-              <a:rPr lang="en-US" sz="1800" b="1" u="sng" dirty="0">
-                <a:solidFill>
-                  <a:srgbClr val="111827"/>
-                </a:solidFill>
-                <a:latin typeface="Calibri" pitchFamily="34" charset="0"/>
-                <a:ea typeface="Calibri" pitchFamily="34" charset="-122"/>
-                <a:cs typeface="Calibri" pitchFamily="34" charset="-120"/>
-                <a:hlinkClick r:id="rId4" invalidUrl="" action="" tgtFrame="" tooltip="" history="1" highlightClick="0" endSnd="0">
-                  <a:extLst>
-                    <a:ext uri="{A12FA001-AC4F-418D-AE19-62706E023703}">
-                      <ahyp:hlinkClr xmlns:ahyp="http://schemas.microsoft.com/office/drawing/2018/hyperlinkcolor" val="tx"/>
-                    </a:ext>
-                  </a:extLst>
-                </a:hlinkClick>
-              </a:rPr>
-              <a:t>Полный текст сценариев</a:t>
-            </a:r>
-            <a:endParaRPr lang="en-US" sz="1400" dirty="0"/>
-          </a:p>
-        </p:txBody>
-      </p:sp>
-      <p:sp>
-        <p:nvSpPr>
-          <p:cNvPr id="11" name="Text 9"/>
-          <p:cNvSpPr txBox="1"/>
-          <p:nvPr/>
-        </p:nvSpPr>
-        <p:spPr>
-          <a:xfrm>
-            <a:off x="457200" y="3611880"/>
-            <a:ext cx="8229600" cy="365760"/>
-          </a:xfrm>
-          <a:prstGeom prst="rect">
-            <a:avLst/>
-          </a:prstGeom>
-          <a:noFill/>
-          <a:ln/>
-        </p:spPr>
-        <p:txBody>
-          <a:bodyPr wrap="square" lIns="0" tIns="0" rIns="0" bIns="0" rtlCol="0" anchor="t"/>
-          <a:lstStyle/>
-          <a:p>
-            <a:pPr algn="l" indent="0" marL="0">
-              <a:buNone/>
-            </a:pPr>
-            <a:r>
-              <a:rPr lang="en-US" sz="1200" dirty="0">
-                <a:solidFill>
-                  <a:srgbClr val="6B7280"/>
-                </a:solidFill>
-                <a:latin typeface="Calibri" pitchFamily="34" charset="0"/>
-                <a:ea typeface="Calibri" pitchFamily="34" charset="-122"/>
-                <a:cs typeface="Calibri" pitchFamily="34" charset="-120"/>
-              </a:rPr>
-              <a:t>Показываются после доклада, по вопросам комиссии.</a:t>
-            </a:r>
-            <a:endParaRPr lang="en-US" sz="1200" dirty="0"/>
-          </a:p>
-        </p:txBody>
-      </p:sp>
-      <p:sp>
-        <p:nvSpPr>
-          <p:cNvPr id="12" name="section-ref"/>
-          <p:cNvSpPr txBox="1"/>
-          <p:nvPr/>
-        </p:nvSpPr>
-        <p:spPr>
-          <a:xfrm>
-            <a:off x="457200" y="4754880"/>
-            <a:ext cx="7498080" cy="274320"/>
-          </a:xfrm>
-          <a:prstGeom prst="rect">
-            <a:avLst/>
-          </a:prstGeom>
-          <a:noFill/>
-          <a:ln/>
-        </p:spPr>
-        <p:txBody>
-          <a:bodyPr wrap="square" lIns="0" tIns="0" rIns="0" bIns="0" rtlCol="0" anchor="t"/>
-          <a:lstStyle/>
-          <a:p>
-            <a:pPr algn="l" indent="0" marL="0">
-              <a:buNone/>
-            </a:pPr>
-            <a:r>
-              <a:rPr lang="en-US" sz="1000" dirty="0">
-                <a:solidFill>
-                  <a:srgbClr val="6B7280"/>
-                </a:solidFill>
-                <a:latin typeface="Calibri" pitchFamily="34" charset="0"/>
-                <a:ea typeface="Calibri" pitchFamily="34" charset="-122"/>
-                <a:cs typeface="Calibri" pitchFamily="34" charset="-120"/>
-              </a:rPr>
-              <a:t>Требования к защите: запасные слайды</a:t>
-            </a:r>
-            <a:endParaRPr lang="en-US" sz="1000" dirty="0"/>
-          </a:p>
-        </p:txBody>
-      </p:sp>
-      <p:sp>
-        <p:nvSpPr>
-          <p:cNvPr id="25" name="Slide Number Placeholder 0"/>
-          <p:cNvSpPr>
-            <a:spLocks noGrp="1"/>
-          </p:cNvSpPr>
-          <p:nvPr>
-            <p:ph type="sldNum" sz="quarter" idx="4294967295"/>
-          </p:nvPr>
-        </p:nvSpPr>
-        <p:spPr>
-          <a:xfrm>
-            <a:off x="8229600" y="4754880"/>
-            <a:ext cx="457200" cy="274320"/>
-          </a:xfrm>
-          <a:prstGeom prst="rect">
-            <a:avLst/>
-          </a:prstGeom>
-          <a:extLst>
-            <a:ext uri="{C572A759-6A51-4108-AA02-DFA0A04FC94B}">
-              <ma14:wrappingTextBoxFlag xmlns:ma14="http://schemas.microsoft.com/office/mac/drawingml/2011/main" val="0"/>
-            </a:ext>
-          </a:extLst>
-        </p:spPr>
-        <p:txBody>
-          <a:bodyPr/>
-          <a:lstStyle>
-            <a:lvl1pPr>
-              <a:defRPr sz="1000">
-                <a:solidFill>
-                  <a:srgbClr val="6B7280"/>
-                </a:solidFill>
-                <a:latin typeface="Calibri"/>
-                <a:ea typeface="Calibri"/>
-                <a:cs typeface="Calibri"/>
-              </a:defRPr>
-            </a:lvl1pPr>
-          </a:lstStyle>
-          <a:p>
-            <a:pPr algn="r"/>
-            <a:fld id="{F7021451-1387-4CA6-816F-3879F97B5CBC}" type="slidenum">
-              <a:rPr b="0" lang="en-US"/>
-              <a:t>10</a:t>
-            </a:fld>
-            <a:endParaRPr lang="en-US"/>
-          </a:p>
-        </p:txBody>
-      </p:sp>
-    </p:spTree>
-  </p:cSld>
-  <p:clrMapOvr>
-    <a:masterClrMapping/>
-  </p:clrMapOvr>
-</p:sld>
-</file>
-
-<file path=ppt/slides/slide11.xml><?xml version="1.0" encoding="utf-8"?>
-<p:sld xmlns:a="http://schemas.openxmlformats.org/drawingml/2006/main" xmlns:r="http://schemas.openxmlformats.org/officeDocument/2006/relationships" xmlns:p="http://schemas.openxmlformats.org/presentationml/2006/main">
-  <p:cSld name="Slide 11">
-    <p:spTree>
-      <p:nvGrpSpPr>
-        <p:cNvPr id="1" name=""/>
-        <p:cNvGrpSpPr/>
-        <p:nvPr/>
-      </p:nvGrpSpPr>
-      <p:grpSpPr>
-        <a:xfrm>
-          <a:off x="0" y="0"/>
-          <a:ext cx="0" cy="0"/>
-          <a:chOff x="0" y="0"/>
-          <a:chExt cx="0" cy="0"/>
-        </a:xfrm>
-      </p:grpSpPr>
-      <p:sp>
-        <p:nvSpPr>
-          <p:cNvPr id="2" name="Text 0"/>
-          <p:cNvSpPr/>
-          <p:nvPr>
-            <p:ph idx="100" type="title" hasCustomPrompt="1"/>
-          </p:nvPr>
-        </p:nvSpPr>
-        <p:spPr>
-          <a:xfrm>
-            <a:off x="457200" y="658368"/>
-            <a:ext cx="8229600" cy="914400"/>
-          </a:xfrm>
-          <a:prstGeom prst="rect">
-            <a:avLst/>
-          </a:prstGeom>
-          <a:noFill/>
-          <a:ln/>
-        </p:spPr>
-        <p:txBody>
-          <a:bodyPr wrap="square" lIns="0" tIns="0" rIns="0" bIns="0" rtlCol="0" anchor="t"/>
-          <a:lstStyle/>
-          <a:p>
-            <a:pPr algn="l" indent="0" marL="0">
-              <a:buNone/>
-            </a:pPr>
-            <a:r>
-              <a:rPr lang="en-US" sz="2600" b="1" dirty="0">
-                <a:solidFill>
-                  <a:srgbClr val="111827"/>
-                </a:solidFill>
-                <a:latin typeface="Calibri" pitchFamily="34" charset="0"/>
-                <a:ea typeface="Calibri" pitchFamily="34" charset="-122"/>
-                <a:cs typeface="Calibri" pitchFamily="34" charset="-120"/>
-              </a:rPr>
-              <a:t>Ответы на типовые вопросы комиссии (1 из 2)</a:t>
-            </a:r>
-            <a:endParaRPr lang="en-US" sz="2600" dirty="0"/>
-          </a:p>
-        </p:txBody>
-      </p:sp>
-      <p:sp>
-        <p:nvSpPr>
-          <p:cNvPr id="3" name="Text 1"/>
-          <p:cNvSpPr txBox="1"/>
-          <p:nvPr/>
-        </p:nvSpPr>
-        <p:spPr>
-          <a:xfrm>
-            <a:off x="457200" y="1325880"/>
-            <a:ext cx="3017520" cy="731520"/>
-          </a:xfrm>
-          <a:prstGeom prst="rect">
-            <a:avLst/>
-          </a:prstGeom>
-          <a:noFill/>
-          <a:ln/>
-        </p:spPr>
-        <p:txBody>
-          <a:bodyPr wrap="square" lIns="1016" tIns="1016" rIns="1016" bIns="1016" rtlCol="0" anchor="t"/>
-          <a:lstStyle/>
-          <a:p>
-            <a:pPr algn="l" indent="0" marL="0">
-              <a:buNone/>
-            </a:pPr>
-            <a:r>
-              <a:rPr lang="en-US" sz="1400" b="1" dirty="0">
-                <a:solidFill>
-                  <a:srgbClr val="111827"/>
-                </a:solidFill>
-                <a:latin typeface="Calibri" pitchFamily="34" charset="0"/>
-                <a:ea typeface="Calibri" pitchFamily="34" charset="-122"/>
-                <a:cs typeface="Calibri" pitchFamily="34" charset="-120"/>
-              </a:rPr>
-              <a:t>Как вы убедились, что проблема реальна?</a:t>
-            </a:r>
-            <a:endParaRPr lang="en-US" sz="1400" dirty="0"/>
-          </a:p>
-        </p:txBody>
-      </p:sp>
-      <p:sp>
-        <p:nvSpPr>
-          <p:cNvPr id="4" name="Text 2"/>
-          <p:cNvSpPr txBox="1"/>
-          <p:nvPr/>
-        </p:nvSpPr>
-        <p:spPr>
-          <a:xfrm>
-            <a:off x="3566160" y="1325880"/>
-            <a:ext cx="5120640" cy="731520"/>
-          </a:xfrm>
-          <a:prstGeom prst="rect">
-            <a:avLst/>
-          </a:prstGeom>
-          <a:noFill/>
-          <a:ln/>
-        </p:spPr>
-        <p:txBody>
-          <a:bodyPr wrap="square" lIns="1016" tIns="1016" rIns="1016" bIns="1016" rtlCol="0" anchor="t"/>
-          <a:lstStyle/>
-          <a:p>
-            <a:pPr algn="l" indent="0" marL="0">
-              <a:buNone/>
-            </a:pPr>
-            <a:r>
-              <a:rPr lang="en-US" sz="1400" dirty="0">
-                <a:solidFill>
-                  <a:srgbClr val="374151"/>
-                </a:solidFill>
-                <a:latin typeface="Calibri" pitchFamily="34" charset="0"/>
-                <a:ea typeface="Calibri" pitchFamily="34" charset="-122"/>
-                <a:cs typeface="Calibri" pitchFamily="34" charset="-120"/>
-              </a:rPr>
-              <a:t>Анализ рынка и девяти аналогов: ни один не отдаёт опору в метрах и проверку ходьбой. Интервью пока не было — это отдельный риск, план: пять интервью с инди-разработчиками.</a:t>
-            </a:r>
-            <a:endParaRPr lang="en-US" sz="1400" dirty="0"/>
-          </a:p>
-        </p:txBody>
-      </p:sp>
-      <p:sp>
-        <p:nvSpPr>
-          <p:cNvPr id="5" name="Text 3"/>
-          <p:cNvSpPr txBox="1"/>
-          <p:nvPr/>
-        </p:nvSpPr>
-        <p:spPr>
-          <a:xfrm>
-            <a:off x="457200" y="2103120"/>
-            <a:ext cx="3017520" cy="731520"/>
-          </a:xfrm>
-          <a:prstGeom prst="rect">
-            <a:avLst/>
-          </a:prstGeom>
-          <a:noFill/>
-          <a:ln/>
-        </p:spPr>
-        <p:txBody>
-          <a:bodyPr wrap="square" lIns="1016" tIns="1016" rIns="1016" bIns="1016" rtlCol="0" anchor="t"/>
-          <a:lstStyle/>
-          <a:p>
-            <a:pPr algn="l" indent="0" marL="0">
-              <a:buNone/>
-            </a:pPr>
-            <a:r>
-              <a:rPr lang="en-US" sz="1400" b="1" dirty="0">
-                <a:solidFill>
-                  <a:srgbClr val="111827"/>
-                </a:solidFill>
-                <a:latin typeface="Calibri" pitchFamily="34" charset="0"/>
-                <a:ea typeface="Calibri" pitchFamily="34" charset="-122"/>
-                <a:cs typeface="Calibri" pitchFamily="34" charset="-120"/>
-              </a:rPr>
-              <a:t>Чем решение лучше аналога?</a:t>
-            </a:r>
-            <a:endParaRPr lang="en-US" sz="1400" dirty="0"/>
-          </a:p>
-        </p:txBody>
-      </p:sp>
-      <p:sp>
-        <p:nvSpPr>
-          <p:cNvPr id="6" name="Text 4"/>
-          <p:cNvSpPr txBox="1"/>
-          <p:nvPr/>
-        </p:nvSpPr>
-        <p:spPr>
-          <a:xfrm>
-            <a:off x="3566160" y="2103120"/>
-            <a:ext cx="5120640" cy="731520"/>
-          </a:xfrm>
-          <a:prstGeom prst="rect">
-            <a:avLst/>
-          </a:prstGeom>
-          <a:noFill/>
-          <a:ln/>
-        </p:spPr>
-        <p:txBody>
-          <a:bodyPr wrap="square" lIns="1016" tIns="1016" rIns="1016" bIns="1016" rtlCol="0" anchor="t"/>
-          <a:lstStyle/>
-          <a:p>
-            <a:pPr algn="l" indent="0" marL="0">
-              <a:buNone/>
-            </a:pPr>
-            <a:r>
-              <a:rPr lang="en-US" sz="1400" dirty="0">
-                <a:solidFill>
-                  <a:srgbClr val="374151"/>
-                </a:solidFill>
-                <a:latin typeface="Calibri" pitchFamily="34" charset="0"/>
-                <a:ea typeface="Calibri" pitchFamily="34" charset="-122"/>
-                <a:cs typeface="Calibri" pitchFamily="34" charset="-120"/>
-              </a:rPr>
-              <a:t>Это не сканер, а сборщик уровня: лёгкая опора, настоящие размеры, ходьба в браузере, честный отказ, повторяемость. Картинка проще — это осознанная граница.</a:t>
-            </a:r>
-            <a:endParaRPr lang="en-US" sz="1400" dirty="0"/>
-          </a:p>
-        </p:txBody>
-      </p:sp>
-      <p:sp>
-        <p:nvSpPr>
-          <p:cNvPr id="7" name="Text 5"/>
-          <p:cNvSpPr txBox="1"/>
-          <p:nvPr/>
-        </p:nvSpPr>
-        <p:spPr>
-          <a:xfrm>
-            <a:off x="457200" y="2880360"/>
-            <a:ext cx="3017520" cy="731520"/>
-          </a:xfrm>
-          <a:prstGeom prst="rect">
-            <a:avLst/>
-          </a:prstGeom>
-          <a:noFill/>
-          <a:ln/>
-        </p:spPr>
-        <p:txBody>
-          <a:bodyPr wrap="square" lIns="1016" tIns="1016" rIns="1016" bIns="1016" rtlCol="0" anchor="t"/>
-          <a:lstStyle/>
-          <a:p>
-            <a:pPr algn="l" indent="0" marL="0">
-              <a:buNone/>
-            </a:pPr>
-            <a:r>
-              <a:rPr lang="en-US" sz="1400" b="1" dirty="0">
-                <a:solidFill>
-                  <a:srgbClr val="111827"/>
-                </a:solidFill>
-                <a:latin typeface="Calibri" pitchFamily="34" charset="0"/>
-                <a:ea typeface="Calibri" pitchFamily="34" charset="-122"/>
-                <a:cs typeface="Calibri" pitchFamily="34" charset="-120"/>
-              </a:rPr>
-              <a:t>Почему такие показатели и как их измерить?</a:t>
-            </a:r>
-            <a:endParaRPr lang="en-US" sz="1400" dirty="0"/>
-          </a:p>
-        </p:txBody>
-      </p:sp>
-      <p:sp>
-        <p:nvSpPr>
-          <p:cNvPr id="8" name="Text 6"/>
-          <p:cNvSpPr txBox="1"/>
-          <p:nvPr/>
-        </p:nvSpPr>
-        <p:spPr>
-          <a:xfrm>
-            <a:off x="3566160" y="2880360"/>
-            <a:ext cx="5120640" cy="731520"/>
-          </a:xfrm>
-          <a:prstGeom prst="rect">
-            <a:avLst/>
-          </a:prstGeom>
-          <a:noFill/>
-          <a:ln/>
-        </p:spPr>
-        <p:txBody>
-          <a:bodyPr wrap="square" lIns="1016" tIns="1016" rIns="1016" bIns="1016" rtlCol="0" anchor="t"/>
-          <a:lstStyle/>
-          <a:p>
-            <a:pPr algn="l" indent="0" marL="0">
-              <a:buNone/>
-            </a:pPr>
-            <a:r>
-              <a:rPr lang="en-US" sz="1400" dirty="0">
-                <a:solidFill>
-                  <a:srgbClr val="374151"/>
-                </a:solidFill>
-                <a:latin typeface="Calibri" pitchFamily="34" charset="0"/>
-                <a:ea typeface="Calibri" pitchFamily="34" charset="-122"/>
-                <a:cs typeface="Calibri" pitchFamily="34" charset="-120"/>
-              </a:rPr>
-              <a:t>Каждый показатель — одна боль: ручная доводка, время, брак, вес карты. Измеряются прогоном четырёх эталонных съёмок по тестовой ссылке.</a:t>
-            </a:r>
-            <a:endParaRPr lang="en-US" sz="1400" dirty="0"/>
-          </a:p>
-        </p:txBody>
-      </p:sp>
-      <p:sp>
-        <p:nvSpPr>
-          <p:cNvPr id="9" name="Text 7"/>
-          <p:cNvSpPr txBox="1"/>
-          <p:nvPr/>
-        </p:nvSpPr>
-        <p:spPr>
-          <a:xfrm>
-            <a:off x="457200" y="3657600"/>
-            <a:ext cx="3017520" cy="731520"/>
-          </a:xfrm>
-          <a:prstGeom prst="rect">
-            <a:avLst/>
-          </a:prstGeom>
-          <a:noFill/>
-          <a:ln/>
-        </p:spPr>
-        <p:txBody>
-          <a:bodyPr wrap="square" lIns="1016" tIns="1016" rIns="1016" bIns="1016" rtlCol="0" anchor="t"/>
-          <a:lstStyle/>
-          <a:p>
-            <a:pPr algn="l" indent="0" marL="0">
-              <a:buNone/>
-            </a:pPr>
-            <a:r>
-              <a:rPr lang="en-US" sz="1400" b="1" dirty="0">
-                <a:solidFill>
-                  <a:srgbClr val="111827"/>
-                </a:solidFill>
-                <a:latin typeface="Calibri" pitchFamily="34" charset="0"/>
-                <a:ea typeface="Calibri" pitchFamily="34" charset="-122"/>
-                <a:cs typeface="Calibri" pitchFamily="34" charset="-120"/>
-              </a:rPr>
-              <a:t>Что вне проекта и почему?</a:t>
-            </a:r>
-            <a:endParaRPr lang="en-US" sz="1400" dirty="0"/>
-          </a:p>
-        </p:txBody>
-      </p:sp>
-      <p:sp>
-        <p:nvSpPr>
-          <p:cNvPr id="10" name="Text 8"/>
-          <p:cNvSpPr txBox="1"/>
-          <p:nvPr/>
-        </p:nvSpPr>
-        <p:spPr>
-          <a:xfrm>
-            <a:off x="3566160" y="3657600"/>
-            <a:ext cx="5120640" cy="731520"/>
-          </a:xfrm>
-          <a:prstGeom prst="rect">
-            <a:avLst/>
-          </a:prstGeom>
-          <a:noFill/>
-          <a:ln/>
-        </p:spPr>
-        <p:txBody>
-          <a:bodyPr wrap="square" lIns="1016" tIns="1016" rIns="1016" bIns="1016" rtlCol="0" anchor="t"/>
-          <a:lstStyle/>
-          <a:p>
-            <a:pPr algn="l" indent="0" marL="0">
-              <a:buNone/>
-            </a:pPr>
-            <a:r>
-              <a:rPr lang="en-US" sz="1400" dirty="0">
-                <a:solidFill>
-                  <a:srgbClr val="374151"/>
-                </a:solidFill>
-                <a:latin typeface="Calibri" pitchFamily="34" charset="0"/>
-                <a:ea typeface="Calibri" pitchFamily="34" charset="-122"/>
-                <a:cs typeface="Calibri" pitchFamily="34" charset="-120"/>
-              </a:rPr>
-              <a:t>Игра, Android, текстуры, своя модель глубины, панель администрирования. Один разработчик и фиксированный срок — в релиз входит только путь «снял — прошёл — забрал».</a:t>
-            </a:r>
-            <a:endParaRPr lang="en-US" sz="1400" dirty="0"/>
-          </a:p>
-        </p:txBody>
-      </p:sp>
-      <p:sp>
-        <p:nvSpPr>
-          <p:cNvPr id="11" name="section-ref"/>
-          <p:cNvSpPr txBox="1"/>
-          <p:nvPr/>
-        </p:nvSpPr>
-        <p:spPr>
-          <a:xfrm>
-            <a:off x="457200" y="4754880"/>
-            <a:ext cx="7498080" cy="274320"/>
-          </a:xfrm>
-          <a:prstGeom prst="rect">
-            <a:avLst/>
-          </a:prstGeom>
-          <a:noFill/>
-          <a:ln/>
-        </p:spPr>
-        <p:txBody>
-          <a:bodyPr wrap="square" lIns="0" tIns="0" rIns="0" bIns="0" rtlCol="0" anchor="t"/>
-          <a:lstStyle/>
-          <a:p>
-            <a:pPr algn="l" indent="0" marL="0">
-              <a:buNone/>
-            </a:pPr>
-            <a:r>
-              <a:rPr lang="en-US" sz="1000" dirty="0">
-                <a:solidFill>
-                  <a:srgbClr val="6B7280"/>
-                </a:solidFill>
-                <a:latin typeface="Calibri" pitchFamily="34" charset="0"/>
-                <a:ea typeface="Calibri" pitchFamily="34" charset="-122"/>
-                <a:cs typeface="Calibri" pitchFamily="34" charset="-120"/>
-              </a:rPr>
-              <a:t>Требования к защите: типовые вопросы комиссии</a:t>
-            </a:r>
-            <a:endParaRPr lang="en-US" sz="1000" dirty="0"/>
-          </a:p>
-        </p:txBody>
-      </p:sp>
-      <p:sp>
-        <p:nvSpPr>
-          <p:cNvPr id="25" name="Slide Number Placeholder 0"/>
-          <p:cNvSpPr>
-            <a:spLocks noGrp="1"/>
-          </p:cNvSpPr>
-          <p:nvPr>
-            <p:ph type="sldNum" sz="quarter" idx="4294967295"/>
-          </p:nvPr>
-        </p:nvSpPr>
-        <p:spPr>
-          <a:xfrm>
-            <a:off x="8229600" y="4754880"/>
-            <a:ext cx="457200" cy="274320"/>
-          </a:xfrm>
-          <a:prstGeom prst="rect">
-            <a:avLst/>
-          </a:prstGeom>
-          <a:extLst>
-            <a:ext uri="{C572A759-6A51-4108-AA02-DFA0A04FC94B}">
-              <ma14:wrappingTextBoxFlag xmlns:ma14="http://schemas.microsoft.com/office/mac/drawingml/2011/main" val="0"/>
-            </a:ext>
-          </a:extLst>
-        </p:spPr>
-        <p:txBody>
-          <a:bodyPr/>
-          <a:lstStyle>
-            <a:lvl1pPr>
-              <a:defRPr sz="1000">
-                <a:solidFill>
-                  <a:srgbClr val="6B7280"/>
-                </a:solidFill>
-                <a:latin typeface="Calibri"/>
-                <a:ea typeface="Calibri"/>
-                <a:cs typeface="Calibri"/>
-              </a:defRPr>
-            </a:lvl1pPr>
-          </a:lstStyle>
-          <a:p>
-            <a:pPr algn="r"/>
-            <a:fld id="{F7021451-1387-4CA6-816F-3879F97B5CBC}" type="slidenum">
-              <a:rPr b="0" lang="en-US"/>
-              <a:t>11</a:t>
-            </a:fld>
-            <a:endParaRPr lang="en-US"/>
-          </a:p>
-        </p:txBody>
-      </p:sp>
-    </p:spTree>
-  </p:cSld>
-  <p:clrMapOvr>
-    <a:masterClrMapping/>
-  </p:clrMapOvr>
-</p:sld>
-</file>
-
-<file path=ppt/slides/slide12.xml><?xml version="1.0" encoding="utf-8"?>
-<p:sld xmlns:a="http://schemas.openxmlformats.org/drawingml/2006/main" xmlns:r="http://schemas.openxmlformats.org/officeDocument/2006/relationships" xmlns:p="http://schemas.openxmlformats.org/presentationml/2006/main">
-  <p:cSld name="Slide 12">
-    <p:spTree>
-      <p:nvGrpSpPr>
-        <p:cNvPr id="1" name=""/>
-        <p:cNvGrpSpPr/>
-        <p:nvPr/>
-      </p:nvGrpSpPr>
-      <p:grpSpPr>
-        <a:xfrm>
-          <a:off x="0" y="0"/>
-          <a:ext cx="0" cy="0"/>
-          <a:chOff x="0" y="0"/>
-          <a:chExt cx="0" cy="0"/>
-        </a:xfrm>
-      </p:grpSpPr>
-      <p:sp>
-        <p:nvSpPr>
-          <p:cNvPr id="2" name="Text 0"/>
-          <p:cNvSpPr/>
-          <p:nvPr>
-            <p:ph idx="100" type="title" hasCustomPrompt="1"/>
-          </p:nvPr>
-        </p:nvSpPr>
-        <p:spPr>
-          <a:xfrm>
-            <a:off x="457200" y="658368"/>
-            <a:ext cx="8229600" cy="914400"/>
-          </a:xfrm>
-          <a:prstGeom prst="rect">
-            <a:avLst/>
-          </a:prstGeom>
-          <a:noFill/>
-          <a:ln/>
-        </p:spPr>
-        <p:txBody>
-          <a:bodyPr wrap="square" lIns="0" tIns="0" rIns="0" bIns="0" rtlCol="0" anchor="t"/>
-          <a:lstStyle/>
-          <a:p>
-            <a:pPr algn="l" indent="0" marL="0">
-              <a:buNone/>
-            </a:pPr>
-            <a:r>
-              <a:rPr lang="en-US" sz="2600" b="1" dirty="0">
-                <a:solidFill>
-                  <a:srgbClr val="111827"/>
-                </a:solidFill>
-                <a:latin typeface="Calibri" pitchFamily="34" charset="0"/>
-                <a:ea typeface="Calibri" pitchFamily="34" charset="-122"/>
-                <a:cs typeface="Calibri" pitchFamily="34" charset="-120"/>
-              </a:rPr>
-              <a:t>Ответы на типовые вопросы комиссии (2 из 2)</a:t>
-            </a:r>
-            <a:endParaRPr lang="en-US" sz="2600" dirty="0"/>
-          </a:p>
-        </p:txBody>
-      </p:sp>
-      <p:sp>
-        <p:nvSpPr>
-          <p:cNvPr id="3" name="Text 1"/>
-          <p:cNvSpPr txBox="1"/>
-          <p:nvPr/>
-        </p:nvSpPr>
-        <p:spPr>
-          <a:xfrm>
-            <a:off x="457200" y="1325880"/>
-            <a:ext cx="3017520" cy="731520"/>
-          </a:xfrm>
-          <a:prstGeom prst="rect">
-            <a:avLst/>
-          </a:prstGeom>
-          <a:noFill/>
-          <a:ln/>
-        </p:spPr>
-        <p:txBody>
-          <a:bodyPr wrap="square" lIns="1016" tIns="1016" rIns="1016" bIns="1016" rtlCol="0" anchor="t"/>
-          <a:lstStyle/>
-          <a:p>
-            <a:pPr algn="l" indent="0" marL="0">
-              <a:buNone/>
-            </a:pPr>
-            <a:r>
-              <a:rPr lang="en-US" sz="1400" b="1" dirty="0">
-                <a:solidFill>
-                  <a:srgbClr val="111827"/>
-                </a:solidFill>
-                <a:latin typeface="Calibri" pitchFamily="34" charset="0"/>
-                <a:ea typeface="Calibri" pitchFamily="34" charset="-122"/>
-                <a:cs typeface="Calibri" pitchFamily="34" charset="-120"/>
-              </a:rPr>
-              <a:t>Какие истории обязательны и что уберёте при нехватке времени?</a:t>
-            </a:r>
-            <a:endParaRPr lang="en-US" sz="1400" dirty="0"/>
-          </a:p>
-        </p:txBody>
-      </p:sp>
-      <p:sp>
-        <p:nvSpPr>
-          <p:cNvPr id="4" name="Text 2"/>
-          <p:cNvSpPr txBox="1"/>
-          <p:nvPr/>
-        </p:nvSpPr>
-        <p:spPr>
-          <a:xfrm>
-            <a:off x="3566160" y="1325880"/>
-            <a:ext cx="5120640" cy="731520"/>
-          </a:xfrm>
-          <a:prstGeom prst="rect">
-            <a:avLst/>
-          </a:prstGeom>
-          <a:noFill/>
-          <a:ln/>
-        </p:spPr>
-        <p:txBody>
-          <a:bodyPr wrap="square" lIns="1016" tIns="1016" rIns="1016" bIns="1016" rtlCol="0" anchor="t"/>
-          <a:lstStyle/>
-          <a:p>
-            <a:pPr algn="l" indent="0" marL="0">
-              <a:buNone/>
-            </a:pPr>
-            <a:r>
-              <a:rPr lang="en-US" sz="1400" dirty="0">
-                <a:solidFill>
-                  <a:srgbClr val="374151"/>
-                </a:solidFill>
-                <a:latin typeface="Calibri" pitchFamily="34" charset="0"/>
-                <a:ea typeface="Calibri" pitchFamily="34" charset="-122"/>
-                <a:cs typeface="Calibri" pitchFamily="34" charset="-120"/>
-              </a:rPr>
-              <a:t>Пятнадцать обязательных историй, без которых не достичь показателей. Первыми уходят желательные: подсказка обхода, фильтр, сравнение сборок, рост персонажа, инструкция для Godot.</a:t>
-            </a:r>
-            <a:endParaRPr lang="en-US" sz="1400" dirty="0"/>
-          </a:p>
-        </p:txBody>
-      </p:sp>
-      <p:sp>
-        <p:nvSpPr>
-          <p:cNvPr id="5" name="Text 3"/>
-          <p:cNvSpPr txBox="1"/>
-          <p:nvPr/>
-        </p:nvSpPr>
-        <p:spPr>
-          <a:xfrm>
-            <a:off x="457200" y="2103120"/>
-            <a:ext cx="3017520" cy="731520"/>
-          </a:xfrm>
-          <a:prstGeom prst="rect">
-            <a:avLst/>
-          </a:prstGeom>
-          <a:noFill/>
-          <a:ln/>
-        </p:spPr>
-        <p:txBody>
-          <a:bodyPr wrap="square" lIns="1016" tIns="1016" rIns="1016" bIns="1016" rtlCol="0" anchor="t"/>
-          <a:lstStyle/>
-          <a:p>
-            <a:pPr algn="l" indent="0" marL="0">
-              <a:buNone/>
-            </a:pPr>
-            <a:r>
-              <a:rPr lang="en-US" sz="1400" b="1" dirty="0">
-                <a:solidFill>
-                  <a:srgbClr val="111827"/>
-                </a:solidFill>
-                <a:latin typeface="Calibri" pitchFamily="34" charset="0"/>
-                <a:ea typeface="Calibri" pitchFamily="34" charset="-122"/>
-                <a:cs typeface="Calibri" pitchFamily="34" charset="-120"/>
-              </a:rPr>
-              <a:t>Какие персональные данные и на каком основании?</a:t>
-            </a:r>
-            <a:endParaRPr lang="en-US" sz="1400" dirty="0"/>
-          </a:p>
-        </p:txBody>
-      </p:sp>
-      <p:sp>
-        <p:nvSpPr>
-          <p:cNvPr id="6" name="Text 4"/>
-          <p:cNvSpPr txBox="1"/>
-          <p:nvPr/>
-        </p:nvSpPr>
-        <p:spPr>
-          <a:xfrm>
-            <a:off x="3566160" y="2103120"/>
-            <a:ext cx="5120640" cy="731520"/>
-          </a:xfrm>
-          <a:prstGeom prst="rect">
-            <a:avLst/>
-          </a:prstGeom>
-          <a:noFill/>
-          <a:ln/>
-        </p:spPr>
-        <p:txBody>
-          <a:bodyPr wrap="square" lIns="1016" tIns="1016" rIns="1016" bIns="1016" rtlCol="0" anchor="t"/>
-          <a:lstStyle/>
-          <a:p>
-            <a:pPr algn="l" indent="0" marL="0">
-              <a:buNone/>
-            </a:pPr>
-            <a:r>
-              <a:rPr lang="en-US" sz="1400" dirty="0">
-                <a:solidFill>
-                  <a:srgbClr val="374151"/>
-                </a:solidFill>
-                <a:latin typeface="Calibri" pitchFamily="34" charset="0"/>
-                <a:ea typeface="Calibri" pitchFamily="34" charset="-122"/>
-                <a:cs typeface="Calibri" pitchFamily="34" charset="-120"/>
-              </a:rPr>
-              <a:t>Ключ устройства, видео участка, сетевые адреса в журналах. Регламент Евросоюза о защите данных, статья 6: договор и законный интерес; хранение до 90 дней, удаление по запросу.</a:t>
-            </a:r>
-            <a:endParaRPr lang="en-US" sz="1400" dirty="0"/>
-          </a:p>
-        </p:txBody>
-      </p:sp>
-      <p:sp>
-        <p:nvSpPr>
-          <p:cNvPr id="7" name="Text 5"/>
-          <p:cNvSpPr txBox="1"/>
-          <p:nvPr/>
-        </p:nvSpPr>
-        <p:spPr>
-          <a:xfrm>
-            <a:off x="457200" y="2880360"/>
-            <a:ext cx="3017520" cy="731520"/>
-          </a:xfrm>
-          <a:prstGeom prst="rect">
-            <a:avLst/>
-          </a:prstGeom>
-          <a:noFill/>
-          <a:ln/>
-        </p:spPr>
-        <p:txBody>
-          <a:bodyPr wrap="square" lIns="1016" tIns="1016" rIns="1016" bIns="1016" rtlCol="0" anchor="t"/>
-          <a:lstStyle/>
-          <a:p>
-            <a:pPr algn="l" indent="0" marL="0">
-              <a:buNone/>
-            </a:pPr>
-            <a:r>
-              <a:rPr lang="en-US" sz="1400" b="1" dirty="0">
-                <a:solidFill>
-                  <a:srgbClr val="111827"/>
-                </a:solidFill>
-                <a:latin typeface="Calibri" pitchFamily="34" charset="0"/>
-                <a:ea typeface="Calibri" pitchFamily="34" charset="-122"/>
-                <a:cs typeface="Calibri" pitchFamily="34" charset="-120"/>
-              </a:rPr>
-              <a:t>Что самое рискованное?</a:t>
-            </a:r>
-            <a:endParaRPr lang="en-US" sz="1400" dirty="0"/>
-          </a:p>
-        </p:txBody>
-      </p:sp>
-      <p:sp>
-        <p:nvSpPr>
-          <p:cNvPr id="8" name="Text 6"/>
-          <p:cNvSpPr txBox="1"/>
-          <p:nvPr/>
-        </p:nvSpPr>
-        <p:spPr>
-          <a:xfrm>
-            <a:off x="3566160" y="2880360"/>
-            <a:ext cx="5120640" cy="731520"/>
-          </a:xfrm>
-          <a:prstGeom prst="rect">
-            <a:avLst/>
-          </a:prstGeom>
-          <a:noFill/>
-          <a:ln/>
-        </p:spPr>
-        <p:txBody>
-          <a:bodyPr wrap="square" lIns="1016" tIns="1016" rIns="1016" bIns="1016" rtlCol="0" anchor="t"/>
-          <a:lstStyle/>
-          <a:p>
-            <a:pPr algn="l" indent="0" marL="0">
-              <a:buNone/>
-            </a:pPr>
-            <a:r>
-              <a:rPr lang="en-US" sz="1400" dirty="0">
-                <a:solidFill>
-                  <a:srgbClr val="374151"/>
-                </a:solidFill>
-                <a:latin typeface="Calibri" pitchFamily="34" charset="0"/>
-                <a:ea typeface="Calibri" pitchFamily="34" charset="-122"/>
-                <a:cs typeface="Calibri" pitchFamily="34" charset="-120"/>
-              </a:rPr>
-              <a:t>Качество карты. Снижаем маленькой зоной, обязательными позами камеры и отказом вместо случайной геометрии; проверяем ходьбой до выдачи.</a:t>
-            </a:r>
-            <a:endParaRPr lang="en-US" sz="1400" dirty="0"/>
-          </a:p>
-        </p:txBody>
-      </p:sp>
-      <p:sp>
-        <p:nvSpPr>
-          <p:cNvPr id="9" name="section-ref"/>
-          <p:cNvSpPr txBox="1"/>
-          <p:nvPr/>
-        </p:nvSpPr>
-        <p:spPr>
-          <a:xfrm>
-            <a:off x="457200" y="4754880"/>
-            <a:ext cx="7498080" cy="274320"/>
-          </a:xfrm>
-          <a:prstGeom prst="rect">
-            <a:avLst/>
-          </a:prstGeom>
-          <a:noFill/>
-          <a:ln/>
-        </p:spPr>
-        <p:txBody>
-          <a:bodyPr wrap="square" lIns="0" tIns="0" rIns="0" bIns="0" rtlCol="0" anchor="t"/>
-          <a:lstStyle/>
-          <a:p>
-            <a:pPr algn="l" indent="0" marL="0">
-              <a:buNone/>
-            </a:pPr>
-            <a:r>
-              <a:rPr lang="en-US" sz="1000" dirty="0">
-                <a:solidFill>
-                  <a:srgbClr val="6B7280"/>
-                </a:solidFill>
-                <a:latin typeface="Calibri" pitchFamily="34" charset="0"/>
-                <a:ea typeface="Calibri" pitchFamily="34" charset="-122"/>
-                <a:cs typeface="Calibri" pitchFamily="34" charset="-120"/>
-              </a:rPr>
-              <a:t>Требования к защите: типовые вопросы комиссии</a:t>
-            </a:r>
-            <a:endParaRPr lang="en-US" sz="1000" dirty="0"/>
-          </a:p>
-        </p:txBody>
-      </p:sp>
-      <p:sp>
-        <p:nvSpPr>
-          <p:cNvPr id="25" name="Slide Number Placeholder 0"/>
-          <p:cNvSpPr>
-            <a:spLocks noGrp="1"/>
-          </p:cNvSpPr>
-          <p:nvPr>
-            <p:ph type="sldNum" sz="quarter" idx="4294967295"/>
-          </p:nvPr>
-        </p:nvSpPr>
-        <p:spPr>
-          <a:xfrm>
-            <a:off x="8229600" y="4754880"/>
-            <a:ext cx="457200" cy="274320"/>
-          </a:xfrm>
-          <a:prstGeom prst="rect">
-            <a:avLst/>
-          </a:prstGeom>
-          <a:extLst>
-            <a:ext uri="{C572A759-6A51-4108-AA02-DFA0A04FC94B}">
-              <ma14:wrappingTextBoxFlag xmlns:ma14="http://schemas.microsoft.com/office/mac/drawingml/2011/main" val="0"/>
-            </a:ext>
-          </a:extLst>
-        </p:spPr>
-        <p:txBody>
-          <a:bodyPr/>
-          <a:lstStyle>
-            <a:lvl1pPr>
-              <a:defRPr sz="1000">
-                <a:solidFill>
-                  <a:srgbClr val="6B7280"/>
-                </a:solidFill>
-                <a:latin typeface="Calibri"/>
-                <a:ea typeface="Calibri"/>
-                <a:cs typeface="Calibri"/>
-              </a:defRPr>
-            </a:lvl1pPr>
-          </a:lstStyle>
-          <a:p>
-            <a:pPr algn="r"/>
-            <a:fld id="{F7021451-1387-4CA6-816F-3879F97B5CBC}" type="slidenum">
-              <a:rPr b="0" lang="en-US"/>
-              <a:t>12</a:t>
-            </a:fld>
-            <a:endParaRPr lang="en-US"/>
-          </a:p>
-        </p:txBody>
-      </p:sp>
-    </p:spTree>
-  </p:cSld>
-  <p:clrMapOvr>
-    <a:masterClrMapping/>
-  </p:clrMapOvr>
-</p:sld>
-</file>
-
 <file path=ppt/slides/slide2.xml><?xml version="1.0" encoding="utf-8"?>
 <p:sld xmlns:a="http://schemas.openxmlformats.org/drawingml/2006/main" xmlns:r="http://schemas.openxmlformats.org/officeDocument/2006/relationships" xmlns:p="http://schemas.openxmlformats.org/presentationml/2006/main">
   <p:cSld name="Slide 2">
@@ -3690,388 +2012,7 @@
       </p:grpSpPr>
       <p:sp>
         <p:nvSpPr>
-          <p:cNvPr id="2" name="chain-0"/>
-          <p:cNvSpPr/>
-          <p:nvPr/>
-        </p:nvSpPr>
-        <p:spPr>
-          <a:xfrm>
-            <a:off x="457200" y="274320"/>
-            <a:ext cx="822960" cy="256032"/>
-          </a:xfrm>
-          <a:prstGeom prst="roundRect">
-            <a:avLst>
-              <a:gd name="adj" fmla="val 28571"/>
-            </a:avLst>
-          </a:prstGeom>
-          <a:solidFill>
-            <a:srgbClr val="0F766E"/>
-          </a:solidFill>
-          <a:ln w="12700">
-            <a:solidFill>
-              <a:srgbClr val="0F766E"/>
-            </a:solidFill>
-            <a:prstDash val="solid"/>
-          </a:ln>
-        </p:spPr>
-      </p:sp>
-      <p:sp>
-        <p:nvSpPr>
-          <p:cNvPr id="3" name="Text 1"/>
-          <p:cNvSpPr txBox="1"/>
-          <p:nvPr/>
-        </p:nvSpPr>
-        <p:spPr>
-          <a:xfrm>
-            <a:off x="457200" y="274320"/>
-            <a:ext cx="822960" cy="256032"/>
-          </a:xfrm>
-          <a:prstGeom prst="rect">
-            <a:avLst/>
-          </a:prstGeom>
-          <a:noFill/>
-          <a:ln/>
-        </p:spPr>
-        <p:txBody>
-          <a:bodyPr wrap="square" lIns="0" tIns="0" rIns="0" bIns="0" rtlCol="0" anchor="ctr"/>
-          <a:lstStyle/>
-          <a:p>
-            <a:pPr algn="ctr" indent="0" marL="0">
-              <a:buNone/>
-            </a:pPr>
-            <a:r>
-              <a:rPr lang="en-US" sz="1000" dirty="0">
-                <a:solidFill>
-                  <a:srgbClr val="FFFFFF"/>
-                </a:solidFill>
-                <a:latin typeface="Calibri" pitchFamily="34" charset="0"/>
-                <a:ea typeface="Calibri" pitchFamily="34" charset="-122"/>
-                <a:cs typeface="Calibri" pitchFamily="34" charset="-120"/>
-              </a:rPr>
-              <a:t>Проблема</a:t>
-            </a:r>
-            <a:endParaRPr lang="en-US" sz="1000" dirty="0"/>
-          </a:p>
-        </p:txBody>
-      </p:sp>
-      <p:sp>
-        <p:nvSpPr>
-          <p:cNvPr id="4" name="Text 2"/>
-          <p:cNvSpPr txBox="1"/>
-          <p:nvPr/>
-        </p:nvSpPr>
-        <p:spPr>
-          <a:xfrm>
-            <a:off x="1280160" y="274320"/>
-            <a:ext cx="228600" cy="256032"/>
-          </a:xfrm>
-          <a:prstGeom prst="rect">
-            <a:avLst/>
-          </a:prstGeom>
-          <a:noFill/>
-          <a:ln/>
-        </p:spPr>
-        <p:txBody>
-          <a:bodyPr wrap="square" lIns="0" tIns="0" rIns="0" bIns="0" rtlCol="0" anchor="ctr"/>
-          <a:lstStyle/>
-          <a:p>
-            <a:pPr algn="ctr" indent="0" marL="0">
-              <a:buNone/>
-            </a:pPr>
-            <a:r>
-              <a:rPr lang="en-US" sz="1000" dirty="0">
-                <a:solidFill>
-                  <a:srgbClr val="6B7280"/>
-                </a:solidFill>
-                <a:latin typeface="Calibri" pitchFamily="34" charset="0"/>
-                <a:ea typeface="Calibri" pitchFamily="34" charset="-122"/>
-                <a:cs typeface="Calibri" pitchFamily="34" charset="-120"/>
-              </a:rPr>
-              <a:t>→</a:t>
-            </a:r>
-            <a:endParaRPr lang="en-US" sz="1000" dirty="0"/>
-          </a:p>
-        </p:txBody>
-      </p:sp>
-      <p:sp>
-        <p:nvSpPr>
-          <p:cNvPr id="5" name="chain-1"/>
-          <p:cNvSpPr/>
-          <p:nvPr/>
-        </p:nvSpPr>
-        <p:spPr>
-          <a:xfrm>
-            <a:off x="1508760" y="274320"/>
-            <a:ext cx="512064" cy="256032"/>
-          </a:xfrm>
-          <a:prstGeom prst="roundRect">
-            <a:avLst>
-              <a:gd name="adj" fmla="val 28571"/>
-            </a:avLst>
-          </a:prstGeom>
-          <a:solidFill>
-            <a:srgbClr val="FFFFFF"/>
-          </a:solidFill>
-          <a:ln w="12700">
-            <a:solidFill>
-              <a:srgbClr val="E5E7EB"/>
-            </a:solidFill>
-            <a:prstDash val="solid"/>
-          </a:ln>
-        </p:spPr>
-      </p:sp>
-      <p:sp>
-        <p:nvSpPr>
-          <p:cNvPr id="6" name="Text 4"/>
-          <p:cNvSpPr txBox="1"/>
-          <p:nvPr/>
-        </p:nvSpPr>
-        <p:spPr>
-          <a:xfrm>
-            <a:off x="1508760" y="274320"/>
-            <a:ext cx="512064" cy="256032"/>
-          </a:xfrm>
-          <a:prstGeom prst="rect">
-            <a:avLst/>
-          </a:prstGeom>
-          <a:noFill/>
-          <a:ln/>
-        </p:spPr>
-        <p:txBody>
-          <a:bodyPr wrap="square" lIns="0" tIns="0" rIns="0" bIns="0" rtlCol="0" anchor="ctr"/>
-          <a:lstStyle/>
-          <a:p>
-            <a:pPr algn="ctr" indent="0" marL="0">
-              <a:buNone/>
-            </a:pPr>
-            <a:r>
-              <a:rPr lang="en-US" sz="1000" dirty="0">
-                <a:solidFill>
-                  <a:srgbClr val="6B7280"/>
-                </a:solidFill>
-                <a:latin typeface="Calibri" pitchFamily="34" charset="0"/>
-                <a:ea typeface="Calibri" pitchFamily="34" charset="-122"/>
-                <a:cs typeface="Calibri" pitchFamily="34" charset="-120"/>
-              </a:rPr>
-              <a:t>Цель</a:t>
-            </a:r>
-            <a:endParaRPr lang="en-US" sz="1000" dirty="0"/>
-          </a:p>
-        </p:txBody>
-      </p:sp>
-      <p:sp>
-        <p:nvSpPr>
-          <p:cNvPr id="7" name="Text 5"/>
-          <p:cNvSpPr txBox="1"/>
-          <p:nvPr/>
-        </p:nvSpPr>
-        <p:spPr>
-          <a:xfrm>
-            <a:off x="2020824" y="274320"/>
-            <a:ext cx="228600" cy="256032"/>
-          </a:xfrm>
-          <a:prstGeom prst="rect">
-            <a:avLst/>
-          </a:prstGeom>
-          <a:noFill/>
-          <a:ln/>
-        </p:spPr>
-        <p:txBody>
-          <a:bodyPr wrap="square" lIns="0" tIns="0" rIns="0" bIns="0" rtlCol="0" anchor="ctr"/>
-          <a:lstStyle/>
-          <a:p>
-            <a:pPr algn="ctr" indent="0" marL="0">
-              <a:buNone/>
-            </a:pPr>
-            <a:r>
-              <a:rPr lang="en-US" sz="1000" dirty="0">
-                <a:solidFill>
-                  <a:srgbClr val="6B7280"/>
-                </a:solidFill>
-                <a:latin typeface="Calibri" pitchFamily="34" charset="0"/>
-                <a:ea typeface="Calibri" pitchFamily="34" charset="-122"/>
-                <a:cs typeface="Calibri" pitchFamily="34" charset="-120"/>
-              </a:rPr>
-              <a:t>→</a:t>
-            </a:r>
-            <a:endParaRPr lang="en-US" sz="1000" dirty="0"/>
-          </a:p>
-        </p:txBody>
-      </p:sp>
-      <p:sp>
-        <p:nvSpPr>
-          <p:cNvPr id="8" name="chain-2"/>
-          <p:cNvSpPr/>
-          <p:nvPr/>
-        </p:nvSpPr>
-        <p:spPr>
-          <a:xfrm>
-            <a:off x="2249424" y="274320"/>
-            <a:ext cx="978408" cy="256032"/>
-          </a:xfrm>
-          <a:prstGeom prst="roundRect">
-            <a:avLst>
-              <a:gd name="adj" fmla="val 28571"/>
-            </a:avLst>
-          </a:prstGeom>
-          <a:solidFill>
-            <a:srgbClr val="FFFFFF"/>
-          </a:solidFill>
-          <a:ln w="12700">
-            <a:solidFill>
-              <a:srgbClr val="E5E7EB"/>
-            </a:solidFill>
-            <a:prstDash val="solid"/>
-          </a:ln>
-        </p:spPr>
-      </p:sp>
-      <p:sp>
-        <p:nvSpPr>
-          <p:cNvPr id="9" name="Text 7"/>
-          <p:cNvSpPr txBox="1"/>
-          <p:nvPr/>
-        </p:nvSpPr>
-        <p:spPr>
-          <a:xfrm>
-            <a:off x="2249424" y="274320"/>
-            <a:ext cx="978408" cy="256032"/>
-          </a:xfrm>
-          <a:prstGeom prst="rect">
-            <a:avLst/>
-          </a:prstGeom>
-          <a:noFill/>
-          <a:ln/>
-        </p:spPr>
-        <p:txBody>
-          <a:bodyPr wrap="square" lIns="0" tIns="0" rIns="0" bIns="0" rtlCol="0" anchor="ctr"/>
-          <a:lstStyle/>
-          <a:p>
-            <a:pPr algn="ctr" indent="0" marL="0">
-              <a:buNone/>
-            </a:pPr>
-            <a:r>
-              <a:rPr lang="en-US" sz="1000" dirty="0">
-                <a:solidFill>
-                  <a:srgbClr val="6B7280"/>
-                </a:solidFill>
-                <a:latin typeface="Calibri" pitchFamily="34" charset="0"/>
-                <a:ea typeface="Calibri" pitchFamily="34" charset="-122"/>
-                <a:cs typeface="Calibri" pitchFamily="34" charset="-120"/>
-              </a:rPr>
-              <a:t>Показатели</a:t>
-            </a:r>
-            <a:endParaRPr lang="en-US" sz="1000" dirty="0"/>
-          </a:p>
-        </p:txBody>
-      </p:sp>
-      <p:sp>
-        <p:nvSpPr>
-          <p:cNvPr id="10" name="Text 8"/>
-          <p:cNvSpPr txBox="1"/>
-          <p:nvPr/>
-        </p:nvSpPr>
-        <p:spPr>
-          <a:xfrm>
-            <a:off x="3227832" y="274320"/>
-            <a:ext cx="228600" cy="256032"/>
-          </a:xfrm>
-          <a:prstGeom prst="rect">
-            <a:avLst/>
-          </a:prstGeom>
-          <a:noFill/>
-          <a:ln/>
-        </p:spPr>
-        <p:txBody>
-          <a:bodyPr wrap="square" lIns="0" tIns="0" rIns="0" bIns="0" rtlCol="0" anchor="ctr"/>
-          <a:lstStyle/>
-          <a:p>
-            <a:pPr algn="ctr" indent="0" marL="0">
-              <a:buNone/>
-            </a:pPr>
-            <a:r>
-              <a:rPr lang="en-US" sz="1000" dirty="0">
-                <a:solidFill>
-                  <a:srgbClr val="6B7280"/>
-                </a:solidFill>
-                <a:latin typeface="Calibri" pitchFamily="34" charset="0"/>
-                <a:ea typeface="Calibri" pitchFamily="34" charset="-122"/>
-                <a:cs typeface="Calibri" pitchFamily="34" charset="-120"/>
-              </a:rPr>
-              <a:t>→</a:t>
-            </a:r>
-            <a:endParaRPr lang="en-US" sz="1000" dirty="0"/>
-          </a:p>
-        </p:txBody>
-      </p:sp>
-      <p:sp>
-        <p:nvSpPr>
-          <p:cNvPr id="11" name="chain-3"/>
-          <p:cNvSpPr/>
-          <p:nvPr/>
-        </p:nvSpPr>
-        <p:spPr>
-          <a:xfrm>
-            <a:off x="3456432" y="274320"/>
-            <a:ext cx="589788" cy="256032"/>
-          </a:xfrm>
-          <a:prstGeom prst="roundRect">
-            <a:avLst>
-              <a:gd name="adj" fmla="val 28571"/>
-            </a:avLst>
-          </a:prstGeom>
-          <a:solidFill>
-            <a:srgbClr val="FFFFFF"/>
-          </a:solidFill>
-          <a:ln w="12700">
-            <a:solidFill>
-              <a:srgbClr val="E5E7EB"/>
-            </a:solidFill>
-            <a:prstDash val="solid"/>
-          </a:ln>
-        </p:spPr>
-      </p:sp>
-      <p:sp>
-        <p:nvSpPr>
-          <p:cNvPr id="12" name="Text 10"/>
-          <p:cNvSpPr txBox="1"/>
-          <p:nvPr/>
-        </p:nvSpPr>
-        <p:spPr>
-          <a:xfrm>
-            <a:off x="3456432" y="274320"/>
-            <a:ext cx="589788" cy="256032"/>
-          </a:xfrm>
-          <a:prstGeom prst="rect">
-            <a:avLst/>
-          </a:prstGeom>
-          <a:noFill/>
-          <a:ln/>
-        </p:spPr>
-        <p:txBody>
-          <a:bodyPr wrap="square" lIns="0" tIns="0" rIns="0" bIns="0" rtlCol="0" anchor="ctr"/>
-          <a:lstStyle/>
-          <a:p>
-            <a:pPr algn="ctr" indent="0" marL="0">
-              <a:buNone/>
-            </a:pPr>
-            <a:r>
-              <a:rPr lang="en-US" sz="1000" dirty="0">
-                <a:solidFill>
-                  <a:srgbClr val="6B7280"/>
-                </a:solidFill>
-                <a:latin typeface="Calibri" pitchFamily="34" charset="0"/>
-                <a:ea typeface="Calibri" pitchFamily="34" charset="-122"/>
-                <a:cs typeface="Calibri" pitchFamily="34" charset="-120"/>
-              </a:rPr>
-              <a:t>Эпики</a:t>
-            </a:r>
-            <a:endParaRPr lang="en-US" sz="1000" dirty="0"/>
-          </a:p>
-        </p:txBody>
-      </p:sp>
-      <p:sp>
-        <p:nvSpPr>
-          <p:cNvPr id="13" name="Text 0"/>
+          <p:cNvPr id="2" name="Text 0"/>
           <p:cNvSpPr/>
           <p:nvPr>
             <p:ph idx="100" type="title" hasCustomPrompt="1"/>
@@ -4079,7 +2020,7 @@
         </p:nvSpPr>
         <p:spPr>
           <a:xfrm>
-            <a:off x="457200" y="658368"/>
+            <a:off x="457200" y="411480"/>
             <a:ext cx="8229600" cy="914400"/>
           </a:xfrm>
           <a:prstGeom prst="rect">
@@ -4112,13 +2053,13 @@
       </p:sp>
       <p:sp>
         <p:nvSpPr>
-          <p:cNvPr id="14" name="number"/>
+          <p:cNvPr id="3" name="number"/>
           <p:cNvSpPr txBox="1"/>
           <p:nvPr/>
         </p:nvSpPr>
         <p:spPr>
           <a:xfrm>
-            <a:off x="457200" y="1920240"/>
+            <a:off x="457200" y="1783080"/>
             <a:ext cx="4023360" cy="1097280"/>
           </a:xfrm>
           <a:prstGeom prst="rect">
@@ -4151,13 +2092,13 @@
       </p:sp>
       <p:sp>
         <p:nvSpPr>
-          <p:cNvPr id="15" name="Text 13"/>
+          <p:cNvPr id="4" name="Text 2"/>
           <p:cNvSpPr txBox="1"/>
           <p:nvPr/>
         </p:nvSpPr>
         <p:spPr>
           <a:xfrm>
-            <a:off x="457200" y="3063240"/>
+            <a:off x="457200" y="2926080"/>
             <a:ext cx="3840480" cy="822960"/>
           </a:xfrm>
           <a:prstGeom prst="rect">
@@ -4190,13 +2131,13 @@
       </p:sp>
       <p:sp>
         <p:nvSpPr>
-          <p:cNvPr id="16" name="Text 14"/>
+          <p:cNvPr id="5" name="Text 3"/>
           <p:cNvSpPr txBox="1"/>
           <p:nvPr/>
         </p:nvSpPr>
         <p:spPr>
           <a:xfrm>
-            <a:off x="4754880" y="2286000"/>
+            <a:off x="4754880" y="2148840"/>
             <a:ext cx="3931920" cy="1463040"/>
           </a:xfrm>
           <a:prstGeom prst="rect">
@@ -4229,7 +2170,7 @@
       </p:sp>
       <p:sp>
         <p:nvSpPr>
-          <p:cNvPr id="17" name="section-ref"/>
+          <p:cNvPr id="6" name="section-ref"/>
           <p:cNvSpPr txBox="1"/>
           <p:nvPr/>
         </p:nvSpPr>
@@ -4341,18 +2282,504 @@
       </p:grpSpPr>
       <p:sp>
         <p:nvSpPr>
-          <p:cNvPr id="2" name="chain-0"/>
+          <p:cNvPr id="2" name="Text 0"/>
           <p:cNvSpPr/>
-          <p:nvPr/>
-        </p:nvSpPr>
-        <p:spPr>
-          <a:xfrm>
-            <a:off x="457200" y="274320"/>
-            <a:ext cx="822960" cy="256032"/>
+          <p:nvPr>
+            <p:ph idx="100" type="title" hasCustomPrompt="1"/>
+          </p:nvPr>
+        </p:nvSpPr>
+        <p:spPr>
+          <a:xfrm>
+            <a:off x="457200" y="411480"/>
+            <a:ext cx="8229600" cy="914400"/>
+          </a:xfrm>
+          <a:prstGeom prst="rect">
+            <a:avLst/>
+          </a:prstGeom>
+          <a:noFill/>
+          <a:ln/>
+        </p:spPr>
+        <p:txBody>
+          <a:bodyPr wrap="square" lIns="0" tIns="0" rIns="0" bIns="0" rtlCol="0" anchor="t"/>
+          <a:lstStyle/>
+          <a:p>
+            <a:pPr algn="l" indent="0" marL="0">
+              <a:buNone/>
+            </a:pPr>
+            <a:r>
+              <a:rPr lang="en-US" sz="2600" b="1" dirty="0">
+                <a:solidFill>
+                  <a:srgbClr val="111827"/>
+                </a:solidFill>
+                <a:latin typeface="Calibri" pitchFamily="34" charset="0"/>
+                <a:ea typeface="Calibri" pitchFamily="34" charset="-122"/>
+                <a:cs typeface="Calibri" pitchFamily="34" charset="-120"/>
+              </a:rPr>
+              <a:t>Один обход телефоном — и проходимый уровень без ручной доводки</a:t>
+            </a:r>
+            <a:endParaRPr lang="en-US" sz="2600" dirty="0"/>
+          </a:p>
+        </p:txBody>
+      </p:sp>
+      <p:sp>
+        <p:nvSpPr>
+          <p:cNvPr id="3" name="task-0"/>
+          <p:cNvSpPr/>
+          <p:nvPr/>
+        </p:nvSpPr>
+        <p:spPr>
+          <a:xfrm>
+            <a:off x="457200" y="1600200"/>
+            <a:ext cx="1536192" cy="1051560"/>
           </a:xfrm>
           <a:prstGeom prst="roundRect">
             <a:avLst>
-              <a:gd name="adj" fmla="val 28571"/>
+              <a:gd name="adj" fmla="val 6957"/>
+            </a:avLst>
+          </a:prstGeom>
+          <a:solidFill>
+            <a:srgbClr val="F3F8F7"/>
+          </a:solidFill>
+          <a:ln w="12700">
+            <a:solidFill>
+              <a:srgbClr val="CFE9E4"/>
+            </a:solidFill>
+            <a:prstDash val="solid"/>
+          </a:ln>
+        </p:spPr>
+      </p:sp>
+      <p:sp>
+        <p:nvSpPr>
+          <p:cNvPr id="4" name="Text 2"/>
+          <p:cNvSpPr txBox="1"/>
+          <p:nvPr/>
+        </p:nvSpPr>
+        <p:spPr>
+          <a:xfrm>
+            <a:off x="530352" y="1655064"/>
+            <a:ext cx="1389888" cy="941832"/>
+          </a:xfrm>
+          <a:prstGeom prst="rect">
+            <a:avLst/>
+          </a:prstGeom>
+          <a:noFill/>
+          <a:ln/>
+        </p:spPr>
+        <p:txBody>
+          <a:bodyPr wrap="square" lIns="1016" tIns="1016" rIns="1016" bIns="1016" rtlCol="0" anchor="t"/>
+          <a:lstStyle/>
+          <a:p>
+            <a:pPr algn="l" indent="0" marL="0">
+              <a:spcAft>
+                <a:spcPts val="300"/>
+              </a:spcAft>
+              <a:buNone/>
+            </a:pPr>
+            <a:r>
+              <a:rPr lang="en-US" sz="1000" dirty="0">
+                <a:solidFill>
+                  <a:srgbClr val="0F766E"/>
+                </a:solidFill>
+                <a:latin typeface="Calibri" pitchFamily="34" charset="0"/>
+                <a:ea typeface="Calibri" pitchFamily="34" charset="-122"/>
+                <a:cs typeface="Calibri" pitchFamily="34" charset="-120"/>
+              </a:rPr>
+              <a:t>Раздел 1.1</a:t>
+            </a:r>
+            <a:endParaRPr lang="en-US" sz="1400" dirty="0"/>
+          </a:p>
+          <a:p>
+            <a:pPr algn="l" indent="0" marL="0">
+              <a:spcAft>
+                <a:spcPts val="300"/>
+              </a:spcAft>
+              <a:buNone/>
+            </a:pPr>
+            <a:r>
+              <a:rPr lang="en-US" sz="1400" b="1" dirty="0">
+                <a:solidFill>
+                  <a:srgbClr val="111827"/>
+                </a:solidFill>
+                <a:latin typeface="Calibri" pitchFamily="34" charset="0"/>
+                <a:ea typeface="Calibri" pitchFamily="34" charset="-122"/>
+                <a:cs typeface="Calibri" pitchFamily="34" charset="-120"/>
+              </a:rPr>
+              <a:t>Как делают сейчас</a:t>
+            </a:r>
+            <a:endParaRPr lang="en-US" sz="1400" dirty="0"/>
+          </a:p>
+        </p:txBody>
+      </p:sp>
+      <p:sp>
+        <p:nvSpPr>
+          <p:cNvPr id="5" name="task-1"/>
+          <p:cNvSpPr/>
+          <p:nvPr/>
+        </p:nvSpPr>
+        <p:spPr>
+          <a:xfrm>
+            <a:off x="2130552" y="1600200"/>
+            <a:ext cx="1536192" cy="1051560"/>
+          </a:xfrm>
+          <a:prstGeom prst="roundRect">
+            <a:avLst>
+              <a:gd name="adj" fmla="val 6957"/>
+            </a:avLst>
+          </a:prstGeom>
+          <a:solidFill>
+            <a:srgbClr val="F3F8F7"/>
+          </a:solidFill>
+          <a:ln w="12700">
+            <a:solidFill>
+              <a:srgbClr val="CFE9E4"/>
+            </a:solidFill>
+            <a:prstDash val="solid"/>
+          </a:ln>
+        </p:spPr>
+      </p:sp>
+      <p:sp>
+        <p:nvSpPr>
+          <p:cNvPr id="6" name="Text 4"/>
+          <p:cNvSpPr txBox="1"/>
+          <p:nvPr/>
+        </p:nvSpPr>
+        <p:spPr>
+          <a:xfrm>
+            <a:off x="2203704" y="1655064"/>
+            <a:ext cx="1389888" cy="941832"/>
+          </a:xfrm>
+          <a:prstGeom prst="rect">
+            <a:avLst/>
+          </a:prstGeom>
+          <a:noFill/>
+          <a:ln/>
+        </p:spPr>
+        <p:txBody>
+          <a:bodyPr wrap="square" lIns="1016" tIns="1016" rIns="1016" bIns="1016" rtlCol="0" anchor="t"/>
+          <a:lstStyle/>
+          <a:p>
+            <a:pPr algn="l" indent="0" marL="0">
+              <a:spcAft>
+                <a:spcPts val="300"/>
+              </a:spcAft>
+              <a:buNone/>
+            </a:pPr>
+            <a:r>
+              <a:rPr lang="en-US" sz="1000" dirty="0">
+                <a:solidFill>
+                  <a:srgbClr val="0F766E"/>
+                </a:solidFill>
+                <a:latin typeface="Calibri" pitchFamily="34" charset="0"/>
+                <a:ea typeface="Calibri" pitchFamily="34" charset="-122"/>
+                <a:cs typeface="Calibri" pitchFamily="34" charset="-120"/>
+              </a:rPr>
+              <a:t>Разделы 1.2–1.3</a:t>
+            </a:r>
+            <a:endParaRPr lang="en-US" sz="1400" dirty="0"/>
+          </a:p>
+          <a:p>
+            <a:pPr algn="l" indent="0" marL="0">
+              <a:spcAft>
+                <a:spcPts val="300"/>
+              </a:spcAft>
+              <a:buNone/>
+            </a:pPr>
+            <a:r>
+              <a:rPr lang="en-US" sz="1400" b="1" dirty="0">
+                <a:solidFill>
+                  <a:srgbClr val="111827"/>
+                </a:solidFill>
+                <a:latin typeface="Calibri" pitchFamily="34" charset="0"/>
+                <a:ea typeface="Calibri" pitchFamily="34" charset="-122"/>
+                <a:cs typeface="Calibri" pitchFamily="34" charset="-120"/>
+              </a:rPr>
+              <a:t>Источники и аналоги</a:t>
+            </a:r>
+            <a:endParaRPr lang="en-US" sz="1400" dirty="0"/>
+          </a:p>
+        </p:txBody>
+      </p:sp>
+      <p:sp>
+        <p:nvSpPr>
+          <p:cNvPr id="7" name="task-2"/>
+          <p:cNvSpPr/>
+          <p:nvPr/>
+        </p:nvSpPr>
+        <p:spPr>
+          <a:xfrm>
+            <a:off x="3803904" y="1600200"/>
+            <a:ext cx="1536192" cy="1051560"/>
+          </a:xfrm>
+          <a:prstGeom prst="roundRect">
+            <a:avLst>
+              <a:gd name="adj" fmla="val 6957"/>
+            </a:avLst>
+          </a:prstGeom>
+          <a:solidFill>
+            <a:srgbClr val="F3F8F7"/>
+          </a:solidFill>
+          <a:ln w="12700">
+            <a:solidFill>
+              <a:srgbClr val="CFE9E4"/>
+            </a:solidFill>
+            <a:prstDash val="solid"/>
+          </a:ln>
+        </p:spPr>
+      </p:sp>
+      <p:sp>
+        <p:nvSpPr>
+          <p:cNvPr id="8" name="Text 6"/>
+          <p:cNvSpPr txBox="1"/>
+          <p:nvPr/>
+        </p:nvSpPr>
+        <p:spPr>
+          <a:xfrm>
+            <a:off x="3877056" y="1655064"/>
+            <a:ext cx="1389888" cy="941832"/>
+          </a:xfrm>
+          <a:prstGeom prst="rect">
+            <a:avLst/>
+          </a:prstGeom>
+          <a:noFill/>
+          <a:ln/>
+        </p:spPr>
+        <p:txBody>
+          <a:bodyPr wrap="square" lIns="1016" tIns="1016" rIns="1016" bIns="1016" rtlCol="0" anchor="t"/>
+          <a:lstStyle/>
+          <a:p>
+            <a:pPr algn="l" indent="0" marL="0">
+              <a:spcAft>
+                <a:spcPts val="300"/>
+              </a:spcAft>
+              <a:buNone/>
+            </a:pPr>
+            <a:r>
+              <a:rPr lang="en-US" sz="1000" dirty="0">
+                <a:solidFill>
+                  <a:srgbClr val="0F766E"/>
+                </a:solidFill>
+                <a:latin typeface="Calibri" pitchFamily="34" charset="0"/>
+                <a:ea typeface="Calibri" pitchFamily="34" charset="-122"/>
+                <a:cs typeface="Calibri" pitchFamily="34" charset="-120"/>
+              </a:rPr>
+              <a:t>Раздел 2.1</a:t>
+            </a:r>
+            <a:endParaRPr lang="en-US" sz="1400" dirty="0"/>
+          </a:p>
+          <a:p>
+            <a:pPr algn="l" indent="0" marL="0">
+              <a:spcAft>
+                <a:spcPts val="300"/>
+              </a:spcAft>
+              <a:buNone/>
+            </a:pPr>
+            <a:r>
+              <a:rPr lang="en-US" sz="1400" b="1" dirty="0">
+                <a:solidFill>
+                  <a:srgbClr val="111827"/>
+                </a:solidFill>
+                <a:latin typeface="Calibri" pitchFamily="34" charset="0"/>
+                <a:ea typeface="Calibri" pitchFamily="34" charset="-122"/>
+                <a:cs typeface="Calibri" pitchFamily="34" charset="-120"/>
+              </a:rPr>
+              <a:t>Видение и показатели</a:t>
+            </a:r>
+            <a:endParaRPr lang="en-US" sz="1400" dirty="0"/>
+          </a:p>
+        </p:txBody>
+      </p:sp>
+      <p:sp>
+        <p:nvSpPr>
+          <p:cNvPr id="9" name="task-3"/>
+          <p:cNvSpPr/>
+          <p:nvPr/>
+        </p:nvSpPr>
+        <p:spPr>
+          <a:xfrm>
+            <a:off x="5477256" y="1600200"/>
+            <a:ext cx="1536192" cy="1051560"/>
+          </a:xfrm>
+          <a:prstGeom prst="roundRect">
+            <a:avLst>
+              <a:gd name="adj" fmla="val 6957"/>
+            </a:avLst>
+          </a:prstGeom>
+          <a:solidFill>
+            <a:srgbClr val="F3F8F7"/>
+          </a:solidFill>
+          <a:ln w="12700">
+            <a:solidFill>
+              <a:srgbClr val="CFE9E4"/>
+            </a:solidFill>
+            <a:prstDash val="solid"/>
+          </a:ln>
+        </p:spPr>
+      </p:sp>
+      <p:sp>
+        <p:nvSpPr>
+          <p:cNvPr id="10" name="Text 8"/>
+          <p:cNvSpPr txBox="1"/>
+          <p:nvPr/>
+        </p:nvSpPr>
+        <p:spPr>
+          <a:xfrm>
+            <a:off x="5550408" y="1655064"/>
+            <a:ext cx="1389888" cy="941832"/>
+          </a:xfrm>
+          <a:prstGeom prst="rect">
+            <a:avLst/>
+          </a:prstGeom>
+          <a:noFill/>
+          <a:ln/>
+        </p:spPr>
+        <p:txBody>
+          <a:bodyPr wrap="square" lIns="1016" tIns="1016" rIns="1016" bIns="1016" rtlCol="0" anchor="t"/>
+          <a:lstStyle/>
+          <a:p>
+            <a:pPr algn="l" indent="0" marL="0">
+              <a:spcAft>
+                <a:spcPts val="300"/>
+              </a:spcAft>
+              <a:buNone/>
+            </a:pPr>
+            <a:r>
+              <a:rPr lang="en-US" sz="1000" dirty="0">
+                <a:solidFill>
+                  <a:srgbClr val="0F766E"/>
+                </a:solidFill>
+                <a:latin typeface="Calibri" pitchFamily="34" charset="0"/>
+                <a:ea typeface="Calibri" pitchFamily="34" charset="-122"/>
+                <a:cs typeface="Calibri" pitchFamily="34" charset="-120"/>
+              </a:rPr>
+              <a:t>Разделы 2.5–2.7</a:t>
+            </a:r>
+            <a:endParaRPr lang="en-US" sz="1400" dirty="0"/>
+          </a:p>
+          <a:p>
+            <a:pPr algn="l" indent="0" marL="0">
+              <a:spcAft>
+                <a:spcPts val="300"/>
+              </a:spcAft>
+              <a:buNone/>
+            </a:pPr>
+            <a:r>
+              <a:rPr lang="en-US" sz="1400" b="1" dirty="0">
+                <a:solidFill>
+                  <a:srgbClr val="111827"/>
+                </a:solidFill>
+                <a:latin typeface="Calibri" pitchFamily="34" charset="0"/>
+                <a:ea typeface="Calibri" pitchFamily="34" charset="-122"/>
+                <a:cs typeface="Calibri" pitchFamily="34" charset="-120"/>
+              </a:rPr>
+              <a:t>Требования</a:t>
+            </a:r>
+            <a:endParaRPr lang="en-US" sz="1400" dirty="0"/>
+          </a:p>
+        </p:txBody>
+      </p:sp>
+      <p:sp>
+        <p:nvSpPr>
+          <p:cNvPr id="11" name="task-4"/>
+          <p:cNvSpPr/>
+          <p:nvPr/>
+        </p:nvSpPr>
+        <p:spPr>
+          <a:xfrm>
+            <a:off x="7150608" y="1600200"/>
+            <a:ext cx="1536192" cy="1051560"/>
+          </a:xfrm>
+          <a:prstGeom prst="roundRect">
+            <a:avLst>
+              <a:gd name="adj" fmla="val 6957"/>
+            </a:avLst>
+          </a:prstGeom>
+          <a:solidFill>
+            <a:srgbClr val="F3F8F7"/>
+          </a:solidFill>
+          <a:ln w="12700">
+            <a:solidFill>
+              <a:srgbClr val="CFE9E4"/>
+            </a:solidFill>
+            <a:prstDash val="solid"/>
+          </a:ln>
+        </p:spPr>
+      </p:sp>
+      <p:sp>
+        <p:nvSpPr>
+          <p:cNvPr id="12" name="Text 10"/>
+          <p:cNvSpPr txBox="1"/>
+          <p:nvPr/>
+        </p:nvSpPr>
+        <p:spPr>
+          <a:xfrm>
+            <a:off x="7223760" y="1655064"/>
+            <a:ext cx="1389888" cy="941832"/>
+          </a:xfrm>
+          <a:prstGeom prst="rect">
+            <a:avLst/>
+          </a:prstGeom>
+          <a:noFill/>
+          <a:ln/>
+        </p:spPr>
+        <p:txBody>
+          <a:bodyPr wrap="square" lIns="1016" tIns="1016" rIns="1016" bIns="1016" rtlCol="0" anchor="t"/>
+          <a:lstStyle/>
+          <a:p>
+            <a:pPr algn="l" indent="0" marL="0">
+              <a:spcAft>
+                <a:spcPts val="300"/>
+              </a:spcAft>
+              <a:buNone/>
+            </a:pPr>
+            <a:r>
+              <a:rPr lang="en-US" sz="1000" dirty="0">
+                <a:solidFill>
+                  <a:srgbClr val="0F766E"/>
+                </a:solidFill>
+                <a:latin typeface="Calibri" pitchFamily="34" charset="0"/>
+                <a:ea typeface="Calibri" pitchFamily="34" charset="-122"/>
+                <a:cs typeface="Calibri" pitchFamily="34" charset="-120"/>
+              </a:rPr>
+              <a:t>Разделы 2.8–2.10</a:t>
+            </a:r>
+            <a:endParaRPr lang="en-US" sz="1400" dirty="0"/>
+          </a:p>
+          <a:p>
+            <a:pPr algn="l" indent="0" marL="0">
+              <a:spcAft>
+                <a:spcPts val="300"/>
+              </a:spcAft>
+              <a:buNone/>
+            </a:pPr>
+            <a:r>
+              <a:rPr lang="en-US" sz="1400" b="1" dirty="0">
+                <a:solidFill>
+                  <a:srgbClr val="111827"/>
+                </a:solidFill>
+                <a:latin typeface="Calibri" pitchFamily="34" charset="0"/>
+                <a:ea typeface="Calibri" pitchFamily="34" charset="-122"/>
+                <a:cs typeface="Calibri" pitchFamily="34" charset="-120"/>
+              </a:rPr>
+              <a:t>Право, риски, оценка</a:t>
+            </a:r>
+            <a:endParaRPr lang="en-US" sz="1400" dirty="0"/>
+          </a:p>
+        </p:txBody>
+      </p:sp>
+      <p:sp>
+        <p:nvSpPr>
+          <p:cNvPr id="13" name="card-0"/>
+          <p:cNvSpPr/>
+          <p:nvPr/>
+        </p:nvSpPr>
+        <p:spPr>
+          <a:xfrm>
+            <a:off x="457200" y="2880360"/>
+            <a:ext cx="3977640" cy="914400"/>
+          </a:xfrm>
+          <a:prstGeom prst="roundRect">
+            <a:avLst>
+              <a:gd name="adj" fmla="val 8000"/>
             </a:avLst>
           </a:prstGeom>
           <a:solidFill>
@@ -4368,14 +2795,14 @@
       </p:sp>
       <p:sp>
         <p:nvSpPr>
-          <p:cNvPr id="3" name="Text 1"/>
+          <p:cNvPr id="14" name="Text 12"/>
           <p:cNvSpPr txBox="1"/>
           <p:nvPr/>
         </p:nvSpPr>
         <p:spPr>
           <a:xfrm>
-            <a:off x="457200" y="274320"/>
-            <a:ext cx="822960" cy="256032"/>
+            <a:off x="530352" y="2935224"/>
+            <a:ext cx="3831336" cy="804672"/>
           </a:xfrm>
           <a:prstGeom prst="rect">
             <a:avLst/>
@@ -4384,10 +2811,13 @@
           <a:ln/>
         </p:spPr>
         <p:txBody>
-          <a:bodyPr wrap="square" lIns="0" tIns="0" rIns="0" bIns="0" rtlCol="0" anchor="ctr"/>
-          <a:lstStyle/>
-          <a:p>
-            <a:pPr algn="ctr" indent="0" marL="0">
+          <a:bodyPr wrap="square" lIns="1016" tIns="1016" rIns="1016" bIns="1016" rtlCol="0" anchor="t"/>
+          <a:lstStyle/>
+          <a:p>
+            <a:pPr algn="l" indent="0" marL="0">
+              <a:spcAft>
+                <a:spcPts val="300"/>
+              </a:spcAft>
               <a:buNone/>
             </a:pPr>
             <a:r>
@@ -4399,170 +2829,46 @@
                 <a:ea typeface="Calibri" pitchFamily="34" charset="-122"/>
                 <a:cs typeface="Calibri" pitchFamily="34" charset="-120"/>
               </a:rPr>
-              <a:t>Проблема</a:t>
-            </a:r>
-            <a:endParaRPr lang="en-US" sz="1000" dirty="0"/>
-          </a:p>
-        </p:txBody>
-      </p:sp>
-      <p:sp>
-        <p:nvSpPr>
-          <p:cNvPr id="4" name="Text 2"/>
-          <p:cNvSpPr txBox="1"/>
-          <p:nvPr/>
-        </p:nvSpPr>
-        <p:spPr>
-          <a:xfrm>
-            <a:off x="1280160" y="274320"/>
-            <a:ext cx="228600" cy="256032"/>
-          </a:xfrm>
-          <a:prstGeom prst="rect">
-            <a:avLst/>
-          </a:prstGeom>
-          <a:noFill/>
-          <a:ln/>
-        </p:spPr>
-        <p:txBody>
-          <a:bodyPr wrap="square" lIns="0" tIns="0" rIns="0" bIns="0" rtlCol="0" anchor="ctr"/>
-          <a:lstStyle/>
-          <a:p>
-            <a:pPr algn="ctr" indent="0" marL="0">
-              <a:buNone/>
-            </a:pPr>
-            <a:r>
-              <a:rPr lang="en-US" sz="1000" dirty="0">
-                <a:solidFill>
-                  <a:srgbClr val="6B7280"/>
-                </a:solidFill>
-                <a:latin typeface="Calibri" pitchFamily="34" charset="0"/>
-                <a:ea typeface="Calibri" pitchFamily="34" charset="-122"/>
-                <a:cs typeface="Calibri" pitchFamily="34" charset="-120"/>
-              </a:rPr>
-              <a:t>→</a:t>
-            </a:r>
-            <a:endParaRPr lang="en-US" sz="1000" dirty="0"/>
-          </a:p>
-        </p:txBody>
-      </p:sp>
-      <p:sp>
-        <p:nvSpPr>
-          <p:cNvPr id="5" name="chain-1"/>
+              <a:t>Объект</a:t>
+            </a:r>
+            <a:endParaRPr lang="en-US" sz="1400" dirty="0"/>
+          </a:p>
+          <a:p>
+            <a:pPr algn="l" indent="0" marL="0">
+              <a:spcAft>
+                <a:spcPts val="300"/>
+              </a:spcAft>
+              <a:buNone/>
+            </a:pPr>
+            <a:r>
+              <a:rPr lang="en-US" sz="1600" b="1" dirty="0">
+                <a:solidFill>
+                  <a:srgbClr val="111827"/>
+                </a:solidFill>
+                <a:latin typeface="Calibri" pitchFamily="34" charset="0"/>
+                <a:ea typeface="Calibri" pitchFamily="34" charset="-122"/>
+                <a:cs typeface="Calibri" pitchFamily="34" charset="-120"/>
+              </a:rPr>
+              <a:t>Создание игрового уровня по реальному месту</a:t>
+            </a:r>
+            <a:endParaRPr lang="en-US" sz="1400" dirty="0"/>
+          </a:p>
+        </p:txBody>
+      </p:sp>
+      <p:sp>
+        <p:nvSpPr>
+          <p:cNvPr id="15" name="card-1"/>
           <p:cNvSpPr/>
           <p:nvPr/>
         </p:nvSpPr>
         <p:spPr>
           <a:xfrm>
-            <a:off x="1508760" y="274320"/>
-            <a:ext cx="512064" cy="256032"/>
+            <a:off x="4709160" y="2880360"/>
+            <a:ext cx="3977640" cy="914400"/>
           </a:xfrm>
           <a:prstGeom prst="roundRect">
             <a:avLst>
-              <a:gd name="adj" fmla="val 28571"/>
-            </a:avLst>
-          </a:prstGeom>
-          <a:solidFill>
-            <a:srgbClr val="0F766E"/>
-          </a:solidFill>
-          <a:ln w="12700">
-            <a:solidFill>
-              <a:srgbClr val="0F766E"/>
-            </a:solidFill>
-            <a:prstDash val="solid"/>
-          </a:ln>
-        </p:spPr>
-      </p:sp>
-      <p:sp>
-        <p:nvSpPr>
-          <p:cNvPr id="6" name="Text 4"/>
-          <p:cNvSpPr txBox="1"/>
-          <p:nvPr/>
-        </p:nvSpPr>
-        <p:spPr>
-          <a:xfrm>
-            <a:off x="1508760" y="274320"/>
-            <a:ext cx="512064" cy="256032"/>
-          </a:xfrm>
-          <a:prstGeom prst="rect">
-            <a:avLst/>
-          </a:prstGeom>
-          <a:noFill/>
-          <a:ln/>
-        </p:spPr>
-        <p:txBody>
-          <a:bodyPr wrap="square" lIns="0" tIns="0" rIns="0" bIns="0" rtlCol="0" anchor="ctr"/>
-          <a:lstStyle/>
-          <a:p>
-            <a:pPr algn="ctr" indent="0" marL="0">
-              <a:buNone/>
-            </a:pPr>
-            <a:r>
-              <a:rPr lang="en-US" sz="1000" dirty="0">
-                <a:solidFill>
-                  <a:srgbClr val="FFFFFF"/>
-                </a:solidFill>
-                <a:latin typeface="Calibri" pitchFamily="34" charset="0"/>
-                <a:ea typeface="Calibri" pitchFamily="34" charset="-122"/>
-                <a:cs typeface="Calibri" pitchFamily="34" charset="-120"/>
-              </a:rPr>
-              <a:t>Цель</a:t>
-            </a:r>
-            <a:endParaRPr lang="en-US" sz="1000" dirty="0"/>
-          </a:p>
-        </p:txBody>
-      </p:sp>
-      <p:sp>
-        <p:nvSpPr>
-          <p:cNvPr id="7" name="Text 5"/>
-          <p:cNvSpPr txBox="1"/>
-          <p:nvPr/>
-        </p:nvSpPr>
-        <p:spPr>
-          <a:xfrm>
-            <a:off x="2020824" y="274320"/>
-            <a:ext cx="228600" cy="256032"/>
-          </a:xfrm>
-          <a:prstGeom prst="rect">
-            <a:avLst/>
-          </a:prstGeom>
-          <a:noFill/>
-          <a:ln/>
-        </p:spPr>
-        <p:txBody>
-          <a:bodyPr wrap="square" lIns="0" tIns="0" rIns="0" bIns="0" rtlCol="0" anchor="ctr"/>
-          <a:lstStyle/>
-          <a:p>
-            <a:pPr algn="ctr" indent="0" marL="0">
-              <a:buNone/>
-            </a:pPr>
-            <a:r>
-              <a:rPr lang="en-US" sz="1000" dirty="0">
-                <a:solidFill>
-                  <a:srgbClr val="6B7280"/>
-                </a:solidFill>
-                <a:latin typeface="Calibri" pitchFamily="34" charset="0"/>
-                <a:ea typeface="Calibri" pitchFamily="34" charset="-122"/>
-                <a:cs typeface="Calibri" pitchFamily="34" charset="-120"/>
-              </a:rPr>
-              <a:t>→</a:t>
-            </a:r>
-            <a:endParaRPr lang="en-US" sz="1000" dirty="0"/>
-          </a:p>
-        </p:txBody>
-      </p:sp>
-      <p:sp>
-        <p:nvSpPr>
-          <p:cNvPr id="8" name="chain-2"/>
-          <p:cNvSpPr/>
-          <p:nvPr/>
-        </p:nvSpPr>
-        <p:spPr>
-          <a:xfrm>
-            <a:off x="2249424" y="274320"/>
-            <a:ext cx="978408" cy="256032"/>
-          </a:xfrm>
-          <a:prstGeom prst="roundRect">
-            <a:avLst>
-              <a:gd name="adj" fmla="val 28571"/>
+              <a:gd name="adj" fmla="val 8000"/>
             </a:avLst>
           </a:prstGeom>
           <a:solidFill>
@@ -4578,226 +2884,14 @@
       </p:sp>
       <p:sp>
         <p:nvSpPr>
-          <p:cNvPr id="9" name="Text 7"/>
+          <p:cNvPr id="16" name="Text 14"/>
           <p:cNvSpPr txBox="1"/>
           <p:nvPr/>
         </p:nvSpPr>
         <p:spPr>
           <a:xfrm>
-            <a:off x="2249424" y="274320"/>
-            <a:ext cx="978408" cy="256032"/>
-          </a:xfrm>
-          <a:prstGeom prst="rect">
-            <a:avLst/>
-          </a:prstGeom>
-          <a:noFill/>
-          <a:ln/>
-        </p:spPr>
-        <p:txBody>
-          <a:bodyPr wrap="square" lIns="0" tIns="0" rIns="0" bIns="0" rtlCol="0" anchor="ctr"/>
-          <a:lstStyle/>
-          <a:p>
-            <a:pPr algn="ctr" indent="0" marL="0">
-              <a:buNone/>
-            </a:pPr>
-            <a:r>
-              <a:rPr lang="en-US" sz="1000" dirty="0">
-                <a:solidFill>
-                  <a:srgbClr val="6B7280"/>
-                </a:solidFill>
-                <a:latin typeface="Calibri" pitchFamily="34" charset="0"/>
-                <a:ea typeface="Calibri" pitchFamily="34" charset="-122"/>
-                <a:cs typeface="Calibri" pitchFamily="34" charset="-120"/>
-              </a:rPr>
-              <a:t>Показатели</a:t>
-            </a:r>
-            <a:endParaRPr lang="en-US" sz="1000" dirty="0"/>
-          </a:p>
-        </p:txBody>
-      </p:sp>
-      <p:sp>
-        <p:nvSpPr>
-          <p:cNvPr id="10" name="Text 8"/>
-          <p:cNvSpPr txBox="1"/>
-          <p:nvPr/>
-        </p:nvSpPr>
-        <p:spPr>
-          <a:xfrm>
-            <a:off x="3227832" y="274320"/>
-            <a:ext cx="228600" cy="256032"/>
-          </a:xfrm>
-          <a:prstGeom prst="rect">
-            <a:avLst/>
-          </a:prstGeom>
-          <a:noFill/>
-          <a:ln/>
-        </p:spPr>
-        <p:txBody>
-          <a:bodyPr wrap="square" lIns="0" tIns="0" rIns="0" bIns="0" rtlCol="0" anchor="ctr"/>
-          <a:lstStyle/>
-          <a:p>
-            <a:pPr algn="ctr" indent="0" marL="0">
-              <a:buNone/>
-            </a:pPr>
-            <a:r>
-              <a:rPr lang="en-US" sz="1000" dirty="0">
-                <a:solidFill>
-                  <a:srgbClr val="6B7280"/>
-                </a:solidFill>
-                <a:latin typeface="Calibri" pitchFamily="34" charset="0"/>
-                <a:ea typeface="Calibri" pitchFamily="34" charset="-122"/>
-                <a:cs typeface="Calibri" pitchFamily="34" charset="-120"/>
-              </a:rPr>
-              <a:t>→</a:t>
-            </a:r>
-            <a:endParaRPr lang="en-US" sz="1000" dirty="0"/>
-          </a:p>
-        </p:txBody>
-      </p:sp>
-      <p:sp>
-        <p:nvSpPr>
-          <p:cNvPr id="11" name="chain-3"/>
-          <p:cNvSpPr/>
-          <p:nvPr/>
-        </p:nvSpPr>
-        <p:spPr>
-          <a:xfrm>
-            <a:off x="3456432" y="274320"/>
-            <a:ext cx="589788" cy="256032"/>
-          </a:xfrm>
-          <a:prstGeom prst="roundRect">
-            <a:avLst>
-              <a:gd name="adj" fmla="val 28571"/>
-            </a:avLst>
-          </a:prstGeom>
-          <a:solidFill>
-            <a:srgbClr val="FFFFFF"/>
-          </a:solidFill>
-          <a:ln w="12700">
-            <a:solidFill>
-              <a:srgbClr val="E5E7EB"/>
-            </a:solidFill>
-            <a:prstDash val="solid"/>
-          </a:ln>
-        </p:spPr>
-      </p:sp>
-      <p:sp>
-        <p:nvSpPr>
-          <p:cNvPr id="12" name="Text 10"/>
-          <p:cNvSpPr txBox="1"/>
-          <p:nvPr/>
-        </p:nvSpPr>
-        <p:spPr>
-          <a:xfrm>
-            <a:off x="3456432" y="274320"/>
-            <a:ext cx="589788" cy="256032"/>
-          </a:xfrm>
-          <a:prstGeom prst="rect">
-            <a:avLst/>
-          </a:prstGeom>
-          <a:noFill/>
-          <a:ln/>
-        </p:spPr>
-        <p:txBody>
-          <a:bodyPr wrap="square" lIns="0" tIns="0" rIns="0" bIns="0" rtlCol="0" anchor="ctr"/>
-          <a:lstStyle/>
-          <a:p>
-            <a:pPr algn="ctr" indent="0" marL="0">
-              <a:buNone/>
-            </a:pPr>
-            <a:r>
-              <a:rPr lang="en-US" sz="1000" dirty="0">
-                <a:solidFill>
-                  <a:srgbClr val="6B7280"/>
-                </a:solidFill>
-                <a:latin typeface="Calibri" pitchFamily="34" charset="0"/>
-                <a:ea typeface="Calibri" pitchFamily="34" charset="-122"/>
-                <a:cs typeface="Calibri" pitchFamily="34" charset="-120"/>
-              </a:rPr>
-              <a:t>Эпики</a:t>
-            </a:r>
-            <a:endParaRPr lang="en-US" sz="1000" dirty="0"/>
-          </a:p>
-        </p:txBody>
-      </p:sp>
-      <p:sp>
-        <p:nvSpPr>
-          <p:cNvPr id="13" name="Text 0"/>
-          <p:cNvSpPr/>
-          <p:nvPr>
-            <p:ph idx="100" type="title" hasCustomPrompt="1"/>
-          </p:nvPr>
-        </p:nvSpPr>
-        <p:spPr>
-          <a:xfrm>
-            <a:off x="457200" y="658368"/>
-            <a:ext cx="8229600" cy="914400"/>
-          </a:xfrm>
-          <a:prstGeom prst="rect">
-            <a:avLst/>
-          </a:prstGeom>
-          <a:noFill/>
-          <a:ln/>
-        </p:spPr>
-        <p:txBody>
-          <a:bodyPr wrap="square" lIns="0" tIns="0" rIns="0" bIns="0" rtlCol="0" anchor="t"/>
-          <a:lstStyle/>
-          <a:p>
-            <a:pPr algn="l" indent="0" marL="0">
-              <a:buNone/>
-            </a:pPr>
-            <a:r>
-              <a:rPr lang="en-US" sz="2600" b="1" dirty="0">
-                <a:solidFill>
-                  <a:srgbClr val="111827"/>
-                </a:solidFill>
-                <a:latin typeface="Calibri" pitchFamily="34" charset="0"/>
-                <a:ea typeface="Calibri" pitchFamily="34" charset="-122"/>
-                <a:cs typeface="Calibri" pitchFamily="34" charset="-120"/>
-              </a:rPr>
-              <a:t>Один обход телефоном — и проходимый уровень без ручной доводки</a:t>
-            </a:r>
-            <a:endParaRPr lang="en-US" sz="2600" dirty="0"/>
-          </a:p>
-        </p:txBody>
-      </p:sp>
-      <p:sp>
-        <p:nvSpPr>
-          <p:cNvPr id="14" name="task-0"/>
-          <p:cNvSpPr/>
-          <p:nvPr/>
-        </p:nvSpPr>
-        <p:spPr>
-          <a:xfrm>
-            <a:off x="457200" y="1737360"/>
-            <a:ext cx="1536192" cy="1051560"/>
-          </a:xfrm>
-          <a:prstGeom prst="roundRect">
-            <a:avLst>
-              <a:gd name="adj" fmla="val 6957"/>
-            </a:avLst>
-          </a:prstGeom>
-          <a:solidFill>
-            <a:srgbClr val="F3F8F7"/>
-          </a:solidFill>
-          <a:ln w="12700">
-            <a:solidFill>
-              <a:srgbClr val="CFE9E4"/>
-            </a:solidFill>
-            <a:prstDash val="solid"/>
-          </a:ln>
-        </p:spPr>
-      </p:sp>
-      <p:sp>
-        <p:nvSpPr>
-          <p:cNvPr id="15" name="Text 13"/>
-          <p:cNvSpPr txBox="1"/>
-          <p:nvPr/>
-        </p:nvSpPr>
-        <p:spPr>
-          <a:xfrm>
-            <a:off x="530352" y="1792224"/>
-            <a:ext cx="1389888" cy="941832"/>
+            <a:off x="4782312" y="2935224"/>
+            <a:ext cx="3831336" cy="804672"/>
           </a:xfrm>
           <a:prstGeom prst="rect">
             <a:avLst/>
@@ -4818,13 +2912,13 @@
             <a:r>
               <a:rPr lang="en-US" sz="1000" dirty="0">
                 <a:solidFill>
-                  <a:srgbClr val="0F766E"/>
-                </a:solidFill>
-                <a:latin typeface="Calibri" pitchFamily="34" charset="0"/>
-                <a:ea typeface="Calibri" pitchFamily="34" charset="-122"/>
-                <a:cs typeface="Calibri" pitchFamily="34" charset="-120"/>
-              </a:rPr>
-              <a:t>Раздел 1.1</a:t>
+                  <a:srgbClr val="6B7280"/>
+                </a:solidFill>
+                <a:latin typeface="Calibri" pitchFamily="34" charset="0"/>
+                <a:ea typeface="Calibri" pitchFamily="34" charset="-122"/>
+                <a:cs typeface="Calibri" pitchFamily="34" charset="-120"/>
+              </a:rPr>
+              <a:t>Предмет</a:t>
             </a:r>
             <a:endParaRPr lang="en-US" sz="1400" dirty="0"/>
           </a:p>
@@ -4836,7 +2930,7 @@
               <a:buNone/>
             </a:pPr>
             <a:r>
-              <a:rPr lang="en-US" sz="1400" b="1" dirty="0">
+              <a:rPr lang="en-US" sz="1600" b="1" dirty="0">
                 <a:solidFill>
                   <a:srgbClr val="111827"/>
                 </a:solidFill>
@@ -4844,7 +2938,7 @@
                 <a:ea typeface="Calibri" pitchFamily="34" charset="-122"/>
                 <a:cs typeface="Calibri" pitchFamily="34" charset="-120"/>
               </a:rPr>
-              <a:t>Как делают сейчас</a:t>
+              <a:t>Проверка съёмки, сборка карты, проверка ходьбой</a:t>
             </a:r>
             <a:endParaRPr lang="en-US" sz="1400" dirty="0"/>
           </a:p>
@@ -4852,541 +2946,7 @@
       </p:sp>
       <p:sp>
         <p:nvSpPr>
-          <p:cNvPr id="16" name="task-1"/>
-          <p:cNvSpPr/>
-          <p:nvPr/>
-        </p:nvSpPr>
-        <p:spPr>
-          <a:xfrm>
-            <a:off x="2130552" y="1737360"/>
-            <a:ext cx="1536192" cy="1051560"/>
-          </a:xfrm>
-          <a:prstGeom prst="roundRect">
-            <a:avLst>
-              <a:gd name="adj" fmla="val 6957"/>
-            </a:avLst>
-          </a:prstGeom>
-          <a:solidFill>
-            <a:srgbClr val="F3F8F7"/>
-          </a:solidFill>
-          <a:ln w="12700">
-            <a:solidFill>
-              <a:srgbClr val="CFE9E4"/>
-            </a:solidFill>
-            <a:prstDash val="solid"/>
-          </a:ln>
-        </p:spPr>
-      </p:sp>
-      <p:sp>
-        <p:nvSpPr>
-          <p:cNvPr id="17" name="Text 15"/>
-          <p:cNvSpPr txBox="1"/>
-          <p:nvPr/>
-        </p:nvSpPr>
-        <p:spPr>
-          <a:xfrm>
-            <a:off x="2203704" y="1792224"/>
-            <a:ext cx="1389888" cy="941832"/>
-          </a:xfrm>
-          <a:prstGeom prst="rect">
-            <a:avLst/>
-          </a:prstGeom>
-          <a:noFill/>
-          <a:ln/>
-        </p:spPr>
-        <p:txBody>
-          <a:bodyPr wrap="square" lIns="1016" tIns="1016" rIns="1016" bIns="1016" rtlCol="0" anchor="t"/>
-          <a:lstStyle/>
-          <a:p>
-            <a:pPr algn="l" indent="0" marL="0">
-              <a:spcAft>
-                <a:spcPts val="300"/>
-              </a:spcAft>
-              <a:buNone/>
-            </a:pPr>
-            <a:r>
-              <a:rPr lang="en-US" sz="1000" dirty="0">
-                <a:solidFill>
-                  <a:srgbClr val="0F766E"/>
-                </a:solidFill>
-                <a:latin typeface="Calibri" pitchFamily="34" charset="0"/>
-                <a:ea typeface="Calibri" pitchFamily="34" charset="-122"/>
-                <a:cs typeface="Calibri" pitchFamily="34" charset="-120"/>
-              </a:rPr>
-              <a:t>Разделы 1.2–1.3</a:t>
-            </a:r>
-            <a:endParaRPr lang="en-US" sz="1400" dirty="0"/>
-          </a:p>
-          <a:p>
-            <a:pPr algn="l" indent="0" marL="0">
-              <a:spcAft>
-                <a:spcPts val="300"/>
-              </a:spcAft>
-              <a:buNone/>
-            </a:pPr>
-            <a:r>
-              <a:rPr lang="en-US" sz="1400" b="1" dirty="0">
-                <a:solidFill>
-                  <a:srgbClr val="111827"/>
-                </a:solidFill>
-                <a:latin typeface="Calibri" pitchFamily="34" charset="0"/>
-                <a:ea typeface="Calibri" pitchFamily="34" charset="-122"/>
-                <a:cs typeface="Calibri" pitchFamily="34" charset="-120"/>
-              </a:rPr>
-              <a:t>Источники и аналоги</a:t>
-            </a:r>
-            <a:endParaRPr lang="en-US" sz="1400" dirty="0"/>
-          </a:p>
-        </p:txBody>
-      </p:sp>
-      <p:sp>
-        <p:nvSpPr>
-          <p:cNvPr id="18" name="task-2"/>
-          <p:cNvSpPr/>
-          <p:nvPr/>
-        </p:nvSpPr>
-        <p:spPr>
-          <a:xfrm>
-            <a:off x="3803904" y="1737360"/>
-            <a:ext cx="1536192" cy="1051560"/>
-          </a:xfrm>
-          <a:prstGeom prst="roundRect">
-            <a:avLst>
-              <a:gd name="adj" fmla="val 6957"/>
-            </a:avLst>
-          </a:prstGeom>
-          <a:solidFill>
-            <a:srgbClr val="F3F8F7"/>
-          </a:solidFill>
-          <a:ln w="12700">
-            <a:solidFill>
-              <a:srgbClr val="CFE9E4"/>
-            </a:solidFill>
-            <a:prstDash val="solid"/>
-          </a:ln>
-        </p:spPr>
-      </p:sp>
-      <p:sp>
-        <p:nvSpPr>
-          <p:cNvPr id="19" name="Text 17"/>
-          <p:cNvSpPr txBox="1"/>
-          <p:nvPr/>
-        </p:nvSpPr>
-        <p:spPr>
-          <a:xfrm>
-            <a:off x="3877056" y="1792224"/>
-            <a:ext cx="1389888" cy="941832"/>
-          </a:xfrm>
-          <a:prstGeom prst="rect">
-            <a:avLst/>
-          </a:prstGeom>
-          <a:noFill/>
-          <a:ln/>
-        </p:spPr>
-        <p:txBody>
-          <a:bodyPr wrap="square" lIns="1016" tIns="1016" rIns="1016" bIns="1016" rtlCol="0" anchor="t"/>
-          <a:lstStyle/>
-          <a:p>
-            <a:pPr algn="l" indent="0" marL="0">
-              <a:spcAft>
-                <a:spcPts val="300"/>
-              </a:spcAft>
-              <a:buNone/>
-            </a:pPr>
-            <a:r>
-              <a:rPr lang="en-US" sz="1000" dirty="0">
-                <a:solidFill>
-                  <a:srgbClr val="0F766E"/>
-                </a:solidFill>
-                <a:latin typeface="Calibri" pitchFamily="34" charset="0"/>
-                <a:ea typeface="Calibri" pitchFamily="34" charset="-122"/>
-                <a:cs typeface="Calibri" pitchFamily="34" charset="-120"/>
-              </a:rPr>
-              <a:t>Раздел 2.1</a:t>
-            </a:r>
-            <a:endParaRPr lang="en-US" sz="1400" dirty="0"/>
-          </a:p>
-          <a:p>
-            <a:pPr algn="l" indent="0" marL="0">
-              <a:spcAft>
-                <a:spcPts val="300"/>
-              </a:spcAft>
-              <a:buNone/>
-            </a:pPr>
-            <a:r>
-              <a:rPr lang="en-US" sz="1400" b="1" dirty="0">
-                <a:solidFill>
-                  <a:srgbClr val="111827"/>
-                </a:solidFill>
-                <a:latin typeface="Calibri" pitchFamily="34" charset="0"/>
-                <a:ea typeface="Calibri" pitchFamily="34" charset="-122"/>
-                <a:cs typeface="Calibri" pitchFamily="34" charset="-120"/>
-              </a:rPr>
-              <a:t>Видение и показатели</a:t>
-            </a:r>
-            <a:endParaRPr lang="en-US" sz="1400" dirty="0"/>
-          </a:p>
-        </p:txBody>
-      </p:sp>
-      <p:sp>
-        <p:nvSpPr>
-          <p:cNvPr id="20" name="task-3"/>
-          <p:cNvSpPr/>
-          <p:nvPr/>
-        </p:nvSpPr>
-        <p:spPr>
-          <a:xfrm>
-            <a:off x="5477256" y="1737360"/>
-            <a:ext cx="1536192" cy="1051560"/>
-          </a:xfrm>
-          <a:prstGeom prst="roundRect">
-            <a:avLst>
-              <a:gd name="adj" fmla="val 6957"/>
-            </a:avLst>
-          </a:prstGeom>
-          <a:solidFill>
-            <a:srgbClr val="F3F8F7"/>
-          </a:solidFill>
-          <a:ln w="12700">
-            <a:solidFill>
-              <a:srgbClr val="CFE9E4"/>
-            </a:solidFill>
-            <a:prstDash val="solid"/>
-          </a:ln>
-        </p:spPr>
-      </p:sp>
-      <p:sp>
-        <p:nvSpPr>
-          <p:cNvPr id="21" name="Text 19"/>
-          <p:cNvSpPr txBox="1"/>
-          <p:nvPr/>
-        </p:nvSpPr>
-        <p:spPr>
-          <a:xfrm>
-            <a:off x="5550408" y="1792224"/>
-            <a:ext cx="1389888" cy="941832"/>
-          </a:xfrm>
-          <a:prstGeom prst="rect">
-            <a:avLst/>
-          </a:prstGeom>
-          <a:noFill/>
-          <a:ln/>
-        </p:spPr>
-        <p:txBody>
-          <a:bodyPr wrap="square" lIns="1016" tIns="1016" rIns="1016" bIns="1016" rtlCol="0" anchor="t"/>
-          <a:lstStyle/>
-          <a:p>
-            <a:pPr algn="l" indent="0" marL="0">
-              <a:spcAft>
-                <a:spcPts val="300"/>
-              </a:spcAft>
-              <a:buNone/>
-            </a:pPr>
-            <a:r>
-              <a:rPr lang="en-US" sz="1000" dirty="0">
-                <a:solidFill>
-                  <a:srgbClr val="0F766E"/>
-                </a:solidFill>
-                <a:latin typeface="Calibri" pitchFamily="34" charset="0"/>
-                <a:ea typeface="Calibri" pitchFamily="34" charset="-122"/>
-                <a:cs typeface="Calibri" pitchFamily="34" charset="-120"/>
-              </a:rPr>
-              <a:t>Разделы 2.5–2.7</a:t>
-            </a:r>
-            <a:endParaRPr lang="en-US" sz="1400" dirty="0"/>
-          </a:p>
-          <a:p>
-            <a:pPr algn="l" indent="0" marL="0">
-              <a:spcAft>
-                <a:spcPts val="300"/>
-              </a:spcAft>
-              <a:buNone/>
-            </a:pPr>
-            <a:r>
-              <a:rPr lang="en-US" sz="1400" b="1" dirty="0">
-                <a:solidFill>
-                  <a:srgbClr val="111827"/>
-                </a:solidFill>
-                <a:latin typeface="Calibri" pitchFamily="34" charset="0"/>
-                <a:ea typeface="Calibri" pitchFamily="34" charset="-122"/>
-                <a:cs typeface="Calibri" pitchFamily="34" charset="-120"/>
-              </a:rPr>
-              <a:t>Требования</a:t>
-            </a:r>
-            <a:endParaRPr lang="en-US" sz="1400" dirty="0"/>
-          </a:p>
-        </p:txBody>
-      </p:sp>
-      <p:sp>
-        <p:nvSpPr>
-          <p:cNvPr id="22" name="task-4"/>
-          <p:cNvSpPr/>
-          <p:nvPr/>
-        </p:nvSpPr>
-        <p:spPr>
-          <a:xfrm>
-            <a:off x="7150608" y="1737360"/>
-            <a:ext cx="1536192" cy="1051560"/>
-          </a:xfrm>
-          <a:prstGeom prst="roundRect">
-            <a:avLst>
-              <a:gd name="adj" fmla="val 6957"/>
-            </a:avLst>
-          </a:prstGeom>
-          <a:solidFill>
-            <a:srgbClr val="F3F8F7"/>
-          </a:solidFill>
-          <a:ln w="12700">
-            <a:solidFill>
-              <a:srgbClr val="CFE9E4"/>
-            </a:solidFill>
-            <a:prstDash val="solid"/>
-          </a:ln>
-        </p:spPr>
-      </p:sp>
-      <p:sp>
-        <p:nvSpPr>
-          <p:cNvPr id="23" name="Text 21"/>
-          <p:cNvSpPr txBox="1"/>
-          <p:nvPr/>
-        </p:nvSpPr>
-        <p:spPr>
-          <a:xfrm>
-            <a:off x="7223760" y="1792224"/>
-            <a:ext cx="1389888" cy="941832"/>
-          </a:xfrm>
-          <a:prstGeom prst="rect">
-            <a:avLst/>
-          </a:prstGeom>
-          <a:noFill/>
-          <a:ln/>
-        </p:spPr>
-        <p:txBody>
-          <a:bodyPr wrap="square" lIns="1016" tIns="1016" rIns="1016" bIns="1016" rtlCol="0" anchor="t"/>
-          <a:lstStyle/>
-          <a:p>
-            <a:pPr algn="l" indent="0" marL="0">
-              <a:spcAft>
-                <a:spcPts val="300"/>
-              </a:spcAft>
-              <a:buNone/>
-            </a:pPr>
-            <a:r>
-              <a:rPr lang="en-US" sz="1000" dirty="0">
-                <a:solidFill>
-                  <a:srgbClr val="0F766E"/>
-                </a:solidFill>
-                <a:latin typeface="Calibri" pitchFamily="34" charset="0"/>
-                <a:ea typeface="Calibri" pitchFamily="34" charset="-122"/>
-                <a:cs typeface="Calibri" pitchFamily="34" charset="-120"/>
-              </a:rPr>
-              <a:t>Разделы 2.8–2.10</a:t>
-            </a:r>
-            <a:endParaRPr lang="en-US" sz="1400" dirty="0"/>
-          </a:p>
-          <a:p>
-            <a:pPr algn="l" indent="0" marL="0">
-              <a:spcAft>
-                <a:spcPts val="300"/>
-              </a:spcAft>
-              <a:buNone/>
-            </a:pPr>
-            <a:r>
-              <a:rPr lang="en-US" sz="1400" b="1" dirty="0">
-                <a:solidFill>
-                  <a:srgbClr val="111827"/>
-                </a:solidFill>
-                <a:latin typeface="Calibri" pitchFamily="34" charset="0"/>
-                <a:ea typeface="Calibri" pitchFamily="34" charset="-122"/>
-                <a:cs typeface="Calibri" pitchFamily="34" charset="-120"/>
-              </a:rPr>
-              <a:t>Право, риски, оценка</a:t>
-            </a:r>
-            <a:endParaRPr lang="en-US" sz="1400" dirty="0"/>
-          </a:p>
-        </p:txBody>
-      </p:sp>
-      <p:sp>
-        <p:nvSpPr>
-          <p:cNvPr id="24" name="card-0"/>
-          <p:cNvSpPr/>
-          <p:nvPr/>
-        </p:nvSpPr>
-        <p:spPr>
-          <a:xfrm>
-            <a:off x="457200" y="3017520"/>
-            <a:ext cx="3977640" cy="914400"/>
-          </a:xfrm>
-          <a:prstGeom prst="roundRect">
-            <a:avLst>
-              <a:gd name="adj" fmla="val 8000"/>
-            </a:avLst>
-          </a:prstGeom>
-          <a:solidFill>
-            <a:srgbClr val="FFFFFF"/>
-          </a:solidFill>
-          <a:ln w="12700">
-            <a:solidFill>
-              <a:srgbClr val="E5E7EB"/>
-            </a:solidFill>
-            <a:prstDash val="solid"/>
-          </a:ln>
-        </p:spPr>
-      </p:sp>
-      <p:sp>
-        <p:nvSpPr>
-          <p:cNvPr id="25" name="Text 23"/>
-          <p:cNvSpPr txBox="1"/>
-          <p:nvPr/>
-        </p:nvSpPr>
-        <p:spPr>
-          <a:xfrm>
-            <a:off x="530352" y="3072384"/>
-            <a:ext cx="3831336" cy="804672"/>
-          </a:xfrm>
-          <a:prstGeom prst="rect">
-            <a:avLst/>
-          </a:prstGeom>
-          <a:noFill/>
-          <a:ln/>
-        </p:spPr>
-        <p:txBody>
-          <a:bodyPr wrap="square" lIns="1016" tIns="1016" rIns="1016" bIns="1016" rtlCol="0" anchor="t"/>
-          <a:lstStyle/>
-          <a:p>
-            <a:pPr algn="l" indent="0" marL="0">
-              <a:spcAft>
-                <a:spcPts val="300"/>
-              </a:spcAft>
-              <a:buNone/>
-            </a:pPr>
-            <a:r>
-              <a:rPr lang="en-US" sz="1000" dirty="0">
-                <a:solidFill>
-                  <a:srgbClr val="6B7280"/>
-                </a:solidFill>
-                <a:latin typeface="Calibri" pitchFamily="34" charset="0"/>
-                <a:ea typeface="Calibri" pitchFamily="34" charset="-122"/>
-                <a:cs typeface="Calibri" pitchFamily="34" charset="-120"/>
-              </a:rPr>
-              <a:t>Объект</a:t>
-            </a:r>
-            <a:endParaRPr lang="en-US" sz="1400" dirty="0"/>
-          </a:p>
-          <a:p>
-            <a:pPr algn="l" indent="0" marL="0">
-              <a:spcAft>
-                <a:spcPts val="300"/>
-              </a:spcAft>
-              <a:buNone/>
-            </a:pPr>
-            <a:r>
-              <a:rPr lang="en-US" sz="1600" b="1" dirty="0">
-                <a:solidFill>
-                  <a:srgbClr val="111827"/>
-                </a:solidFill>
-                <a:latin typeface="Calibri" pitchFamily="34" charset="0"/>
-                <a:ea typeface="Calibri" pitchFamily="34" charset="-122"/>
-                <a:cs typeface="Calibri" pitchFamily="34" charset="-120"/>
-              </a:rPr>
-              <a:t>Создание игрового уровня по реальному месту</a:t>
-            </a:r>
-            <a:endParaRPr lang="en-US" sz="1400" dirty="0"/>
-          </a:p>
-        </p:txBody>
-      </p:sp>
-      <p:sp>
-        <p:nvSpPr>
-          <p:cNvPr id="26" name="card-1"/>
-          <p:cNvSpPr/>
-          <p:nvPr/>
-        </p:nvSpPr>
-        <p:spPr>
-          <a:xfrm>
-            <a:off x="4709160" y="3017520"/>
-            <a:ext cx="3977640" cy="914400"/>
-          </a:xfrm>
-          <a:prstGeom prst="roundRect">
-            <a:avLst>
-              <a:gd name="adj" fmla="val 8000"/>
-            </a:avLst>
-          </a:prstGeom>
-          <a:solidFill>
-            <a:srgbClr val="FFFFFF"/>
-          </a:solidFill>
-          <a:ln w="12700">
-            <a:solidFill>
-              <a:srgbClr val="E5E7EB"/>
-            </a:solidFill>
-            <a:prstDash val="solid"/>
-          </a:ln>
-        </p:spPr>
-      </p:sp>
-      <p:sp>
-        <p:nvSpPr>
-          <p:cNvPr id="27" name="Text 25"/>
-          <p:cNvSpPr txBox="1"/>
-          <p:nvPr/>
-        </p:nvSpPr>
-        <p:spPr>
-          <a:xfrm>
-            <a:off x="4782312" y="3072384"/>
-            <a:ext cx="3831336" cy="804672"/>
-          </a:xfrm>
-          <a:prstGeom prst="rect">
-            <a:avLst/>
-          </a:prstGeom>
-          <a:noFill/>
-          <a:ln/>
-        </p:spPr>
-        <p:txBody>
-          <a:bodyPr wrap="square" lIns="1016" tIns="1016" rIns="1016" bIns="1016" rtlCol="0" anchor="t"/>
-          <a:lstStyle/>
-          <a:p>
-            <a:pPr algn="l" indent="0" marL="0">
-              <a:spcAft>
-                <a:spcPts val="300"/>
-              </a:spcAft>
-              <a:buNone/>
-            </a:pPr>
-            <a:r>
-              <a:rPr lang="en-US" sz="1000" dirty="0">
-                <a:solidFill>
-                  <a:srgbClr val="6B7280"/>
-                </a:solidFill>
-                <a:latin typeface="Calibri" pitchFamily="34" charset="0"/>
-                <a:ea typeface="Calibri" pitchFamily="34" charset="-122"/>
-                <a:cs typeface="Calibri" pitchFamily="34" charset="-120"/>
-              </a:rPr>
-              <a:t>Предмет</a:t>
-            </a:r>
-            <a:endParaRPr lang="en-US" sz="1400" dirty="0"/>
-          </a:p>
-          <a:p>
-            <a:pPr algn="l" indent="0" marL="0">
-              <a:spcAft>
-                <a:spcPts val="300"/>
-              </a:spcAft>
-              <a:buNone/>
-            </a:pPr>
-            <a:r>
-              <a:rPr lang="en-US" sz="1600" b="1" dirty="0">
-                <a:solidFill>
-                  <a:srgbClr val="111827"/>
-                </a:solidFill>
-                <a:latin typeface="Calibri" pitchFamily="34" charset="0"/>
-                <a:ea typeface="Calibri" pitchFamily="34" charset="-122"/>
-                <a:cs typeface="Calibri" pitchFamily="34" charset="-120"/>
-              </a:rPr>
-              <a:t>Проверка съёмки, сборка карты, проверка ходьбой</a:t>
-            </a:r>
-            <a:endParaRPr lang="en-US" sz="1400" dirty="0"/>
-          </a:p>
-        </p:txBody>
-      </p:sp>
-      <p:sp>
-        <p:nvSpPr>
-          <p:cNvPr id="28" name="section-ref"/>
+          <p:cNvPr id="17" name="section-ref"/>
           <p:cNvSpPr txBox="1"/>
           <p:nvPr/>
         </p:nvSpPr>
@@ -5498,26 +3058,501 @@
       </p:grpSpPr>
       <p:sp>
         <p:nvSpPr>
-          <p:cNvPr id="2" name="chain-0"/>
+          <p:cNvPr id="2" name="Text 0"/>
           <p:cNvSpPr/>
-          <p:nvPr/>
-        </p:nvSpPr>
-        <p:spPr>
-          <a:xfrm>
-            <a:off x="457200" y="274320"/>
-            <a:ext cx="822960" cy="256032"/>
+          <p:nvPr>
+            <p:ph idx="100" type="title" hasCustomPrompt="1"/>
+          </p:nvPr>
+        </p:nvSpPr>
+        <p:spPr>
+          <a:xfrm>
+            <a:off x="457200" y="411480"/>
+            <a:ext cx="8229600" cy="914400"/>
+          </a:xfrm>
+          <a:prstGeom prst="rect">
+            <a:avLst/>
+          </a:prstGeom>
+          <a:noFill/>
+          <a:ln/>
+        </p:spPr>
+        <p:txBody>
+          <a:bodyPr wrap="square" lIns="0" tIns="0" rIns="0" bIns="0" rtlCol="0" anchor="t"/>
+          <a:lstStyle/>
+          <a:p>
+            <a:pPr algn="l" indent="0" marL="0">
+              <a:buNone/>
+            </a:pPr>
+            <a:r>
+              <a:rPr lang="en-US" sz="2600" b="1" dirty="0">
+                <a:solidFill>
+                  <a:srgbClr val="111827"/>
+                </a:solidFill>
+                <a:latin typeface="Calibri" pitchFamily="34" charset="0"/>
+                <a:ea typeface="Calibri" pitchFamily="34" charset="-122"/>
+                <a:cs typeface="Calibri" pitchFamily="34" charset="-120"/>
+              </a:rPr>
+              <a:t>Время теряется на ручной доводке, данные — при экспорте</a:t>
+            </a:r>
+            <a:endParaRPr lang="en-US" sz="2600" dirty="0"/>
+          </a:p>
+        </p:txBody>
+      </p:sp>
+      <p:sp>
+        <p:nvSpPr>
+          <p:cNvPr id="3" name="step-0"/>
+          <p:cNvSpPr/>
+          <p:nvPr/>
+        </p:nvSpPr>
+        <p:spPr>
+          <a:xfrm>
+            <a:off x="457200" y="1600200"/>
+            <a:ext cx="1280160" cy="868680"/>
           </a:xfrm>
           <a:prstGeom prst="roundRect">
             <a:avLst>
-              <a:gd name="adj" fmla="val 28571"/>
+              <a:gd name="adj" fmla="val 8421"/>
             </a:avLst>
           </a:prstGeom>
           <a:solidFill>
-            <a:srgbClr val="0F766E"/>
+            <a:srgbClr val="F3F4F6"/>
+          </a:solidFill>
+          <a:ln/>
+        </p:spPr>
+      </p:sp>
+      <p:sp>
+        <p:nvSpPr>
+          <p:cNvPr id="4" name="Text 2"/>
+          <p:cNvSpPr txBox="1"/>
+          <p:nvPr/>
+        </p:nvSpPr>
+        <p:spPr>
+          <a:xfrm>
+            <a:off x="457200" y="1600200"/>
+            <a:ext cx="1280160" cy="868680"/>
+          </a:xfrm>
+          <a:prstGeom prst="rect">
+            <a:avLst/>
+          </a:prstGeom>
+          <a:noFill/>
+          <a:ln/>
+        </p:spPr>
+        <p:txBody>
+          <a:bodyPr wrap="square" lIns="1016" tIns="1016" rIns="1016" bIns="1016" rtlCol="0" anchor="ctr"/>
+          <a:lstStyle/>
+          <a:p>
+            <a:pPr algn="ctr" indent="0" marL="0">
+              <a:buNone/>
+            </a:pPr>
+            <a:r>
+              <a:rPr lang="en-US" sz="1400" b="1" dirty="0">
+                <a:solidFill>
+                  <a:srgbClr val="111827"/>
+                </a:solidFill>
+                <a:latin typeface="Calibri" pitchFamily="34" charset="0"/>
+                <a:ea typeface="Calibri" pitchFamily="34" charset="-122"/>
+                <a:cs typeface="Calibri" pitchFamily="34" charset="-120"/>
+              </a:rPr>
+              <a:t>Снять</a:t>
+            </a:r>
+            <a:endParaRPr lang="en-US" sz="1400" dirty="0"/>
+          </a:p>
+        </p:txBody>
+      </p:sp>
+      <p:sp>
+        <p:nvSpPr>
+          <p:cNvPr id="5" name="step-1"/>
+          <p:cNvSpPr/>
+          <p:nvPr/>
+        </p:nvSpPr>
+        <p:spPr>
+          <a:xfrm>
+            <a:off x="1847088" y="1600200"/>
+            <a:ext cx="1280160" cy="868680"/>
+          </a:xfrm>
+          <a:prstGeom prst="roundRect">
+            <a:avLst>
+              <a:gd name="adj" fmla="val 8421"/>
+            </a:avLst>
+          </a:prstGeom>
+          <a:solidFill>
+            <a:srgbClr val="F3F4F6"/>
+          </a:solidFill>
+          <a:ln/>
+        </p:spPr>
+      </p:sp>
+      <p:sp>
+        <p:nvSpPr>
+          <p:cNvPr id="6" name="Text 4"/>
+          <p:cNvSpPr txBox="1"/>
+          <p:nvPr/>
+        </p:nvSpPr>
+        <p:spPr>
+          <a:xfrm>
+            <a:off x="1847088" y="1600200"/>
+            <a:ext cx="1280160" cy="868680"/>
+          </a:xfrm>
+          <a:prstGeom prst="rect">
+            <a:avLst/>
+          </a:prstGeom>
+          <a:noFill/>
+          <a:ln/>
+        </p:spPr>
+        <p:txBody>
+          <a:bodyPr wrap="square" lIns="1016" tIns="1016" rIns="1016" bIns="1016" rtlCol="0" anchor="ctr"/>
+          <a:lstStyle/>
+          <a:p>
+            <a:pPr algn="ctr" indent="0" marL="0">
+              <a:buNone/>
+            </a:pPr>
+            <a:r>
+              <a:rPr lang="en-US" sz="1400" b="1" dirty="0">
+                <a:solidFill>
+                  <a:srgbClr val="111827"/>
+                </a:solidFill>
+                <a:latin typeface="Calibri" pitchFamily="34" charset="0"/>
+                <a:ea typeface="Calibri" pitchFamily="34" charset="-122"/>
+                <a:cs typeface="Calibri" pitchFamily="34" charset="-120"/>
+              </a:rPr>
+              <a:t>Выгрузить</a:t>
+            </a:r>
+            <a:endParaRPr lang="en-US" sz="1400" dirty="0"/>
+          </a:p>
+        </p:txBody>
+      </p:sp>
+      <p:sp>
+        <p:nvSpPr>
+          <p:cNvPr id="7" name="step-2"/>
+          <p:cNvSpPr/>
+          <p:nvPr/>
+        </p:nvSpPr>
+        <p:spPr>
+          <a:xfrm>
+            <a:off x="3236976" y="1600200"/>
+            <a:ext cx="1280160" cy="868680"/>
+          </a:xfrm>
+          <a:prstGeom prst="roundRect">
+            <a:avLst>
+              <a:gd name="adj" fmla="val 8421"/>
+            </a:avLst>
+          </a:prstGeom>
+          <a:solidFill>
+            <a:srgbClr val="FDE8E7"/>
+          </a:solidFill>
+          <a:ln/>
+        </p:spPr>
+      </p:sp>
+      <p:sp>
+        <p:nvSpPr>
+          <p:cNvPr id="8" name="Text 6"/>
+          <p:cNvSpPr txBox="1"/>
+          <p:nvPr/>
+        </p:nvSpPr>
+        <p:spPr>
+          <a:xfrm>
+            <a:off x="3236976" y="1600200"/>
+            <a:ext cx="1280160" cy="868680"/>
+          </a:xfrm>
+          <a:prstGeom prst="rect">
+            <a:avLst/>
+          </a:prstGeom>
+          <a:noFill/>
+          <a:ln/>
+        </p:spPr>
+        <p:txBody>
+          <a:bodyPr wrap="square" lIns="1016" tIns="1016" rIns="1016" bIns="1016" rtlCol="0" anchor="ctr"/>
+          <a:lstStyle/>
+          <a:p>
+            <a:pPr algn="ctr" indent="0" marL="0">
+              <a:buNone/>
+            </a:pPr>
+            <a:r>
+              <a:rPr lang="en-US" sz="1400" b="1" dirty="0">
+                <a:solidFill>
+                  <a:srgbClr val="B42318"/>
+                </a:solidFill>
+                <a:latin typeface="Calibri" pitchFamily="34" charset="0"/>
+                <a:ea typeface="Calibri" pitchFamily="34" charset="-122"/>
+                <a:cs typeface="Calibri" pitchFamily="34" charset="-120"/>
+              </a:rPr>
+              <a:t>Почистить</a:t>
+            </a:r>
+            <a:endParaRPr lang="en-US" sz="1400" dirty="0"/>
+          </a:p>
+          <a:p>
+            <a:pPr algn="ctr" indent="0" marL="0">
+              <a:buNone/>
+            </a:pPr>
+            <a:r>
+              <a:rPr lang="en-US" sz="1000" dirty="0">
+                <a:solidFill>
+                  <a:srgbClr val="B42318"/>
+                </a:solidFill>
+                <a:latin typeface="Calibri" pitchFamily="34" charset="0"/>
+                <a:ea typeface="Calibri" pitchFamily="34" charset="-122"/>
+                <a:cs typeface="Calibri" pitchFamily="34" charset="-120"/>
+              </a:rPr>
+              <a:t>вручную</a:t>
+            </a:r>
+            <a:endParaRPr lang="en-US" sz="1400" dirty="0"/>
+          </a:p>
+        </p:txBody>
+      </p:sp>
+      <p:sp>
+        <p:nvSpPr>
+          <p:cNvPr id="9" name="step-3"/>
+          <p:cNvSpPr/>
+          <p:nvPr/>
+        </p:nvSpPr>
+        <p:spPr>
+          <a:xfrm>
+            <a:off x="4626864" y="1600200"/>
+            <a:ext cx="1280160" cy="868680"/>
+          </a:xfrm>
+          <a:prstGeom prst="roundRect">
+            <a:avLst>
+              <a:gd name="adj" fmla="val 8421"/>
+            </a:avLst>
+          </a:prstGeom>
+          <a:solidFill>
+            <a:srgbClr val="FDE8E7"/>
+          </a:solidFill>
+          <a:ln/>
+        </p:spPr>
+      </p:sp>
+      <p:sp>
+        <p:nvSpPr>
+          <p:cNvPr id="10" name="Text 8"/>
+          <p:cNvSpPr txBox="1"/>
+          <p:nvPr/>
+        </p:nvSpPr>
+        <p:spPr>
+          <a:xfrm>
+            <a:off x="4626864" y="1600200"/>
+            <a:ext cx="1280160" cy="868680"/>
+          </a:xfrm>
+          <a:prstGeom prst="rect">
+            <a:avLst/>
+          </a:prstGeom>
+          <a:noFill/>
+          <a:ln/>
+        </p:spPr>
+        <p:txBody>
+          <a:bodyPr wrap="square" lIns="1016" tIns="1016" rIns="1016" bIns="1016" rtlCol="0" anchor="ctr"/>
+          <a:lstStyle/>
+          <a:p>
+            <a:pPr algn="ctr" indent="0" marL="0">
+              <a:buNone/>
+            </a:pPr>
+            <a:r>
+              <a:rPr lang="en-US" sz="1400" b="1" dirty="0">
+                <a:solidFill>
+                  <a:srgbClr val="B42318"/>
+                </a:solidFill>
+                <a:latin typeface="Calibri" pitchFamily="34" charset="0"/>
+                <a:ea typeface="Calibri" pitchFamily="34" charset="-122"/>
+                <a:cs typeface="Calibri" pitchFamily="34" charset="-120"/>
+              </a:rPr>
+              <a:t>Построить опору</a:t>
+            </a:r>
+            <a:endParaRPr lang="en-US" sz="1400" dirty="0"/>
+          </a:p>
+          <a:p>
+            <a:pPr algn="ctr" indent="0" marL="0">
+              <a:buNone/>
+            </a:pPr>
+            <a:r>
+              <a:rPr lang="en-US" sz="1000" dirty="0">
+                <a:solidFill>
+                  <a:srgbClr val="B42318"/>
+                </a:solidFill>
+                <a:latin typeface="Calibri" pitchFamily="34" charset="0"/>
+                <a:ea typeface="Calibri" pitchFamily="34" charset="-122"/>
+                <a:cs typeface="Calibri" pitchFamily="34" charset="-120"/>
+              </a:rPr>
+              <a:t>вручную</a:t>
+            </a:r>
+            <a:endParaRPr lang="en-US" sz="1400" dirty="0"/>
+          </a:p>
+        </p:txBody>
+      </p:sp>
+      <p:sp>
+        <p:nvSpPr>
+          <p:cNvPr id="11" name="step-4"/>
+          <p:cNvSpPr/>
+          <p:nvPr/>
+        </p:nvSpPr>
+        <p:spPr>
+          <a:xfrm>
+            <a:off x="6016752" y="1600200"/>
+            <a:ext cx="1280160" cy="868680"/>
+          </a:xfrm>
+          <a:prstGeom prst="roundRect">
+            <a:avLst>
+              <a:gd name="adj" fmla="val 8421"/>
+            </a:avLst>
+          </a:prstGeom>
+          <a:solidFill>
+            <a:srgbClr val="FDE8E7"/>
+          </a:solidFill>
+          <a:ln/>
+        </p:spPr>
+      </p:sp>
+      <p:sp>
+        <p:nvSpPr>
+          <p:cNvPr id="12" name="Text 10"/>
+          <p:cNvSpPr txBox="1"/>
+          <p:nvPr/>
+        </p:nvSpPr>
+        <p:spPr>
+          <a:xfrm>
+            <a:off x="6016752" y="1600200"/>
+            <a:ext cx="1280160" cy="868680"/>
+          </a:xfrm>
+          <a:prstGeom prst="rect">
+            <a:avLst/>
+          </a:prstGeom>
+          <a:noFill/>
+          <a:ln/>
+        </p:spPr>
+        <p:txBody>
+          <a:bodyPr wrap="square" lIns="1016" tIns="1016" rIns="1016" bIns="1016" rtlCol="0" anchor="ctr"/>
+          <a:lstStyle/>
+          <a:p>
+            <a:pPr algn="ctr" indent="0" marL="0">
+              <a:buNone/>
+            </a:pPr>
+            <a:r>
+              <a:rPr lang="en-US" sz="1400" b="1" dirty="0">
+                <a:solidFill>
+                  <a:srgbClr val="B42318"/>
+                </a:solidFill>
+                <a:latin typeface="Calibri" pitchFamily="34" charset="0"/>
+                <a:ea typeface="Calibri" pitchFamily="34" charset="-122"/>
+                <a:cs typeface="Calibri" pitchFamily="34" charset="-120"/>
+              </a:rPr>
+              <a:t>Выставить размеры</a:t>
+            </a:r>
+            <a:endParaRPr lang="en-US" sz="1400" dirty="0"/>
+          </a:p>
+          <a:p>
+            <a:pPr algn="ctr" indent="0" marL="0">
+              <a:buNone/>
+            </a:pPr>
+            <a:r>
+              <a:rPr lang="en-US" sz="1000" dirty="0">
+                <a:solidFill>
+                  <a:srgbClr val="B42318"/>
+                </a:solidFill>
+                <a:latin typeface="Calibri" pitchFamily="34" charset="0"/>
+                <a:ea typeface="Calibri" pitchFamily="34" charset="-122"/>
+                <a:cs typeface="Calibri" pitchFamily="34" charset="-120"/>
+              </a:rPr>
+              <a:t>теряются</a:t>
+            </a:r>
+            <a:endParaRPr lang="en-US" sz="1400" dirty="0"/>
+          </a:p>
+        </p:txBody>
+      </p:sp>
+      <p:sp>
+        <p:nvSpPr>
+          <p:cNvPr id="13" name="step-5"/>
+          <p:cNvSpPr/>
+          <p:nvPr/>
+        </p:nvSpPr>
+        <p:spPr>
+          <a:xfrm>
+            <a:off x="7406640" y="1600200"/>
+            <a:ext cx="1280160" cy="868680"/>
+          </a:xfrm>
+          <a:prstGeom prst="roundRect">
+            <a:avLst>
+              <a:gd name="adj" fmla="val 8421"/>
+            </a:avLst>
+          </a:prstGeom>
+          <a:solidFill>
+            <a:srgbClr val="FFF4E5"/>
+          </a:solidFill>
+          <a:ln/>
+        </p:spPr>
+      </p:sp>
+      <p:sp>
+        <p:nvSpPr>
+          <p:cNvPr id="14" name="Text 12"/>
+          <p:cNvSpPr txBox="1"/>
+          <p:nvPr/>
+        </p:nvSpPr>
+        <p:spPr>
+          <a:xfrm>
+            <a:off x="7406640" y="1600200"/>
+            <a:ext cx="1280160" cy="868680"/>
+          </a:xfrm>
+          <a:prstGeom prst="rect">
+            <a:avLst/>
+          </a:prstGeom>
+          <a:noFill/>
+          <a:ln/>
+        </p:spPr>
+        <p:txBody>
+          <a:bodyPr wrap="square" lIns="1016" tIns="1016" rIns="1016" bIns="1016" rtlCol="0" anchor="ctr"/>
+          <a:lstStyle/>
+          <a:p>
+            <a:pPr algn="ctr" indent="0" marL="0">
+              <a:buNone/>
+            </a:pPr>
+            <a:r>
+              <a:rPr lang="en-US" sz="1400" b="1" dirty="0">
+                <a:solidFill>
+                  <a:srgbClr val="B54708"/>
+                </a:solidFill>
+                <a:latin typeface="Calibri" pitchFamily="34" charset="0"/>
+                <a:ea typeface="Calibri" pitchFamily="34" charset="-122"/>
+                <a:cs typeface="Calibri" pitchFamily="34" charset="-120"/>
+              </a:rPr>
+              <a:t>Проверить</a:t>
+            </a:r>
+            <a:endParaRPr lang="en-US" sz="1400" dirty="0"/>
+          </a:p>
+          <a:p>
+            <a:pPr algn="ctr" indent="0" marL="0">
+              <a:buNone/>
+            </a:pPr>
+            <a:r>
+              <a:rPr lang="en-US" sz="1000" dirty="0">
+                <a:solidFill>
+                  <a:srgbClr val="B54708"/>
+                </a:solidFill>
+                <a:latin typeface="Calibri" pitchFamily="34" charset="0"/>
+                <a:ea typeface="Calibri" pitchFamily="34" charset="-122"/>
+                <a:cs typeface="Calibri" pitchFamily="34" charset="-120"/>
+              </a:rPr>
+              <a:t>только в движке</a:t>
+            </a:r>
+            <a:endParaRPr lang="en-US" sz="1400" dirty="0"/>
+          </a:p>
+        </p:txBody>
+      </p:sp>
+      <p:sp>
+        <p:nvSpPr>
+          <p:cNvPr id="15" name="stakeholder-0"/>
+          <p:cNvSpPr/>
+          <p:nvPr/>
+        </p:nvSpPr>
+        <p:spPr>
+          <a:xfrm>
+            <a:off x="457200" y="2697480"/>
+            <a:ext cx="4046220" cy="685800"/>
+          </a:xfrm>
+          <a:prstGeom prst="roundRect">
+            <a:avLst>
+              <a:gd name="adj" fmla="val 10667"/>
+            </a:avLst>
+          </a:prstGeom>
+          <a:solidFill>
+            <a:srgbClr val="ECFDF5"/>
           </a:solidFill>
           <a:ln w="12700">
             <a:solidFill>
-              <a:srgbClr val="0F766E"/>
+              <a:srgbClr val="A7F3D0"/>
             </a:solidFill>
             <a:prstDash val="solid"/>
           </a:ln>
@@ -5525,14 +3560,14 @@
       </p:sp>
       <p:sp>
         <p:nvSpPr>
-          <p:cNvPr id="3" name="Text 1"/>
+          <p:cNvPr id="16" name="Text 14"/>
           <p:cNvSpPr txBox="1"/>
           <p:nvPr/>
         </p:nvSpPr>
         <p:spPr>
           <a:xfrm>
-            <a:off x="457200" y="274320"/>
-            <a:ext cx="822960" cy="256032"/>
+            <a:off x="530352" y="2752344"/>
+            <a:ext cx="3899916" cy="576072"/>
           </a:xfrm>
           <a:prstGeom prst="rect">
             <a:avLst/>
@@ -5541,80 +3576,64 @@
           <a:ln/>
         </p:spPr>
         <p:txBody>
-          <a:bodyPr wrap="square" lIns="0" tIns="0" rIns="0" bIns="0" rtlCol="0" anchor="ctr"/>
-          <a:lstStyle/>
-          <a:p>
-            <a:pPr algn="ctr" indent="0" marL="0">
+          <a:bodyPr wrap="square" lIns="1016" tIns="1016" rIns="1016" bIns="1016" rtlCol="0" anchor="t"/>
+          <a:lstStyle/>
+          <a:p>
+            <a:pPr algn="l" indent="0" marL="0">
+              <a:spcAft>
+                <a:spcPts val="300"/>
+              </a:spcAft>
               <a:buNone/>
             </a:pPr>
             <a:r>
               <a:rPr lang="en-US" sz="1000" dirty="0">
                 <a:solidFill>
-                  <a:srgbClr val="FFFFFF"/>
-                </a:solidFill>
-                <a:latin typeface="Calibri" pitchFamily="34" charset="0"/>
-                <a:ea typeface="Calibri" pitchFamily="34" charset="-122"/>
-                <a:cs typeface="Calibri" pitchFamily="34" charset="-120"/>
-              </a:rPr>
-              <a:t>Проблема</a:t>
-            </a:r>
-            <a:endParaRPr lang="en-US" sz="1000" dirty="0"/>
-          </a:p>
-        </p:txBody>
-      </p:sp>
-      <p:sp>
-        <p:nvSpPr>
-          <p:cNvPr id="4" name="Text 2"/>
-          <p:cNvSpPr txBox="1"/>
-          <p:nvPr/>
-        </p:nvSpPr>
-        <p:spPr>
-          <a:xfrm>
-            <a:off x="1280160" y="274320"/>
-            <a:ext cx="228600" cy="256032"/>
-          </a:xfrm>
-          <a:prstGeom prst="rect">
-            <a:avLst/>
-          </a:prstGeom>
-          <a:noFill/>
-          <a:ln/>
-        </p:spPr>
-        <p:txBody>
-          <a:bodyPr wrap="square" lIns="0" tIns="0" rIns="0" bIns="0" rtlCol="0" anchor="ctr"/>
-          <a:lstStyle/>
-          <a:p>
-            <a:pPr algn="ctr" indent="0" marL="0">
-              <a:buNone/>
-            </a:pPr>
-            <a:r>
-              <a:rPr lang="en-US" sz="1000" dirty="0">
-                <a:solidFill>
                   <a:srgbClr val="6B7280"/>
                 </a:solidFill>
                 <a:latin typeface="Calibri" pitchFamily="34" charset="0"/>
                 <a:ea typeface="Calibri" pitchFamily="34" charset="-122"/>
                 <a:cs typeface="Calibri" pitchFamily="34" charset="-120"/>
               </a:rPr>
-              <a:t>→</a:t>
-            </a:r>
-            <a:endParaRPr lang="en-US" sz="1000" dirty="0"/>
-          </a:p>
-        </p:txBody>
-      </p:sp>
-      <p:sp>
-        <p:nvSpPr>
-          <p:cNvPr id="5" name="chain-1"/>
+              <a:t>Сильное влияние, высокий интерес</a:t>
+            </a:r>
+            <a:endParaRPr lang="en-US" sz="1400" dirty="0"/>
+          </a:p>
+          <a:p>
+            <a:pPr algn="l" indent="0" marL="0">
+              <a:spcAft>
+                <a:spcPts val="300"/>
+              </a:spcAft>
+              <a:buNone/>
+            </a:pPr>
+            <a:r>
+              <a:rPr lang="en-US" sz="1500" b="1" dirty="0">
+                <a:solidFill>
+                  <a:srgbClr val="111827"/>
+                </a:solidFill>
+                <a:latin typeface="Calibri" pitchFamily="34" charset="0"/>
+                <a:ea typeface="Calibri" pitchFamily="34" charset="-122"/>
+                <a:cs typeface="Calibri" pitchFamily="34" charset="-120"/>
+              </a:rPr>
+              <a:t>Пользователи, владелец продукта</a:t>
+            </a:r>
+            <a:endParaRPr lang="en-US" sz="1400" dirty="0"/>
+          </a:p>
+        </p:txBody>
+      </p:sp>
+      <p:sp>
+        <p:nvSpPr>
+          <p:cNvPr id="17" name="stakeholder-1"/>
           <p:cNvSpPr/>
           <p:nvPr/>
         </p:nvSpPr>
         <p:spPr>
           <a:xfrm>
-            <a:off x="1508760" y="274320"/>
-            <a:ext cx="512064" cy="256032"/>
+            <a:off x="4640580" y="2697480"/>
+            <a:ext cx="4046220" cy="685800"/>
           </a:xfrm>
           <a:prstGeom prst="roundRect">
             <a:avLst>
-              <a:gd name="adj" fmla="val 28571"/>
+              <a:gd name="adj" fmla="val 10667"/>
             </a:avLst>
           </a:prstGeom>
           <a:solidFill>
@@ -5630,14 +3649,14 @@
       </p:sp>
       <p:sp>
         <p:nvSpPr>
-          <p:cNvPr id="6" name="Text 4"/>
+          <p:cNvPr id="18" name="Text 16"/>
           <p:cNvSpPr txBox="1"/>
           <p:nvPr/>
         </p:nvSpPr>
         <p:spPr>
           <a:xfrm>
-            <a:off x="1508760" y="274320"/>
-            <a:ext cx="512064" cy="256032"/>
+            <a:off x="4713732" y="2752344"/>
+            <a:ext cx="3899916" cy="576072"/>
           </a:xfrm>
           <a:prstGeom prst="rect">
             <a:avLst/>
@@ -5646,10 +3665,13 @@
           <a:ln/>
         </p:spPr>
         <p:txBody>
-          <a:bodyPr wrap="square" lIns="0" tIns="0" rIns="0" bIns="0" rtlCol="0" anchor="ctr"/>
-          <a:lstStyle/>
-          <a:p>
-            <a:pPr algn="ctr" indent="0" marL="0">
+          <a:bodyPr wrap="square" lIns="1016" tIns="1016" rIns="1016" bIns="1016" rtlCol="0" anchor="t"/>
+          <a:lstStyle/>
+          <a:p>
+            <a:pPr algn="l" indent="0" marL="0">
+              <a:spcAft>
+                <a:spcPts val="300"/>
+              </a:spcAft>
               <a:buNone/>
             </a:pPr>
             <a:r>
@@ -5661,65 +3683,46 @@
                 <a:ea typeface="Calibri" pitchFamily="34" charset="-122"/>
                 <a:cs typeface="Calibri" pitchFamily="34" charset="-120"/>
               </a:rPr>
-              <a:t>Цель</a:t>
-            </a:r>
-            <a:endParaRPr lang="en-US" sz="1000" dirty="0"/>
-          </a:p>
-        </p:txBody>
-      </p:sp>
-      <p:sp>
-        <p:nvSpPr>
-          <p:cNvPr id="7" name="Text 5"/>
-          <p:cNvSpPr txBox="1"/>
-          <p:nvPr/>
-        </p:nvSpPr>
-        <p:spPr>
-          <a:xfrm>
-            <a:off x="2020824" y="274320"/>
-            <a:ext cx="228600" cy="256032"/>
-          </a:xfrm>
-          <a:prstGeom prst="rect">
-            <a:avLst/>
-          </a:prstGeom>
-          <a:noFill/>
-          <a:ln/>
-        </p:spPr>
-        <p:txBody>
-          <a:bodyPr wrap="square" lIns="0" tIns="0" rIns="0" bIns="0" rtlCol="0" anchor="ctr"/>
-          <a:lstStyle/>
-          <a:p>
-            <a:pPr algn="ctr" indent="0" marL="0">
-              <a:buNone/>
-            </a:pPr>
-            <a:r>
-              <a:rPr lang="en-US" sz="1000" dirty="0">
-                <a:solidFill>
-                  <a:srgbClr val="6B7280"/>
-                </a:solidFill>
-                <a:latin typeface="Calibri" pitchFamily="34" charset="0"/>
-                <a:ea typeface="Calibri" pitchFamily="34" charset="-122"/>
-                <a:cs typeface="Calibri" pitchFamily="34" charset="-120"/>
-              </a:rPr>
-              <a:t>→</a:t>
-            </a:r>
-            <a:endParaRPr lang="en-US" sz="1000" dirty="0"/>
-          </a:p>
-        </p:txBody>
-      </p:sp>
-      <p:sp>
-        <p:nvSpPr>
-          <p:cNvPr id="8" name="chain-2"/>
+              <a:t>Сильное влияние, низкий интерес</a:t>
+            </a:r>
+            <a:endParaRPr lang="en-US" sz="1400" dirty="0"/>
+          </a:p>
+          <a:p>
+            <a:pPr algn="l" indent="0" marL="0">
+              <a:spcAft>
+                <a:spcPts val="300"/>
+              </a:spcAft>
+              <a:buNone/>
+            </a:pPr>
+            <a:r>
+              <a:rPr lang="en-US" sz="1500" b="1" dirty="0">
+                <a:solidFill>
+                  <a:srgbClr val="111827"/>
+                </a:solidFill>
+                <a:latin typeface="Calibri" pitchFamily="34" charset="0"/>
+                <a:ea typeface="Calibri" pitchFamily="34" charset="-122"/>
+                <a:cs typeface="Calibri" pitchFamily="34" charset="-120"/>
+              </a:rPr>
+              <a:t>Apple, игровые движки, закон о данных</a:t>
+            </a:r>
+            <a:endParaRPr lang="en-US" sz="1400" dirty="0"/>
+          </a:p>
+        </p:txBody>
+      </p:sp>
+      <p:sp>
+        <p:nvSpPr>
+          <p:cNvPr id="19" name="stakeholder-2"/>
           <p:cNvSpPr/>
           <p:nvPr/>
         </p:nvSpPr>
         <p:spPr>
           <a:xfrm>
-            <a:off x="2249424" y="274320"/>
-            <a:ext cx="978408" cy="256032"/>
+            <a:off x="457200" y="3520440"/>
+            <a:ext cx="4046220" cy="685800"/>
           </a:xfrm>
           <a:prstGeom prst="roundRect">
             <a:avLst>
-              <a:gd name="adj" fmla="val 28571"/>
+              <a:gd name="adj" fmla="val 10667"/>
             </a:avLst>
           </a:prstGeom>
           <a:solidFill>
@@ -5735,14 +3738,14 @@
       </p:sp>
       <p:sp>
         <p:nvSpPr>
-          <p:cNvPr id="9" name="Text 7"/>
+          <p:cNvPr id="20" name="Text 18"/>
           <p:cNvSpPr txBox="1"/>
           <p:nvPr/>
         </p:nvSpPr>
         <p:spPr>
           <a:xfrm>
-            <a:off x="2249424" y="274320"/>
-            <a:ext cx="978408" cy="256032"/>
+            <a:off x="530352" y="3575304"/>
+            <a:ext cx="3899916" cy="576072"/>
           </a:xfrm>
           <a:prstGeom prst="rect">
             <a:avLst/>
@@ -5751,10 +3754,13 @@
           <a:ln/>
         </p:spPr>
         <p:txBody>
-          <a:bodyPr wrap="square" lIns="0" tIns="0" rIns="0" bIns="0" rtlCol="0" anchor="ctr"/>
-          <a:lstStyle/>
-          <a:p>
-            <a:pPr algn="ctr" indent="0" marL="0">
+          <a:bodyPr wrap="square" lIns="1016" tIns="1016" rIns="1016" bIns="1016" rtlCol="0" anchor="t"/>
+          <a:lstStyle/>
+          <a:p>
+            <a:pPr algn="l" indent="0" marL="0">
+              <a:spcAft>
+                <a:spcPts val="300"/>
+              </a:spcAft>
               <a:buNone/>
             </a:pPr>
             <a:r>
@@ -5766,65 +3772,46 @@
                 <a:ea typeface="Calibri" pitchFamily="34" charset="-122"/>
                 <a:cs typeface="Calibri" pitchFamily="34" charset="-120"/>
               </a:rPr>
-              <a:t>Показатели</a:t>
-            </a:r>
-            <a:endParaRPr lang="en-US" sz="1000" dirty="0"/>
-          </a:p>
-        </p:txBody>
-      </p:sp>
-      <p:sp>
-        <p:nvSpPr>
-          <p:cNvPr id="10" name="Text 8"/>
-          <p:cNvSpPr txBox="1"/>
-          <p:nvPr/>
-        </p:nvSpPr>
-        <p:spPr>
-          <a:xfrm>
-            <a:off x="3227832" y="274320"/>
-            <a:ext cx="228600" cy="256032"/>
-          </a:xfrm>
-          <a:prstGeom prst="rect">
-            <a:avLst/>
-          </a:prstGeom>
-          <a:noFill/>
-          <a:ln/>
-        </p:spPr>
-        <p:txBody>
-          <a:bodyPr wrap="square" lIns="0" tIns="0" rIns="0" bIns="0" rtlCol="0" anchor="ctr"/>
-          <a:lstStyle/>
-          <a:p>
-            <a:pPr algn="ctr" indent="0" marL="0">
-              <a:buNone/>
-            </a:pPr>
-            <a:r>
-              <a:rPr lang="en-US" sz="1000" dirty="0">
-                <a:solidFill>
-                  <a:srgbClr val="6B7280"/>
-                </a:solidFill>
-                <a:latin typeface="Calibri" pitchFamily="34" charset="0"/>
-                <a:ea typeface="Calibri" pitchFamily="34" charset="-122"/>
-                <a:cs typeface="Calibri" pitchFamily="34" charset="-120"/>
-              </a:rPr>
-              <a:t>→</a:t>
-            </a:r>
-            <a:endParaRPr lang="en-US" sz="1000" dirty="0"/>
-          </a:p>
-        </p:txBody>
-      </p:sp>
-      <p:sp>
-        <p:nvSpPr>
-          <p:cNvPr id="11" name="chain-3"/>
+              <a:t>Среднее влияние</a:t>
+            </a:r>
+            <a:endParaRPr lang="en-US" sz="1400" dirty="0"/>
+          </a:p>
+          <a:p>
+            <a:pPr algn="l" indent="0" marL="0">
+              <a:spcAft>
+                <a:spcPts val="300"/>
+              </a:spcAft>
+              <a:buNone/>
+            </a:pPr>
+            <a:r>
+              <a:rPr lang="en-US" sz="1500" b="1" dirty="0">
+                <a:solidFill>
+                  <a:srgbClr val="111827"/>
+                </a:solidFill>
+                <a:latin typeface="Calibri" pitchFamily="34" charset="0"/>
+                <a:ea typeface="Calibri" pitchFamily="34" charset="-122"/>
+                <a:cs typeface="Calibri" pitchFamily="34" charset="-120"/>
+              </a:rPr>
+              <a:t>Хостинг, конкуренты</a:t>
+            </a:r>
+            <a:endParaRPr lang="en-US" sz="1400" dirty="0"/>
+          </a:p>
+        </p:txBody>
+      </p:sp>
+      <p:sp>
+        <p:nvSpPr>
+          <p:cNvPr id="21" name="stakeholder-3"/>
           <p:cNvSpPr/>
           <p:nvPr/>
         </p:nvSpPr>
         <p:spPr>
           <a:xfrm>
-            <a:off x="3456432" y="274320"/>
-            <a:ext cx="589788" cy="256032"/>
+            <a:off x="4640580" y="3520440"/>
+            <a:ext cx="4046220" cy="685800"/>
           </a:xfrm>
           <a:prstGeom prst="roundRect">
             <a:avLst>
-              <a:gd name="adj" fmla="val 28571"/>
+              <a:gd name="adj" fmla="val 10667"/>
             </a:avLst>
           </a:prstGeom>
           <a:solidFill>
@@ -5840,554 +3827,13 @@
       </p:sp>
       <p:sp>
         <p:nvSpPr>
-          <p:cNvPr id="12" name="Text 10"/>
+          <p:cNvPr id="22" name="Text 20"/>
           <p:cNvSpPr txBox="1"/>
           <p:nvPr/>
         </p:nvSpPr>
         <p:spPr>
           <a:xfrm>
-            <a:off x="3456432" y="274320"/>
-            <a:ext cx="589788" cy="256032"/>
-          </a:xfrm>
-          <a:prstGeom prst="rect">
-            <a:avLst/>
-          </a:prstGeom>
-          <a:noFill/>
-          <a:ln/>
-        </p:spPr>
-        <p:txBody>
-          <a:bodyPr wrap="square" lIns="0" tIns="0" rIns="0" bIns="0" rtlCol="0" anchor="ctr"/>
-          <a:lstStyle/>
-          <a:p>
-            <a:pPr algn="ctr" indent="0" marL="0">
-              <a:buNone/>
-            </a:pPr>
-            <a:r>
-              <a:rPr lang="en-US" sz="1000" dirty="0">
-                <a:solidFill>
-                  <a:srgbClr val="6B7280"/>
-                </a:solidFill>
-                <a:latin typeface="Calibri" pitchFamily="34" charset="0"/>
-                <a:ea typeface="Calibri" pitchFamily="34" charset="-122"/>
-                <a:cs typeface="Calibri" pitchFamily="34" charset="-120"/>
-              </a:rPr>
-              <a:t>Эпики</a:t>
-            </a:r>
-            <a:endParaRPr lang="en-US" sz="1000" dirty="0"/>
-          </a:p>
-        </p:txBody>
-      </p:sp>
-      <p:sp>
-        <p:nvSpPr>
-          <p:cNvPr id="13" name="Text 0"/>
-          <p:cNvSpPr/>
-          <p:nvPr>
-            <p:ph idx="100" type="title" hasCustomPrompt="1"/>
-          </p:nvPr>
-        </p:nvSpPr>
-        <p:spPr>
-          <a:xfrm>
-            <a:off x="457200" y="658368"/>
-            <a:ext cx="8229600" cy="914400"/>
-          </a:xfrm>
-          <a:prstGeom prst="rect">
-            <a:avLst/>
-          </a:prstGeom>
-          <a:noFill/>
-          <a:ln/>
-        </p:spPr>
-        <p:txBody>
-          <a:bodyPr wrap="square" lIns="0" tIns="0" rIns="0" bIns="0" rtlCol="0" anchor="t"/>
-          <a:lstStyle/>
-          <a:p>
-            <a:pPr algn="l" indent="0" marL="0">
-              <a:buNone/>
-            </a:pPr>
-            <a:r>
-              <a:rPr lang="en-US" sz="2600" b="1" dirty="0">
-                <a:solidFill>
-                  <a:srgbClr val="111827"/>
-                </a:solidFill>
-                <a:latin typeface="Calibri" pitchFamily="34" charset="0"/>
-                <a:ea typeface="Calibri" pitchFamily="34" charset="-122"/>
-                <a:cs typeface="Calibri" pitchFamily="34" charset="-120"/>
-              </a:rPr>
-              <a:t>Время теряется на ручной доводке, данные — при экспорте</a:t>
-            </a:r>
-            <a:endParaRPr lang="en-US" sz="2600" dirty="0"/>
-          </a:p>
-        </p:txBody>
-      </p:sp>
-      <p:sp>
-        <p:nvSpPr>
-          <p:cNvPr id="14" name="step-0"/>
-          <p:cNvSpPr/>
-          <p:nvPr/>
-        </p:nvSpPr>
-        <p:spPr>
-          <a:xfrm>
-            <a:off x="457200" y="1737360"/>
-            <a:ext cx="1280160" cy="868680"/>
-          </a:xfrm>
-          <a:prstGeom prst="roundRect">
-            <a:avLst>
-              <a:gd name="adj" fmla="val 8421"/>
-            </a:avLst>
-          </a:prstGeom>
-          <a:solidFill>
-            <a:srgbClr val="F3F4F6"/>
-          </a:solidFill>
-          <a:ln/>
-        </p:spPr>
-      </p:sp>
-      <p:sp>
-        <p:nvSpPr>
-          <p:cNvPr id="15" name="Text 13"/>
-          <p:cNvSpPr txBox="1"/>
-          <p:nvPr/>
-        </p:nvSpPr>
-        <p:spPr>
-          <a:xfrm>
-            <a:off x="457200" y="1737360"/>
-            <a:ext cx="1280160" cy="868680"/>
-          </a:xfrm>
-          <a:prstGeom prst="rect">
-            <a:avLst/>
-          </a:prstGeom>
-          <a:noFill/>
-          <a:ln/>
-        </p:spPr>
-        <p:txBody>
-          <a:bodyPr wrap="square" lIns="1016" tIns="1016" rIns="1016" bIns="1016" rtlCol="0" anchor="ctr"/>
-          <a:lstStyle/>
-          <a:p>
-            <a:pPr algn="ctr" indent="0" marL="0">
-              <a:buNone/>
-            </a:pPr>
-            <a:r>
-              <a:rPr lang="en-US" sz="1400" b="1" dirty="0">
-                <a:solidFill>
-                  <a:srgbClr val="111827"/>
-                </a:solidFill>
-                <a:latin typeface="Calibri" pitchFamily="34" charset="0"/>
-                <a:ea typeface="Calibri" pitchFamily="34" charset="-122"/>
-                <a:cs typeface="Calibri" pitchFamily="34" charset="-120"/>
-              </a:rPr>
-              <a:t>Снять</a:t>
-            </a:r>
-            <a:endParaRPr lang="en-US" sz="1400" dirty="0"/>
-          </a:p>
-        </p:txBody>
-      </p:sp>
-      <p:sp>
-        <p:nvSpPr>
-          <p:cNvPr id="16" name="step-1"/>
-          <p:cNvSpPr/>
-          <p:nvPr/>
-        </p:nvSpPr>
-        <p:spPr>
-          <a:xfrm>
-            <a:off x="1847088" y="1737360"/>
-            <a:ext cx="1280160" cy="868680"/>
-          </a:xfrm>
-          <a:prstGeom prst="roundRect">
-            <a:avLst>
-              <a:gd name="adj" fmla="val 8421"/>
-            </a:avLst>
-          </a:prstGeom>
-          <a:solidFill>
-            <a:srgbClr val="F3F4F6"/>
-          </a:solidFill>
-          <a:ln/>
-        </p:spPr>
-      </p:sp>
-      <p:sp>
-        <p:nvSpPr>
-          <p:cNvPr id="17" name="Text 15"/>
-          <p:cNvSpPr txBox="1"/>
-          <p:nvPr/>
-        </p:nvSpPr>
-        <p:spPr>
-          <a:xfrm>
-            <a:off x="1847088" y="1737360"/>
-            <a:ext cx="1280160" cy="868680"/>
-          </a:xfrm>
-          <a:prstGeom prst="rect">
-            <a:avLst/>
-          </a:prstGeom>
-          <a:noFill/>
-          <a:ln/>
-        </p:spPr>
-        <p:txBody>
-          <a:bodyPr wrap="square" lIns="1016" tIns="1016" rIns="1016" bIns="1016" rtlCol="0" anchor="ctr"/>
-          <a:lstStyle/>
-          <a:p>
-            <a:pPr algn="ctr" indent="0" marL="0">
-              <a:buNone/>
-            </a:pPr>
-            <a:r>
-              <a:rPr lang="en-US" sz="1400" b="1" dirty="0">
-                <a:solidFill>
-                  <a:srgbClr val="111827"/>
-                </a:solidFill>
-                <a:latin typeface="Calibri" pitchFamily="34" charset="0"/>
-                <a:ea typeface="Calibri" pitchFamily="34" charset="-122"/>
-                <a:cs typeface="Calibri" pitchFamily="34" charset="-120"/>
-              </a:rPr>
-              <a:t>Выгрузить</a:t>
-            </a:r>
-            <a:endParaRPr lang="en-US" sz="1400" dirty="0"/>
-          </a:p>
-        </p:txBody>
-      </p:sp>
-      <p:sp>
-        <p:nvSpPr>
-          <p:cNvPr id="18" name="step-2"/>
-          <p:cNvSpPr/>
-          <p:nvPr/>
-        </p:nvSpPr>
-        <p:spPr>
-          <a:xfrm>
-            <a:off x="3236976" y="1737360"/>
-            <a:ext cx="1280160" cy="868680"/>
-          </a:xfrm>
-          <a:prstGeom prst="roundRect">
-            <a:avLst>
-              <a:gd name="adj" fmla="val 8421"/>
-            </a:avLst>
-          </a:prstGeom>
-          <a:solidFill>
-            <a:srgbClr val="FDE8E7"/>
-          </a:solidFill>
-          <a:ln/>
-        </p:spPr>
-      </p:sp>
-      <p:sp>
-        <p:nvSpPr>
-          <p:cNvPr id="19" name="Text 17"/>
-          <p:cNvSpPr txBox="1"/>
-          <p:nvPr/>
-        </p:nvSpPr>
-        <p:spPr>
-          <a:xfrm>
-            <a:off x="3236976" y="1737360"/>
-            <a:ext cx="1280160" cy="868680"/>
-          </a:xfrm>
-          <a:prstGeom prst="rect">
-            <a:avLst/>
-          </a:prstGeom>
-          <a:noFill/>
-          <a:ln/>
-        </p:spPr>
-        <p:txBody>
-          <a:bodyPr wrap="square" lIns="1016" tIns="1016" rIns="1016" bIns="1016" rtlCol="0" anchor="ctr"/>
-          <a:lstStyle/>
-          <a:p>
-            <a:pPr algn="ctr" indent="0" marL="0">
-              <a:buNone/>
-            </a:pPr>
-            <a:r>
-              <a:rPr lang="en-US" sz="1400" b="1" dirty="0">
-                <a:solidFill>
-                  <a:srgbClr val="B42318"/>
-                </a:solidFill>
-                <a:latin typeface="Calibri" pitchFamily="34" charset="0"/>
-                <a:ea typeface="Calibri" pitchFamily="34" charset="-122"/>
-                <a:cs typeface="Calibri" pitchFamily="34" charset="-120"/>
-              </a:rPr>
-              <a:t>Почистить</a:t>
-            </a:r>
-            <a:endParaRPr lang="en-US" sz="1400" dirty="0"/>
-          </a:p>
-          <a:p>
-            <a:pPr algn="ctr" indent="0" marL="0">
-              <a:buNone/>
-            </a:pPr>
-            <a:r>
-              <a:rPr lang="en-US" sz="1000" dirty="0">
-                <a:solidFill>
-                  <a:srgbClr val="B42318"/>
-                </a:solidFill>
-                <a:latin typeface="Calibri" pitchFamily="34" charset="0"/>
-                <a:ea typeface="Calibri" pitchFamily="34" charset="-122"/>
-                <a:cs typeface="Calibri" pitchFamily="34" charset="-120"/>
-              </a:rPr>
-              <a:t>вручную</a:t>
-            </a:r>
-            <a:endParaRPr lang="en-US" sz="1400" dirty="0"/>
-          </a:p>
-        </p:txBody>
-      </p:sp>
-      <p:sp>
-        <p:nvSpPr>
-          <p:cNvPr id="20" name="step-3"/>
-          <p:cNvSpPr/>
-          <p:nvPr/>
-        </p:nvSpPr>
-        <p:spPr>
-          <a:xfrm>
-            <a:off x="4626864" y="1737360"/>
-            <a:ext cx="1280160" cy="868680"/>
-          </a:xfrm>
-          <a:prstGeom prst="roundRect">
-            <a:avLst>
-              <a:gd name="adj" fmla="val 8421"/>
-            </a:avLst>
-          </a:prstGeom>
-          <a:solidFill>
-            <a:srgbClr val="FDE8E7"/>
-          </a:solidFill>
-          <a:ln/>
-        </p:spPr>
-      </p:sp>
-      <p:sp>
-        <p:nvSpPr>
-          <p:cNvPr id="21" name="Text 19"/>
-          <p:cNvSpPr txBox="1"/>
-          <p:nvPr/>
-        </p:nvSpPr>
-        <p:spPr>
-          <a:xfrm>
-            <a:off x="4626864" y="1737360"/>
-            <a:ext cx="1280160" cy="868680"/>
-          </a:xfrm>
-          <a:prstGeom prst="rect">
-            <a:avLst/>
-          </a:prstGeom>
-          <a:noFill/>
-          <a:ln/>
-        </p:spPr>
-        <p:txBody>
-          <a:bodyPr wrap="square" lIns="1016" tIns="1016" rIns="1016" bIns="1016" rtlCol="0" anchor="ctr"/>
-          <a:lstStyle/>
-          <a:p>
-            <a:pPr algn="ctr" indent="0" marL="0">
-              <a:buNone/>
-            </a:pPr>
-            <a:r>
-              <a:rPr lang="en-US" sz="1400" b="1" dirty="0">
-                <a:solidFill>
-                  <a:srgbClr val="B42318"/>
-                </a:solidFill>
-                <a:latin typeface="Calibri" pitchFamily="34" charset="0"/>
-                <a:ea typeface="Calibri" pitchFamily="34" charset="-122"/>
-                <a:cs typeface="Calibri" pitchFamily="34" charset="-120"/>
-              </a:rPr>
-              <a:t>Построить опору</a:t>
-            </a:r>
-            <a:endParaRPr lang="en-US" sz="1400" dirty="0"/>
-          </a:p>
-          <a:p>
-            <a:pPr algn="ctr" indent="0" marL="0">
-              <a:buNone/>
-            </a:pPr>
-            <a:r>
-              <a:rPr lang="en-US" sz="1000" dirty="0">
-                <a:solidFill>
-                  <a:srgbClr val="B42318"/>
-                </a:solidFill>
-                <a:latin typeface="Calibri" pitchFamily="34" charset="0"/>
-                <a:ea typeface="Calibri" pitchFamily="34" charset="-122"/>
-                <a:cs typeface="Calibri" pitchFamily="34" charset="-120"/>
-              </a:rPr>
-              <a:t>вручную</a:t>
-            </a:r>
-            <a:endParaRPr lang="en-US" sz="1400" dirty="0"/>
-          </a:p>
-        </p:txBody>
-      </p:sp>
-      <p:sp>
-        <p:nvSpPr>
-          <p:cNvPr id="22" name="step-4"/>
-          <p:cNvSpPr/>
-          <p:nvPr/>
-        </p:nvSpPr>
-        <p:spPr>
-          <a:xfrm>
-            <a:off x="6016752" y="1737360"/>
-            <a:ext cx="1280160" cy="868680"/>
-          </a:xfrm>
-          <a:prstGeom prst="roundRect">
-            <a:avLst>
-              <a:gd name="adj" fmla="val 8421"/>
-            </a:avLst>
-          </a:prstGeom>
-          <a:solidFill>
-            <a:srgbClr val="FDE8E7"/>
-          </a:solidFill>
-          <a:ln/>
-        </p:spPr>
-      </p:sp>
-      <p:sp>
-        <p:nvSpPr>
-          <p:cNvPr id="23" name="Text 21"/>
-          <p:cNvSpPr txBox="1"/>
-          <p:nvPr/>
-        </p:nvSpPr>
-        <p:spPr>
-          <a:xfrm>
-            <a:off x="6016752" y="1737360"/>
-            <a:ext cx="1280160" cy="868680"/>
-          </a:xfrm>
-          <a:prstGeom prst="rect">
-            <a:avLst/>
-          </a:prstGeom>
-          <a:noFill/>
-          <a:ln/>
-        </p:spPr>
-        <p:txBody>
-          <a:bodyPr wrap="square" lIns="1016" tIns="1016" rIns="1016" bIns="1016" rtlCol="0" anchor="ctr"/>
-          <a:lstStyle/>
-          <a:p>
-            <a:pPr algn="ctr" indent="0" marL="0">
-              <a:buNone/>
-            </a:pPr>
-            <a:r>
-              <a:rPr lang="en-US" sz="1400" b="1" dirty="0">
-                <a:solidFill>
-                  <a:srgbClr val="B42318"/>
-                </a:solidFill>
-                <a:latin typeface="Calibri" pitchFamily="34" charset="0"/>
-                <a:ea typeface="Calibri" pitchFamily="34" charset="-122"/>
-                <a:cs typeface="Calibri" pitchFamily="34" charset="-120"/>
-              </a:rPr>
-              <a:t>Выставить размеры</a:t>
-            </a:r>
-            <a:endParaRPr lang="en-US" sz="1400" dirty="0"/>
-          </a:p>
-          <a:p>
-            <a:pPr algn="ctr" indent="0" marL="0">
-              <a:buNone/>
-            </a:pPr>
-            <a:r>
-              <a:rPr lang="en-US" sz="1000" dirty="0">
-                <a:solidFill>
-                  <a:srgbClr val="B42318"/>
-                </a:solidFill>
-                <a:latin typeface="Calibri" pitchFamily="34" charset="0"/>
-                <a:ea typeface="Calibri" pitchFamily="34" charset="-122"/>
-                <a:cs typeface="Calibri" pitchFamily="34" charset="-120"/>
-              </a:rPr>
-              <a:t>теряются</a:t>
-            </a:r>
-            <a:endParaRPr lang="en-US" sz="1400" dirty="0"/>
-          </a:p>
-        </p:txBody>
-      </p:sp>
-      <p:sp>
-        <p:nvSpPr>
-          <p:cNvPr id="24" name="step-5"/>
-          <p:cNvSpPr/>
-          <p:nvPr/>
-        </p:nvSpPr>
-        <p:spPr>
-          <a:xfrm>
-            <a:off x="7406640" y="1737360"/>
-            <a:ext cx="1280160" cy="868680"/>
-          </a:xfrm>
-          <a:prstGeom prst="roundRect">
-            <a:avLst>
-              <a:gd name="adj" fmla="val 8421"/>
-            </a:avLst>
-          </a:prstGeom>
-          <a:solidFill>
-            <a:srgbClr val="FFF4E5"/>
-          </a:solidFill>
-          <a:ln/>
-        </p:spPr>
-      </p:sp>
-      <p:sp>
-        <p:nvSpPr>
-          <p:cNvPr id="25" name="Text 23"/>
-          <p:cNvSpPr txBox="1"/>
-          <p:nvPr/>
-        </p:nvSpPr>
-        <p:spPr>
-          <a:xfrm>
-            <a:off x="7406640" y="1737360"/>
-            <a:ext cx="1280160" cy="868680"/>
-          </a:xfrm>
-          <a:prstGeom prst="rect">
-            <a:avLst/>
-          </a:prstGeom>
-          <a:noFill/>
-          <a:ln/>
-        </p:spPr>
-        <p:txBody>
-          <a:bodyPr wrap="square" lIns="1016" tIns="1016" rIns="1016" bIns="1016" rtlCol="0" anchor="ctr"/>
-          <a:lstStyle/>
-          <a:p>
-            <a:pPr algn="ctr" indent="0" marL="0">
-              <a:buNone/>
-            </a:pPr>
-            <a:r>
-              <a:rPr lang="en-US" sz="1400" b="1" dirty="0">
-                <a:solidFill>
-                  <a:srgbClr val="B54708"/>
-                </a:solidFill>
-                <a:latin typeface="Calibri" pitchFamily="34" charset="0"/>
-                <a:ea typeface="Calibri" pitchFamily="34" charset="-122"/>
-                <a:cs typeface="Calibri" pitchFamily="34" charset="-120"/>
-              </a:rPr>
-              <a:t>Проверить</a:t>
-            </a:r>
-            <a:endParaRPr lang="en-US" sz="1400" dirty="0"/>
-          </a:p>
-          <a:p>
-            <a:pPr algn="ctr" indent="0" marL="0">
-              <a:buNone/>
-            </a:pPr>
-            <a:r>
-              <a:rPr lang="en-US" sz="1000" dirty="0">
-                <a:solidFill>
-                  <a:srgbClr val="B54708"/>
-                </a:solidFill>
-                <a:latin typeface="Calibri" pitchFamily="34" charset="0"/>
-                <a:ea typeface="Calibri" pitchFamily="34" charset="-122"/>
-                <a:cs typeface="Calibri" pitchFamily="34" charset="-120"/>
-              </a:rPr>
-              <a:t>только в движке</a:t>
-            </a:r>
-            <a:endParaRPr lang="en-US" sz="1400" dirty="0"/>
-          </a:p>
-        </p:txBody>
-      </p:sp>
-      <p:sp>
-        <p:nvSpPr>
-          <p:cNvPr id="26" name="stakeholder-0"/>
-          <p:cNvSpPr/>
-          <p:nvPr/>
-        </p:nvSpPr>
-        <p:spPr>
-          <a:xfrm>
-            <a:off x="457200" y="2834640"/>
-            <a:ext cx="4046220" cy="685800"/>
-          </a:xfrm>
-          <a:prstGeom prst="roundRect">
-            <a:avLst>
-              <a:gd name="adj" fmla="val 10667"/>
-            </a:avLst>
-          </a:prstGeom>
-          <a:solidFill>
-            <a:srgbClr val="ECFDF5"/>
-          </a:solidFill>
-          <a:ln w="12700">
-            <a:solidFill>
-              <a:srgbClr val="A7F3D0"/>
-            </a:solidFill>
-            <a:prstDash val="solid"/>
-          </a:ln>
-        </p:spPr>
-      </p:sp>
-      <p:sp>
-        <p:nvSpPr>
-          <p:cNvPr id="27" name="Text 25"/>
-          <p:cNvSpPr txBox="1"/>
-          <p:nvPr/>
-        </p:nvSpPr>
-        <p:spPr>
-          <a:xfrm>
-            <a:off x="530352" y="2889504"/>
+            <a:off x="4713732" y="3575304"/>
             <a:ext cx="3899916" cy="576072"/>
           </a:xfrm>
           <a:prstGeom prst="rect">
@@ -6415,7 +3861,7 @@
                 <a:ea typeface="Calibri" pitchFamily="34" charset="-122"/>
                 <a:cs typeface="Calibri" pitchFamily="34" charset="-120"/>
               </a:rPr>
-              <a:t>Сильное влияние, высокий интерес</a:t>
+              <a:t>Слабое влияние, высокий интерес</a:t>
             </a:r>
             <a:endParaRPr lang="en-US" sz="1400" dirty="0"/>
           </a:p>
@@ -6435,7 +3881,7 @@
                 <a:ea typeface="Calibri" pitchFamily="34" charset="-122"/>
                 <a:cs typeface="Calibri" pitchFamily="34" charset="-120"/>
               </a:rPr>
-              <a:t>Пользователи, владелец продукта</a:t>
+              <a:t>Игрок, владелец места, человек в кадре</a:t>
             </a:r>
             <a:endParaRPr lang="en-US" sz="1400" dirty="0"/>
           </a:p>
@@ -6443,274 +3889,7 @@
       </p:sp>
       <p:sp>
         <p:nvSpPr>
-          <p:cNvPr id="28" name="stakeholder-1"/>
-          <p:cNvSpPr/>
-          <p:nvPr/>
-        </p:nvSpPr>
-        <p:spPr>
-          <a:xfrm>
-            <a:off x="4640580" y="2834640"/>
-            <a:ext cx="4046220" cy="685800"/>
-          </a:xfrm>
-          <a:prstGeom prst="roundRect">
-            <a:avLst>
-              <a:gd name="adj" fmla="val 10667"/>
-            </a:avLst>
-          </a:prstGeom>
-          <a:solidFill>
-            <a:srgbClr val="FFFFFF"/>
-          </a:solidFill>
-          <a:ln w="12700">
-            <a:solidFill>
-              <a:srgbClr val="E5E7EB"/>
-            </a:solidFill>
-            <a:prstDash val="solid"/>
-          </a:ln>
-        </p:spPr>
-      </p:sp>
-      <p:sp>
-        <p:nvSpPr>
-          <p:cNvPr id="29" name="Text 27"/>
-          <p:cNvSpPr txBox="1"/>
-          <p:nvPr/>
-        </p:nvSpPr>
-        <p:spPr>
-          <a:xfrm>
-            <a:off x="4713732" y="2889504"/>
-            <a:ext cx="3899916" cy="576072"/>
-          </a:xfrm>
-          <a:prstGeom prst="rect">
-            <a:avLst/>
-          </a:prstGeom>
-          <a:noFill/>
-          <a:ln/>
-        </p:spPr>
-        <p:txBody>
-          <a:bodyPr wrap="square" lIns="1016" tIns="1016" rIns="1016" bIns="1016" rtlCol="0" anchor="t"/>
-          <a:lstStyle/>
-          <a:p>
-            <a:pPr algn="l" indent="0" marL="0">
-              <a:spcAft>
-                <a:spcPts val="300"/>
-              </a:spcAft>
-              <a:buNone/>
-            </a:pPr>
-            <a:r>
-              <a:rPr lang="en-US" sz="1000" dirty="0">
-                <a:solidFill>
-                  <a:srgbClr val="6B7280"/>
-                </a:solidFill>
-                <a:latin typeface="Calibri" pitchFamily="34" charset="0"/>
-                <a:ea typeface="Calibri" pitchFamily="34" charset="-122"/>
-                <a:cs typeface="Calibri" pitchFamily="34" charset="-120"/>
-              </a:rPr>
-              <a:t>Сильное влияние, низкий интерес</a:t>
-            </a:r>
-            <a:endParaRPr lang="en-US" sz="1400" dirty="0"/>
-          </a:p>
-          <a:p>
-            <a:pPr algn="l" indent="0" marL="0">
-              <a:spcAft>
-                <a:spcPts val="300"/>
-              </a:spcAft>
-              <a:buNone/>
-            </a:pPr>
-            <a:r>
-              <a:rPr lang="en-US" sz="1500" b="1" dirty="0">
-                <a:solidFill>
-                  <a:srgbClr val="111827"/>
-                </a:solidFill>
-                <a:latin typeface="Calibri" pitchFamily="34" charset="0"/>
-                <a:ea typeface="Calibri" pitchFamily="34" charset="-122"/>
-                <a:cs typeface="Calibri" pitchFamily="34" charset="-120"/>
-              </a:rPr>
-              <a:t>Apple, игровые движки, закон о данных</a:t>
-            </a:r>
-            <a:endParaRPr lang="en-US" sz="1400" dirty="0"/>
-          </a:p>
-        </p:txBody>
-      </p:sp>
-      <p:sp>
-        <p:nvSpPr>
-          <p:cNvPr id="30" name="stakeholder-2"/>
-          <p:cNvSpPr/>
-          <p:nvPr/>
-        </p:nvSpPr>
-        <p:spPr>
-          <a:xfrm>
-            <a:off x="457200" y="3657600"/>
-            <a:ext cx="4046220" cy="685800"/>
-          </a:xfrm>
-          <a:prstGeom prst="roundRect">
-            <a:avLst>
-              <a:gd name="adj" fmla="val 10667"/>
-            </a:avLst>
-          </a:prstGeom>
-          <a:solidFill>
-            <a:srgbClr val="FFFFFF"/>
-          </a:solidFill>
-          <a:ln w="12700">
-            <a:solidFill>
-              <a:srgbClr val="E5E7EB"/>
-            </a:solidFill>
-            <a:prstDash val="solid"/>
-          </a:ln>
-        </p:spPr>
-      </p:sp>
-      <p:sp>
-        <p:nvSpPr>
-          <p:cNvPr id="31" name="Text 29"/>
-          <p:cNvSpPr txBox="1"/>
-          <p:nvPr/>
-        </p:nvSpPr>
-        <p:spPr>
-          <a:xfrm>
-            <a:off x="530352" y="3712464"/>
-            <a:ext cx="3899916" cy="576072"/>
-          </a:xfrm>
-          <a:prstGeom prst="rect">
-            <a:avLst/>
-          </a:prstGeom>
-          <a:noFill/>
-          <a:ln/>
-        </p:spPr>
-        <p:txBody>
-          <a:bodyPr wrap="square" lIns="1016" tIns="1016" rIns="1016" bIns="1016" rtlCol="0" anchor="t"/>
-          <a:lstStyle/>
-          <a:p>
-            <a:pPr algn="l" indent="0" marL="0">
-              <a:spcAft>
-                <a:spcPts val="300"/>
-              </a:spcAft>
-              <a:buNone/>
-            </a:pPr>
-            <a:r>
-              <a:rPr lang="en-US" sz="1000" dirty="0">
-                <a:solidFill>
-                  <a:srgbClr val="6B7280"/>
-                </a:solidFill>
-                <a:latin typeface="Calibri" pitchFamily="34" charset="0"/>
-                <a:ea typeface="Calibri" pitchFamily="34" charset="-122"/>
-                <a:cs typeface="Calibri" pitchFamily="34" charset="-120"/>
-              </a:rPr>
-              <a:t>Среднее влияние</a:t>
-            </a:r>
-            <a:endParaRPr lang="en-US" sz="1400" dirty="0"/>
-          </a:p>
-          <a:p>
-            <a:pPr algn="l" indent="0" marL="0">
-              <a:spcAft>
-                <a:spcPts val="300"/>
-              </a:spcAft>
-              <a:buNone/>
-            </a:pPr>
-            <a:r>
-              <a:rPr lang="en-US" sz="1500" b="1" dirty="0">
-                <a:solidFill>
-                  <a:srgbClr val="111827"/>
-                </a:solidFill>
-                <a:latin typeface="Calibri" pitchFamily="34" charset="0"/>
-                <a:ea typeface="Calibri" pitchFamily="34" charset="-122"/>
-                <a:cs typeface="Calibri" pitchFamily="34" charset="-120"/>
-              </a:rPr>
-              <a:t>Хостинг, конкуренты</a:t>
-            </a:r>
-            <a:endParaRPr lang="en-US" sz="1400" dirty="0"/>
-          </a:p>
-        </p:txBody>
-      </p:sp>
-      <p:sp>
-        <p:nvSpPr>
-          <p:cNvPr id="32" name="stakeholder-3"/>
-          <p:cNvSpPr/>
-          <p:nvPr/>
-        </p:nvSpPr>
-        <p:spPr>
-          <a:xfrm>
-            <a:off x="4640580" y="3657600"/>
-            <a:ext cx="4046220" cy="685800"/>
-          </a:xfrm>
-          <a:prstGeom prst="roundRect">
-            <a:avLst>
-              <a:gd name="adj" fmla="val 10667"/>
-            </a:avLst>
-          </a:prstGeom>
-          <a:solidFill>
-            <a:srgbClr val="FFFFFF"/>
-          </a:solidFill>
-          <a:ln w="12700">
-            <a:solidFill>
-              <a:srgbClr val="E5E7EB"/>
-            </a:solidFill>
-            <a:prstDash val="solid"/>
-          </a:ln>
-        </p:spPr>
-      </p:sp>
-      <p:sp>
-        <p:nvSpPr>
-          <p:cNvPr id="33" name="Text 31"/>
-          <p:cNvSpPr txBox="1"/>
-          <p:nvPr/>
-        </p:nvSpPr>
-        <p:spPr>
-          <a:xfrm>
-            <a:off x="4713732" y="3712464"/>
-            <a:ext cx="3899916" cy="576072"/>
-          </a:xfrm>
-          <a:prstGeom prst="rect">
-            <a:avLst/>
-          </a:prstGeom>
-          <a:noFill/>
-          <a:ln/>
-        </p:spPr>
-        <p:txBody>
-          <a:bodyPr wrap="square" lIns="1016" tIns="1016" rIns="1016" bIns="1016" rtlCol="0" anchor="t"/>
-          <a:lstStyle/>
-          <a:p>
-            <a:pPr algn="l" indent="0" marL="0">
-              <a:spcAft>
-                <a:spcPts val="300"/>
-              </a:spcAft>
-              <a:buNone/>
-            </a:pPr>
-            <a:r>
-              <a:rPr lang="en-US" sz="1000" dirty="0">
-                <a:solidFill>
-                  <a:srgbClr val="6B7280"/>
-                </a:solidFill>
-                <a:latin typeface="Calibri" pitchFamily="34" charset="0"/>
-                <a:ea typeface="Calibri" pitchFamily="34" charset="-122"/>
-                <a:cs typeface="Calibri" pitchFamily="34" charset="-120"/>
-              </a:rPr>
-              <a:t>Слабое влияние, высокий интерес</a:t>
-            </a:r>
-            <a:endParaRPr lang="en-US" sz="1400" dirty="0"/>
-          </a:p>
-          <a:p>
-            <a:pPr algn="l" indent="0" marL="0">
-              <a:spcAft>
-                <a:spcPts val="300"/>
-              </a:spcAft>
-              <a:buNone/>
-            </a:pPr>
-            <a:r>
-              <a:rPr lang="en-US" sz="1500" b="1" dirty="0">
-                <a:solidFill>
-                  <a:srgbClr val="111827"/>
-                </a:solidFill>
-                <a:latin typeface="Calibri" pitchFamily="34" charset="0"/>
-                <a:ea typeface="Calibri" pitchFamily="34" charset="-122"/>
-                <a:cs typeface="Calibri" pitchFamily="34" charset="-120"/>
-              </a:rPr>
-              <a:t>Игрок, владелец места, человек в кадре</a:t>
-            </a:r>
-            <a:endParaRPr lang="en-US" sz="1400" dirty="0"/>
-          </a:p>
-        </p:txBody>
-      </p:sp>
-      <p:sp>
-        <p:nvSpPr>
-          <p:cNvPr id="34" name="section-ref"/>
+          <p:cNvPr id="23" name="section-ref"/>
           <p:cNvSpPr txBox="1"/>
           <p:nvPr/>
         </p:nvSpPr>
@@ -6822,388 +4001,7 @@
       </p:grpSpPr>
       <p:sp>
         <p:nvSpPr>
-          <p:cNvPr id="2" name="chain-0"/>
-          <p:cNvSpPr/>
-          <p:nvPr/>
-        </p:nvSpPr>
-        <p:spPr>
-          <a:xfrm>
-            <a:off x="457200" y="274320"/>
-            <a:ext cx="822960" cy="256032"/>
-          </a:xfrm>
-          <a:prstGeom prst="roundRect">
-            <a:avLst>
-              <a:gd name="adj" fmla="val 28571"/>
-            </a:avLst>
-          </a:prstGeom>
-          <a:solidFill>
-            <a:srgbClr val="0F766E"/>
-          </a:solidFill>
-          <a:ln w="12700">
-            <a:solidFill>
-              <a:srgbClr val="0F766E"/>
-            </a:solidFill>
-            <a:prstDash val="solid"/>
-          </a:ln>
-        </p:spPr>
-      </p:sp>
-      <p:sp>
-        <p:nvSpPr>
-          <p:cNvPr id="3" name="Text 1"/>
-          <p:cNvSpPr txBox="1"/>
-          <p:nvPr/>
-        </p:nvSpPr>
-        <p:spPr>
-          <a:xfrm>
-            <a:off x="457200" y="274320"/>
-            <a:ext cx="822960" cy="256032"/>
-          </a:xfrm>
-          <a:prstGeom prst="rect">
-            <a:avLst/>
-          </a:prstGeom>
-          <a:noFill/>
-          <a:ln/>
-        </p:spPr>
-        <p:txBody>
-          <a:bodyPr wrap="square" lIns="0" tIns="0" rIns="0" bIns="0" rtlCol="0" anchor="ctr"/>
-          <a:lstStyle/>
-          <a:p>
-            <a:pPr algn="ctr" indent="0" marL="0">
-              <a:buNone/>
-            </a:pPr>
-            <a:r>
-              <a:rPr lang="en-US" sz="1000" dirty="0">
-                <a:solidFill>
-                  <a:srgbClr val="FFFFFF"/>
-                </a:solidFill>
-                <a:latin typeface="Calibri" pitchFamily="34" charset="0"/>
-                <a:ea typeface="Calibri" pitchFamily="34" charset="-122"/>
-                <a:cs typeface="Calibri" pitchFamily="34" charset="-120"/>
-              </a:rPr>
-              <a:t>Проблема</a:t>
-            </a:r>
-            <a:endParaRPr lang="en-US" sz="1000" dirty="0"/>
-          </a:p>
-        </p:txBody>
-      </p:sp>
-      <p:sp>
-        <p:nvSpPr>
-          <p:cNvPr id="4" name="Text 2"/>
-          <p:cNvSpPr txBox="1"/>
-          <p:nvPr/>
-        </p:nvSpPr>
-        <p:spPr>
-          <a:xfrm>
-            <a:off x="1280160" y="274320"/>
-            <a:ext cx="228600" cy="256032"/>
-          </a:xfrm>
-          <a:prstGeom prst="rect">
-            <a:avLst/>
-          </a:prstGeom>
-          <a:noFill/>
-          <a:ln/>
-        </p:spPr>
-        <p:txBody>
-          <a:bodyPr wrap="square" lIns="0" tIns="0" rIns="0" bIns="0" rtlCol="0" anchor="ctr"/>
-          <a:lstStyle/>
-          <a:p>
-            <a:pPr algn="ctr" indent="0" marL="0">
-              <a:buNone/>
-            </a:pPr>
-            <a:r>
-              <a:rPr lang="en-US" sz="1000" dirty="0">
-                <a:solidFill>
-                  <a:srgbClr val="6B7280"/>
-                </a:solidFill>
-                <a:latin typeface="Calibri" pitchFamily="34" charset="0"/>
-                <a:ea typeface="Calibri" pitchFamily="34" charset="-122"/>
-                <a:cs typeface="Calibri" pitchFamily="34" charset="-120"/>
-              </a:rPr>
-              <a:t>→</a:t>
-            </a:r>
-            <a:endParaRPr lang="en-US" sz="1000" dirty="0"/>
-          </a:p>
-        </p:txBody>
-      </p:sp>
-      <p:sp>
-        <p:nvSpPr>
-          <p:cNvPr id="5" name="chain-1"/>
-          <p:cNvSpPr/>
-          <p:nvPr/>
-        </p:nvSpPr>
-        <p:spPr>
-          <a:xfrm>
-            <a:off x="1508760" y="274320"/>
-            <a:ext cx="512064" cy="256032"/>
-          </a:xfrm>
-          <a:prstGeom prst="roundRect">
-            <a:avLst>
-              <a:gd name="adj" fmla="val 28571"/>
-            </a:avLst>
-          </a:prstGeom>
-          <a:solidFill>
-            <a:srgbClr val="FFFFFF"/>
-          </a:solidFill>
-          <a:ln w="12700">
-            <a:solidFill>
-              <a:srgbClr val="E5E7EB"/>
-            </a:solidFill>
-            <a:prstDash val="solid"/>
-          </a:ln>
-        </p:spPr>
-      </p:sp>
-      <p:sp>
-        <p:nvSpPr>
-          <p:cNvPr id="6" name="Text 4"/>
-          <p:cNvSpPr txBox="1"/>
-          <p:nvPr/>
-        </p:nvSpPr>
-        <p:spPr>
-          <a:xfrm>
-            <a:off x="1508760" y="274320"/>
-            <a:ext cx="512064" cy="256032"/>
-          </a:xfrm>
-          <a:prstGeom prst="rect">
-            <a:avLst/>
-          </a:prstGeom>
-          <a:noFill/>
-          <a:ln/>
-        </p:spPr>
-        <p:txBody>
-          <a:bodyPr wrap="square" lIns="0" tIns="0" rIns="0" bIns="0" rtlCol="0" anchor="ctr"/>
-          <a:lstStyle/>
-          <a:p>
-            <a:pPr algn="ctr" indent="0" marL="0">
-              <a:buNone/>
-            </a:pPr>
-            <a:r>
-              <a:rPr lang="en-US" sz="1000" dirty="0">
-                <a:solidFill>
-                  <a:srgbClr val="6B7280"/>
-                </a:solidFill>
-                <a:latin typeface="Calibri" pitchFamily="34" charset="0"/>
-                <a:ea typeface="Calibri" pitchFamily="34" charset="-122"/>
-                <a:cs typeface="Calibri" pitchFamily="34" charset="-120"/>
-              </a:rPr>
-              <a:t>Цель</a:t>
-            </a:r>
-            <a:endParaRPr lang="en-US" sz="1000" dirty="0"/>
-          </a:p>
-        </p:txBody>
-      </p:sp>
-      <p:sp>
-        <p:nvSpPr>
-          <p:cNvPr id="7" name="Text 5"/>
-          <p:cNvSpPr txBox="1"/>
-          <p:nvPr/>
-        </p:nvSpPr>
-        <p:spPr>
-          <a:xfrm>
-            <a:off x="2020824" y="274320"/>
-            <a:ext cx="228600" cy="256032"/>
-          </a:xfrm>
-          <a:prstGeom prst="rect">
-            <a:avLst/>
-          </a:prstGeom>
-          <a:noFill/>
-          <a:ln/>
-        </p:spPr>
-        <p:txBody>
-          <a:bodyPr wrap="square" lIns="0" tIns="0" rIns="0" bIns="0" rtlCol="0" anchor="ctr"/>
-          <a:lstStyle/>
-          <a:p>
-            <a:pPr algn="ctr" indent="0" marL="0">
-              <a:buNone/>
-            </a:pPr>
-            <a:r>
-              <a:rPr lang="en-US" sz="1000" dirty="0">
-                <a:solidFill>
-                  <a:srgbClr val="6B7280"/>
-                </a:solidFill>
-                <a:latin typeface="Calibri" pitchFamily="34" charset="0"/>
-                <a:ea typeface="Calibri" pitchFamily="34" charset="-122"/>
-                <a:cs typeface="Calibri" pitchFamily="34" charset="-120"/>
-              </a:rPr>
-              <a:t>→</a:t>
-            </a:r>
-            <a:endParaRPr lang="en-US" sz="1000" dirty="0"/>
-          </a:p>
-        </p:txBody>
-      </p:sp>
-      <p:sp>
-        <p:nvSpPr>
-          <p:cNvPr id="8" name="chain-2"/>
-          <p:cNvSpPr/>
-          <p:nvPr/>
-        </p:nvSpPr>
-        <p:spPr>
-          <a:xfrm>
-            <a:off x="2249424" y="274320"/>
-            <a:ext cx="978408" cy="256032"/>
-          </a:xfrm>
-          <a:prstGeom prst="roundRect">
-            <a:avLst>
-              <a:gd name="adj" fmla="val 28571"/>
-            </a:avLst>
-          </a:prstGeom>
-          <a:solidFill>
-            <a:srgbClr val="FFFFFF"/>
-          </a:solidFill>
-          <a:ln w="12700">
-            <a:solidFill>
-              <a:srgbClr val="E5E7EB"/>
-            </a:solidFill>
-            <a:prstDash val="solid"/>
-          </a:ln>
-        </p:spPr>
-      </p:sp>
-      <p:sp>
-        <p:nvSpPr>
-          <p:cNvPr id="9" name="Text 7"/>
-          <p:cNvSpPr txBox="1"/>
-          <p:nvPr/>
-        </p:nvSpPr>
-        <p:spPr>
-          <a:xfrm>
-            <a:off x="2249424" y="274320"/>
-            <a:ext cx="978408" cy="256032"/>
-          </a:xfrm>
-          <a:prstGeom prst="rect">
-            <a:avLst/>
-          </a:prstGeom>
-          <a:noFill/>
-          <a:ln/>
-        </p:spPr>
-        <p:txBody>
-          <a:bodyPr wrap="square" lIns="0" tIns="0" rIns="0" bIns="0" rtlCol="0" anchor="ctr"/>
-          <a:lstStyle/>
-          <a:p>
-            <a:pPr algn="ctr" indent="0" marL="0">
-              <a:buNone/>
-            </a:pPr>
-            <a:r>
-              <a:rPr lang="en-US" sz="1000" dirty="0">
-                <a:solidFill>
-                  <a:srgbClr val="6B7280"/>
-                </a:solidFill>
-                <a:latin typeface="Calibri" pitchFamily="34" charset="0"/>
-                <a:ea typeface="Calibri" pitchFamily="34" charset="-122"/>
-                <a:cs typeface="Calibri" pitchFamily="34" charset="-120"/>
-              </a:rPr>
-              <a:t>Показатели</a:t>
-            </a:r>
-            <a:endParaRPr lang="en-US" sz="1000" dirty="0"/>
-          </a:p>
-        </p:txBody>
-      </p:sp>
-      <p:sp>
-        <p:nvSpPr>
-          <p:cNvPr id="10" name="Text 8"/>
-          <p:cNvSpPr txBox="1"/>
-          <p:nvPr/>
-        </p:nvSpPr>
-        <p:spPr>
-          <a:xfrm>
-            <a:off x="3227832" y="274320"/>
-            <a:ext cx="228600" cy="256032"/>
-          </a:xfrm>
-          <a:prstGeom prst="rect">
-            <a:avLst/>
-          </a:prstGeom>
-          <a:noFill/>
-          <a:ln/>
-        </p:spPr>
-        <p:txBody>
-          <a:bodyPr wrap="square" lIns="0" tIns="0" rIns="0" bIns="0" rtlCol="0" anchor="ctr"/>
-          <a:lstStyle/>
-          <a:p>
-            <a:pPr algn="ctr" indent="0" marL="0">
-              <a:buNone/>
-            </a:pPr>
-            <a:r>
-              <a:rPr lang="en-US" sz="1000" dirty="0">
-                <a:solidFill>
-                  <a:srgbClr val="6B7280"/>
-                </a:solidFill>
-                <a:latin typeface="Calibri" pitchFamily="34" charset="0"/>
-                <a:ea typeface="Calibri" pitchFamily="34" charset="-122"/>
-                <a:cs typeface="Calibri" pitchFamily="34" charset="-120"/>
-              </a:rPr>
-              <a:t>→</a:t>
-            </a:r>
-            <a:endParaRPr lang="en-US" sz="1000" dirty="0"/>
-          </a:p>
-        </p:txBody>
-      </p:sp>
-      <p:sp>
-        <p:nvSpPr>
-          <p:cNvPr id="11" name="chain-3"/>
-          <p:cNvSpPr/>
-          <p:nvPr/>
-        </p:nvSpPr>
-        <p:spPr>
-          <a:xfrm>
-            <a:off x="3456432" y="274320"/>
-            <a:ext cx="589788" cy="256032"/>
-          </a:xfrm>
-          <a:prstGeom prst="roundRect">
-            <a:avLst>
-              <a:gd name="adj" fmla="val 28571"/>
-            </a:avLst>
-          </a:prstGeom>
-          <a:solidFill>
-            <a:srgbClr val="FFFFFF"/>
-          </a:solidFill>
-          <a:ln w="12700">
-            <a:solidFill>
-              <a:srgbClr val="E5E7EB"/>
-            </a:solidFill>
-            <a:prstDash val="solid"/>
-          </a:ln>
-        </p:spPr>
-      </p:sp>
-      <p:sp>
-        <p:nvSpPr>
-          <p:cNvPr id="12" name="Text 10"/>
-          <p:cNvSpPr txBox="1"/>
-          <p:nvPr/>
-        </p:nvSpPr>
-        <p:spPr>
-          <a:xfrm>
-            <a:off x="3456432" y="274320"/>
-            <a:ext cx="589788" cy="256032"/>
-          </a:xfrm>
-          <a:prstGeom prst="rect">
-            <a:avLst/>
-          </a:prstGeom>
-          <a:noFill/>
-          <a:ln/>
-        </p:spPr>
-        <p:txBody>
-          <a:bodyPr wrap="square" lIns="0" tIns="0" rIns="0" bIns="0" rtlCol="0" anchor="ctr"/>
-          <a:lstStyle/>
-          <a:p>
-            <a:pPr algn="ctr" indent="0" marL="0">
-              <a:buNone/>
-            </a:pPr>
-            <a:r>
-              <a:rPr lang="en-US" sz="1000" dirty="0">
-                <a:solidFill>
-                  <a:srgbClr val="6B7280"/>
-                </a:solidFill>
-                <a:latin typeface="Calibri" pitchFamily="34" charset="0"/>
-                <a:ea typeface="Calibri" pitchFamily="34" charset="-122"/>
-                <a:cs typeface="Calibri" pitchFamily="34" charset="-120"/>
-              </a:rPr>
-              <a:t>Эпики</a:t>
-            </a:r>
-            <a:endParaRPr lang="en-US" sz="1000" dirty="0"/>
-          </a:p>
-        </p:txBody>
-      </p:sp>
-      <p:sp>
-        <p:nvSpPr>
-          <p:cNvPr id="13" name="Text 0"/>
+          <p:cNvPr id="2" name="Text 0"/>
           <p:cNvSpPr/>
           <p:nvPr>
             <p:ph idx="100" type="title" hasCustomPrompt="1"/>
@@ -7211,7 +4009,7 @@
         </p:nvSpPr>
         <p:spPr>
           <a:xfrm>
-            <a:off x="457200" y="658368"/>
+            <a:off x="457200" y="411480"/>
             <a:ext cx="8229600" cy="914400"/>
           </a:xfrm>
           <a:prstGeom prst="rect">
@@ -7257,7 +4055,7 @@
           </p:nvPr>
         </p:nvGraphicFramePr>
         <p:xfrm>
-          <a:off x="457200" y="1737360"/>
+          <a:off x="457200" y="1600200"/>
           <a:ext cx="8229600" cy="914400"/>
         </p:xfrm>
         <a:graphic>
@@ -8961,13 +5759,13 @@
       </p:graphicFrame>
       <p:sp>
         <p:nvSpPr>
-          <p:cNvPr id="15" name="Text 12"/>
+          <p:cNvPr id="4" name="Text 1"/>
           <p:cNvSpPr txBox="1"/>
           <p:nvPr/>
         </p:nvSpPr>
         <p:spPr>
           <a:xfrm>
-            <a:off x="457200" y="4279392"/>
+            <a:off x="457200" y="4142232"/>
             <a:ext cx="8229600" cy="411480"/>
           </a:xfrm>
           <a:prstGeom prst="rect">
@@ -9000,7 +5798,7 @@
       </p:sp>
       <p:sp>
         <p:nvSpPr>
-          <p:cNvPr id="16" name="section-ref"/>
+          <p:cNvPr id="5" name="section-ref"/>
           <p:cNvSpPr txBox="1"/>
           <p:nvPr/>
         </p:nvSpPr>
@@ -9112,388 +5910,7 @@
       </p:grpSpPr>
       <p:sp>
         <p:nvSpPr>
-          <p:cNvPr id="2" name="chain-0"/>
-          <p:cNvSpPr/>
-          <p:nvPr/>
-        </p:nvSpPr>
-        <p:spPr>
-          <a:xfrm>
-            <a:off x="457200" y="274320"/>
-            <a:ext cx="822960" cy="256032"/>
-          </a:xfrm>
-          <a:prstGeom prst="roundRect">
-            <a:avLst>
-              <a:gd name="adj" fmla="val 28571"/>
-            </a:avLst>
-          </a:prstGeom>
-          <a:solidFill>
-            <a:srgbClr val="FFFFFF"/>
-          </a:solidFill>
-          <a:ln w="12700">
-            <a:solidFill>
-              <a:srgbClr val="E5E7EB"/>
-            </a:solidFill>
-            <a:prstDash val="solid"/>
-          </a:ln>
-        </p:spPr>
-      </p:sp>
-      <p:sp>
-        <p:nvSpPr>
-          <p:cNvPr id="3" name="Text 1"/>
-          <p:cNvSpPr txBox="1"/>
-          <p:nvPr/>
-        </p:nvSpPr>
-        <p:spPr>
-          <a:xfrm>
-            <a:off x="457200" y="274320"/>
-            <a:ext cx="822960" cy="256032"/>
-          </a:xfrm>
-          <a:prstGeom prst="rect">
-            <a:avLst/>
-          </a:prstGeom>
-          <a:noFill/>
-          <a:ln/>
-        </p:spPr>
-        <p:txBody>
-          <a:bodyPr wrap="square" lIns="0" tIns="0" rIns="0" bIns="0" rtlCol="0" anchor="ctr"/>
-          <a:lstStyle/>
-          <a:p>
-            <a:pPr algn="ctr" indent="0" marL="0">
-              <a:buNone/>
-            </a:pPr>
-            <a:r>
-              <a:rPr lang="en-US" sz="1000" dirty="0">
-                <a:solidFill>
-                  <a:srgbClr val="6B7280"/>
-                </a:solidFill>
-                <a:latin typeface="Calibri" pitchFamily="34" charset="0"/>
-                <a:ea typeface="Calibri" pitchFamily="34" charset="-122"/>
-                <a:cs typeface="Calibri" pitchFamily="34" charset="-120"/>
-              </a:rPr>
-              <a:t>Проблема</a:t>
-            </a:r>
-            <a:endParaRPr lang="en-US" sz="1000" dirty="0"/>
-          </a:p>
-        </p:txBody>
-      </p:sp>
-      <p:sp>
-        <p:nvSpPr>
-          <p:cNvPr id="4" name="Text 2"/>
-          <p:cNvSpPr txBox="1"/>
-          <p:nvPr/>
-        </p:nvSpPr>
-        <p:spPr>
-          <a:xfrm>
-            <a:off x="1280160" y="274320"/>
-            <a:ext cx="228600" cy="256032"/>
-          </a:xfrm>
-          <a:prstGeom prst="rect">
-            <a:avLst/>
-          </a:prstGeom>
-          <a:noFill/>
-          <a:ln/>
-        </p:spPr>
-        <p:txBody>
-          <a:bodyPr wrap="square" lIns="0" tIns="0" rIns="0" bIns="0" rtlCol="0" anchor="ctr"/>
-          <a:lstStyle/>
-          <a:p>
-            <a:pPr algn="ctr" indent="0" marL="0">
-              <a:buNone/>
-            </a:pPr>
-            <a:r>
-              <a:rPr lang="en-US" sz="1000" dirty="0">
-                <a:solidFill>
-                  <a:srgbClr val="6B7280"/>
-                </a:solidFill>
-                <a:latin typeface="Calibri" pitchFamily="34" charset="0"/>
-                <a:ea typeface="Calibri" pitchFamily="34" charset="-122"/>
-                <a:cs typeface="Calibri" pitchFamily="34" charset="-120"/>
-              </a:rPr>
-              <a:t>→</a:t>
-            </a:r>
-            <a:endParaRPr lang="en-US" sz="1000" dirty="0"/>
-          </a:p>
-        </p:txBody>
-      </p:sp>
-      <p:sp>
-        <p:nvSpPr>
-          <p:cNvPr id="5" name="chain-1"/>
-          <p:cNvSpPr/>
-          <p:nvPr/>
-        </p:nvSpPr>
-        <p:spPr>
-          <a:xfrm>
-            <a:off x="1508760" y="274320"/>
-            <a:ext cx="512064" cy="256032"/>
-          </a:xfrm>
-          <a:prstGeom prst="roundRect">
-            <a:avLst>
-              <a:gd name="adj" fmla="val 28571"/>
-            </a:avLst>
-          </a:prstGeom>
-          <a:solidFill>
-            <a:srgbClr val="FFFFFF"/>
-          </a:solidFill>
-          <a:ln w="12700">
-            <a:solidFill>
-              <a:srgbClr val="E5E7EB"/>
-            </a:solidFill>
-            <a:prstDash val="solid"/>
-          </a:ln>
-        </p:spPr>
-      </p:sp>
-      <p:sp>
-        <p:nvSpPr>
-          <p:cNvPr id="6" name="Text 4"/>
-          <p:cNvSpPr txBox="1"/>
-          <p:nvPr/>
-        </p:nvSpPr>
-        <p:spPr>
-          <a:xfrm>
-            <a:off x="1508760" y="274320"/>
-            <a:ext cx="512064" cy="256032"/>
-          </a:xfrm>
-          <a:prstGeom prst="rect">
-            <a:avLst/>
-          </a:prstGeom>
-          <a:noFill/>
-          <a:ln/>
-        </p:spPr>
-        <p:txBody>
-          <a:bodyPr wrap="square" lIns="0" tIns="0" rIns="0" bIns="0" rtlCol="0" anchor="ctr"/>
-          <a:lstStyle/>
-          <a:p>
-            <a:pPr algn="ctr" indent="0" marL="0">
-              <a:buNone/>
-            </a:pPr>
-            <a:r>
-              <a:rPr lang="en-US" sz="1000" dirty="0">
-                <a:solidFill>
-                  <a:srgbClr val="6B7280"/>
-                </a:solidFill>
-                <a:latin typeface="Calibri" pitchFamily="34" charset="0"/>
-                <a:ea typeface="Calibri" pitchFamily="34" charset="-122"/>
-                <a:cs typeface="Calibri" pitchFamily="34" charset="-120"/>
-              </a:rPr>
-              <a:t>Цель</a:t>
-            </a:r>
-            <a:endParaRPr lang="en-US" sz="1000" dirty="0"/>
-          </a:p>
-        </p:txBody>
-      </p:sp>
-      <p:sp>
-        <p:nvSpPr>
-          <p:cNvPr id="7" name="Text 5"/>
-          <p:cNvSpPr txBox="1"/>
-          <p:nvPr/>
-        </p:nvSpPr>
-        <p:spPr>
-          <a:xfrm>
-            <a:off x="2020824" y="274320"/>
-            <a:ext cx="228600" cy="256032"/>
-          </a:xfrm>
-          <a:prstGeom prst="rect">
-            <a:avLst/>
-          </a:prstGeom>
-          <a:noFill/>
-          <a:ln/>
-        </p:spPr>
-        <p:txBody>
-          <a:bodyPr wrap="square" lIns="0" tIns="0" rIns="0" bIns="0" rtlCol="0" anchor="ctr"/>
-          <a:lstStyle/>
-          <a:p>
-            <a:pPr algn="ctr" indent="0" marL="0">
-              <a:buNone/>
-            </a:pPr>
-            <a:r>
-              <a:rPr lang="en-US" sz="1000" dirty="0">
-                <a:solidFill>
-                  <a:srgbClr val="6B7280"/>
-                </a:solidFill>
-                <a:latin typeface="Calibri" pitchFamily="34" charset="0"/>
-                <a:ea typeface="Calibri" pitchFamily="34" charset="-122"/>
-                <a:cs typeface="Calibri" pitchFamily="34" charset="-120"/>
-              </a:rPr>
-              <a:t>→</a:t>
-            </a:r>
-            <a:endParaRPr lang="en-US" sz="1000" dirty="0"/>
-          </a:p>
-        </p:txBody>
-      </p:sp>
-      <p:sp>
-        <p:nvSpPr>
-          <p:cNvPr id="8" name="chain-2"/>
-          <p:cNvSpPr/>
-          <p:nvPr/>
-        </p:nvSpPr>
-        <p:spPr>
-          <a:xfrm>
-            <a:off x="2249424" y="274320"/>
-            <a:ext cx="978408" cy="256032"/>
-          </a:xfrm>
-          <a:prstGeom prst="roundRect">
-            <a:avLst>
-              <a:gd name="adj" fmla="val 28571"/>
-            </a:avLst>
-          </a:prstGeom>
-          <a:solidFill>
-            <a:srgbClr val="0F766E"/>
-          </a:solidFill>
-          <a:ln w="12700">
-            <a:solidFill>
-              <a:srgbClr val="0F766E"/>
-            </a:solidFill>
-            <a:prstDash val="solid"/>
-          </a:ln>
-        </p:spPr>
-      </p:sp>
-      <p:sp>
-        <p:nvSpPr>
-          <p:cNvPr id="9" name="Text 7"/>
-          <p:cNvSpPr txBox="1"/>
-          <p:nvPr/>
-        </p:nvSpPr>
-        <p:spPr>
-          <a:xfrm>
-            <a:off x="2249424" y="274320"/>
-            <a:ext cx="978408" cy="256032"/>
-          </a:xfrm>
-          <a:prstGeom prst="rect">
-            <a:avLst/>
-          </a:prstGeom>
-          <a:noFill/>
-          <a:ln/>
-        </p:spPr>
-        <p:txBody>
-          <a:bodyPr wrap="square" lIns="0" tIns="0" rIns="0" bIns="0" rtlCol="0" anchor="ctr"/>
-          <a:lstStyle/>
-          <a:p>
-            <a:pPr algn="ctr" indent="0" marL="0">
-              <a:buNone/>
-            </a:pPr>
-            <a:r>
-              <a:rPr lang="en-US" sz="1000" dirty="0">
-                <a:solidFill>
-                  <a:srgbClr val="FFFFFF"/>
-                </a:solidFill>
-                <a:latin typeface="Calibri" pitchFamily="34" charset="0"/>
-                <a:ea typeface="Calibri" pitchFamily="34" charset="-122"/>
-                <a:cs typeface="Calibri" pitchFamily="34" charset="-120"/>
-              </a:rPr>
-              <a:t>Показатели</a:t>
-            </a:r>
-            <a:endParaRPr lang="en-US" sz="1000" dirty="0"/>
-          </a:p>
-        </p:txBody>
-      </p:sp>
-      <p:sp>
-        <p:nvSpPr>
-          <p:cNvPr id="10" name="Text 8"/>
-          <p:cNvSpPr txBox="1"/>
-          <p:nvPr/>
-        </p:nvSpPr>
-        <p:spPr>
-          <a:xfrm>
-            <a:off x="3227832" y="274320"/>
-            <a:ext cx="228600" cy="256032"/>
-          </a:xfrm>
-          <a:prstGeom prst="rect">
-            <a:avLst/>
-          </a:prstGeom>
-          <a:noFill/>
-          <a:ln/>
-        </p:spPr>
-        <p:txBody>
-          <a:bodyPr wrap="square" lIns="0" tIns="0" rIns="0" bIns="0" rtlCol="0" anchor="ctr"/>
-          <a:lstStyle/>
-          <a:p>
-            <a:pPr algn="ctr" indent="0" marL="0">
-              <a:buNone/>
-            </a:pPr>
-            <a:r>
-              <a:rPr lang="en-US" sz="1000" dirty="0">
-                <a:solidFill>
-                  <a:srgbClr val="6B7280"/>
-                </a:solidFill>
-                <a:latin typeface="Calibri" pitchFamily="34" charset="0"/>
-                <a:ea typeface="Calibri" pitchFamily="34" charset="-122"/>
-                <a:cs typeface="Calibri" pitchFamily="34" charset="-120"/>
-              </a:rPr>
-              <a:t>→</a:t>
-            </a:r>
-            <a:endParaRPr lang="en-US" sz="1000" dirty="0"/>
-          </a:p>
-        </p:txBody>
-      </p:sp>
-      <p:sp>
-        <p:nvSpPr>
-          <p:cNvPr id="11" name="chain-3"/>
-          <p:cNvSpPr/>
-          <p:nvPr/>
-        </p:nvSpPr>
-        <p:spPr>
-          <a:xfrm>
-            <a:off x="3456432" y="274320"/>
-            <a:ext cx="589788" cy="256032"/>
-          </a:xfrm>
-          <a:prstGeom prst="roundRect">
-            <a:avLst>
-              <a:gd name="adj" fmla="val 28571"/>
-            </a:avLst>
-          </a:prstGeom>
-          <a:solidFill>
-            <a:srgbClr val="FFFFFF"/>
-          </a:solidFill>
-          <a:ln w="12700">
-            <a:solidFill>
-              <a:srgbClr val="E5E7EB"/>
-            </a:solidFill>
-            <a:prstDash val="solid"/>
-          </a:ln>
-        </p:spPr>
-      </p:sp>
-      <p:sp>
-        <p:nvSpPr>
-          <p:cNvPr id="12" name="Text 10"/>
-          <p:cNvSpPr txBox="1"/>
-          <p:nvPr/>
-        </p:nvSpPr>
-        <p:spPr>
-          <a:xfrm>
-            <a:off x="3456432" y="274320"/>
-            <a:ext cx="589788" cy="256032"/>
-          </a:xfrm>
-          <a:prstGeom prst="rect">
-            <a:avLst/>
-          </a:prstGeom>
-          <a:noFill/>
-          <a:ln/>
-        </p:spPr>
-        <p:txBody>
-          <a:bodyPr wrap="square" lIns="0" tIns="0" rIns="0" bIns="0" rtlCol="0" anchor="ctr"/>
-          <a:lstStyle/>
-          <a:p>
-            <a:pPr algn="ctr" indent="0" marL="0">
-              <a:buNone/>
-            </a:pPr>
-            <a:r>
-              <a:rPr lang="en-US" sz="1000" dirty="0">
-                <a:solidFill>
-                  <a:srgbClr val="6B7280"/>
-                </a:solidFill>
-                <a:latin typeface="Calibri" pitchFamily="34" charset="0"/>
-                <a:ea typeface="Calibri" pitchFamily="34" charset="-122"/>
-                <a:cs typeface="Calibri" pitchFamily="34" charset="-120"/>
-              </a:rPr>
-              <a:t>Эпики</a:t>
-            </a:r>
-            <a:endParaRPr lang="en-US" sz="1000" dirty="0"/>
-          </a:p>
-        </p:txBody>
-      </p:sp>
-      <p:sp>
-        <p:nvSpPr>
-          <p:cNvPr id="13" name="Text 0"/>
+          <p:cNvPr id="2" name="Text 0"/>
           <p:cNvSpPr/>
           <p:nvPr>
             <p:ph idx="100" type="title" hasCustomPrompt="1"/>
@@ -9501,7 +5918,7 @@
         </p:nvSpPr>
         <p:spPr>
           <a:xfrm>
-            <a:off x="457200" y="658368"/>
+            <a:off x="457200" y="411480"/>
             <a:ext cx="8229600" cy="914400"/>
           </a:xfrm>
           <a:prstGeom prst="rect">
@@ -9534,13 +5951,13 @@
       </p:sp>
       <p:sp>
         <p:nvSpPr>
-          <p:cNvPr id="14" name="tile-0"/>
+          <p:cNvPr id="3" name="tile-0"/>
           <p:cNvSpPr/>
           <p:nvPr/>
         </p:nvSpPr>
         <p:spPr>
           <a:xfrm>
-            <a:off x="457200" y="1737360"/>
+            <a:off x="457200" y="1600200"/>
             <a:ext cx="1954530" cy="1005840"/>
           </a:xfrm>
           <a:prstGeom prst="roundRect">
@@ -9556,13 +5973,13 @@
       </p:sp>
       <p:sp>
         <p:nvSpPr>
-          <p:cNvPr id="15" name="Text 13"/>
+          <p:cNvPr id="4" name="Text 2"/>
           <p:cNvSpPr txBox="1"/>
           <p:nvPr/>
         </p:nvSpPr>
         <p:spPr>
           <a:xfrm>
-            <a:off x="530352" y="1792224"/>
+            <a:off x="530352" y="1655064"/>
             <a:ext cx="1808226" cy="896112"/>
           </a:xfrm>
           <a:prstGeom prst="rect">
@@ -9618,13 +6035,13 @@
       </p:sp>
       <p:sp>
         <p:nvSpPr>
-          <p:cNvPr id="16" name="tile-1"/>
+          <p:cNvPr id="5" name="tile-1"/>
           <p:cNvSpPr/>
           <p:nvPr/>
         </p:nvSpPr>
         <p:spPr>
           <a:xfrm>
-            <a:off x="2548890" y="1737360"/>
+            <a:off x="2548890" y="1600200"/>
             <a:ext cx="1954530" cy="1005840"/>
           </a:xfrm>
           <a:prstGeom prst="roundRect">
@@ -9640,13 +6057,13 @@
       </p:sp>
       <p:sp>
         <p:nvSpPr>
-          <p:cNvPr id="17" name="Text 15"/>
+          <p:cNvPr id="6" name="Text 4"/>
           <p:cNvSpPr txBox="1"/>
           <p:nvPr/>
         </p:nvSpPr>
         <p:spPr>
           <a:xfrm>
-            <a:off x="2622042" y="1792224"/>
+            <a:off x="2622042" y="1655064"/>
             <a:ext cx="1808226" cy="896112"/>
           </a:xfrm>
           <a:prstGeom prst="rect">
@@ -9702,13 +6119,13 @@
       </p:sp>
       <p:sp>
         <p:nvSpPr>
-          <p:cNvPr id="18" name="tile-2"/>
+          <p:cNvPr id="7" name="tile-2"/>
           <p:cNvSpPr/>
           <p:nvPr/>
         </p:nvSpPr>
         <p:spPr>
           <a:xfrm>
-            <a:off x="4640580" y="1737360"/>
+            <a:off x="4640580" y="1600200"/>
             <a:ext cx="1954530" cy="1005840"/>
           </a:xfrm>
           <a:prstGeom prst="roundRect">
@@ -9724,13 +6141,13 @@
       </p:sp>
       <p:sp>
         <p:nvSpPr>
-          <p:cNvPr id="19" name="Text 17"/>
+          <p:cNvPr id="8" name="Text 6"/>
           <p:cNvSpPr txBox="1"/>
           <p:nvPr/>
         </p:nvSpPr>
         <p:spPr>
           <a:xfrm>
-            <a:off x="4713732" y="1792224"/>
+            <a:off x="4713732" y="1655064"/>
             <a:ext cx="1808226" cy="896112"/>
           </a:xfrm>
           <a:prstGeom prst="rect">
@@ -9786,13 +6203,13 @@
       </p:sp>
       <p:sp>
         <p:nvSpPr>
-          <p:cNvPr id="20" name="tile-3"/>
+          <p:cNvPr id="9" name="tile-3"/>
           <p:cNvSpPr/>
           <p:nvPr/>
         </p:nvSpPr>
         <p:spPr>
           <a:xfrm>
-            <a:off x="6732270" y="1737360"/>
+            <a:off x="6732270" y="1600200"/>
             <a:ext cx="1954530" cy="1005840"/>
           </a:xfrm>
           <a:prstGeom prst="roundRect">
@@ -9808,13 +6225,13 @@
       </p:sp>
       <p:sp>
         <p:nvSpPr>
-          <p:cNvPr id="21" name="Text 19"/>
+          <p:cNvPr id="10" name="Text 8"/>
           <p:cNvSpPr txBox="1"/>
           <p:nvPr/>
         </p:nvSpPr>
         <p:spPr>
           <a:xfrm>
-            <a:off x="6805422" y="1792224"/>
+            <a:off x="6805422" y="1655064"/>
             <a:ext cx="1808226" cy="896112"/>
           </a:xfrm>
           <a:prstGeom prst="rect">
@@ -9870,13 +6287,13 @@
       </p:sp>
       <p:sp>
         <p:nvSpPr>
-          <p:cNvPr id="22" name="scope-in"/>
+          <p:cNvPr id="11" name="scope-in"/>
           <p:cNvSpPr/>
           <p:nvPr/>
         </p:nvSpPr>
         <p:spPr>
           <a:xfrm>
-            <a:off x="457200" y="2971800"/>
+            <a:off x="457200" y="2834640"/>
             <a:ext cx="3977640" cy="1051560"/>
           </a:xfrm>
           <a:prstGeom prst="roundRect">
@@ -9892,13 +6309,13 @@
       </p:sp>
       <p:sp>
         <p:nvSpPr>
-          <p:cNvPr id="23" name="Text 21"/>
+          <p:cNvPr id="12" name="Text 10"/>
           <p:cNvSpPr txBox="1"/>
           <p:nvPr/>
         </p:nvSpPr>
         <p:spPr>
           <a:xfrm>
-            <a:off x="530352" y="3026664"/>
+            <a:off x="530352" y="2889504"/>
             <a:ext cx="3831336" cy="941832"/>
           </a:xfrm>
           <a:prstGeom prst="rect">
@@ -9954,13 +6371,13 @@
       </p:sp>
       <p:sp>
         <p:nvSpPr>
-          <p:cNvPr id="24" name="scope-out"/>
+          <p:cNvPr id="13" name="scope-out"/>
           <p:cNvSpPr/>
           <p:nvPr/>
         </p:nvSpPr>
         <p:spPr>
           <a:xfrm>
-            <a:off x="4709160" y="2971800"/>
+            <a:off x="4709160" y="2834640"/>
             <a:ext cx="3977640" cy="1051560"/>
           </a:xfrm>
           <a:prstGeom prst="roundRect">
@@ -9976,13 +6393,13 @@
       </p:sp>
       <p:sp>
         <p:nvSpPr>
-          <p:cNvPr id="25" name="Text 23"/>
+          <p:cNvPr id="14" name="Text 12"/>
           <p:cNvSpPr txBox="1"/>
           <p:nvPr/>
         </p:nvSpPr>
         <p:spPr>
           <a:xfrm>
-            <a:off x="4782312" y="3026664"/>
+            <a:off x="4782312" y="2889504"/>
             <a:ext cx="3831336" cy="941832"/>
           </a:xfrm>
           <a:prstGeom prst="rect">
@@ -10038,7 +6455,7 @@
       </p:sp>
       <p:sp>
         <p:nvSpPr>
-          <p:cNvPr id="26" name="section-ref"/>
+          <p:cNvPr id="15" name="section-ref"/>
           <p:cNvSpPr txBox="1"/>
           <p:nvPr/>
         </p:nvSpPr>
@@ -10150,388 +6567,7 @@
       </p:grpSpPr>
       <p:sp>
         <p:nvSpPr>
-          <p:cNvPr id="2" name="chain-0"/>
-          <p:cNvSpPr/>
-          <p:nvPr/>
-        </p:nvSpPr>
-        <p:spPr>
-          <a:xfrm>
-            <a:off x="457200" y="274320"/>
-            <a:ext cx="822960" cy="256032"/>
-          </a:xfrm>
-          <a:prstGeom prst="roundRect">
-            <a:avLst>
-              <a:gd name="adj" fmla="val 28571"/>
-            </a:avLst>
-          </a:prstGeom>
-          <a:solidFill>
-            <a:srgbClr val="FFFFFF"/>
-          </a:solidFill>
-          <a:ln w="12700">
-            <a:solidFill>
-              <a:srgbClr val="E5E7EB"/>
-            </a:solidFill>
-            <a:prstDash val="solid"/>
-          </a:ln>
-        </p:spPr>
-      </p:sp>
-      <p:sp>
-        <p:nvSpPr>
-          <p:cNvPr id="3" name="Text 1"/>
-          <p:cNvSpPr txBox="1"/>
-          <p:nvPr/>
-        </p:nvSpPr>
-        <p:spPr>
-          <a:xfrm>
-            <a:off x="457200" y="274320"/>
-            <a:ext cx="822960" cy="256032"/>
-          </a:xfrm>
-          <a:prstGeom prst="rect">
-            <a:avLst/>
-          </a:prstGeom>
-          <a:noFill/>
-          <a:ln/>
-        </p:spPr>
-        <p:txBody>
-          <a:bodyPr wrap="square" lIns="0" tIns="0" rIns="0" bIns="0" rtlCol="0" anchor="ctr"/>
-          <a:lstStyle/>
-          <a:p>
-            <a:pPr algn="ctr" indent="0" marL="0">
-              <a:buNone/>
-            </a:pPr>
-            <a:r>
-              <a:rPr lang="en-US" sz="1000" dirty="0">
-                <a:solidFill>
-                  <a:srgbClr val="6B7280"/>
-                </a:solidFill>
-                <a:latin typeface="Calibri" pitchFamily="34" charset="0"/>
-                <a:ea typeface="Calibri" pitchFamily="34" charset="-122"/>
-                <a:cs typeface="Calibri" pitchFamily="34" charset="-120"/>
-              </a:rPr>
-              <a:t>Проблема</a:t>
-            </a:r>
-            <a:endParaRPr lang="en-US" sz="1000" dirty="0"/>
-          </a:p>
-        </p:txBody>
-      </p:sp>
-      <p:sp>
-        <p:nvSpPr>
-          <p:cNvPr id="4" name="Text 2"/>
-          <p:cNvSpPr txBox="1"/>
-          <p:nvPr/>
-        </p:nvSpPr>
-        <p:spPr>
-          <a:xfrm>
-            <a:off x="1280160" y="274320"/>
-            <a:ext cx="228600" cy="256032"/>
-          </a:xfrm>
-          <a:prstGeom prst="rect">
-            <a:avLst/>
-          </a:prstGeom>
-          <a:noFill/>
-          <a:ln/>
-        </p:spPr>
-        <p:txBody>
-          <a:bodyPr wrap="square" lIns="0" tIns="0" rIns="0" bIns="0" rtlCol="0" anchor="ctr"/>
-          <a:lstStyle/>
-          <a:p>
-            <a:pPr algn="ctr" indent="0" marL="0">
-              <a:buNone/>
-            </a:pPr>
-            <a:r>
-              <a:rPr lang="en-US" sz="1000" dirty="0">
-                <a:solidFill>
-                  <a:srgbClr val="6B7280"/>
-                </a:solidFill>
-                <a:latin typeface="Calibri" pitchFamily="34" charset="0"/>
-                <a:ea typeface="Calibri" pitchFamily="34" charset="-122"/>
-                <a:cs typeface="Calibri" pitchFamily="34" charset="-120"/>
-              </a:rPr>
-              <a:t>→</a:t>
-            </a:r>
-            <a:endParaRPr lang="en-US" sz="1000" dirty="0"/>
-          </a:p>
-        </p:txBody>
-      </p:sp>
-      <p:sp>
-        <p:nvSpPr>
-          <p:cNvPr id="5" name="chain-1"/>
-          <p:cNvSpPr/>
-          <p:nvPr/>
-        </p:nvSpPr>
-        <p:spPr>
-          <a:xfrm>
-            <a:off x="1508760" y="274320"/>
-            <a:ext cx="512064" cy="256032"/>
-          </a:xfrm>
-          <a:prstGeom prst="roundRect">
-            <a:avLst>
-              <a:gd name="adj" fmla="val 28571"/>
-            </a:avLst>
-          </a:prstGeom>
-          <a:solidFill>
-            <a:srgbClr val="FFFFFF"/>
-          </a:solidFill>
-          <a:ln w="12700">
-            <a:solidFill>
-              <a:srgbClr val="E5E7EB"/>
-            </a:solidFill>
-            <a:prstDash val="solid"/>
-          </a:ln>
-        </p:spPr>
-      </p:sp>
-      <p:sp>
-        <p:nvSpPr>
-          <p:cNvPr id="6" name="Text 4"/>
-          <p:cNvSpPr txBox="1"/>
-          <p:nvPr/>
-        </p:nvSpPr>
-        <p:spPr>
-          <a:xfrm>
-            <a:off x="1508760" y="274320"/>
-            <a:ext cx="512064" cy="256032"/>
-          </a:xfrm>
-          <a:prstGeom prst="rect">
-            <a:avLst/>
-          </a:prstGeom>
-          <a:noFill/>
-          <a:ln/>
-        </p:spPr>
-        <p:txBody>
-          <a:bodyPr wrap="square" lIns="0" tIns="0" rIns="0" bIns="0" rtlCol="0" anchor="ctr"/>
-          <a:lstStyle/>
-          <a:p>
-            <a:pPr algn="ctr" indent="0" marL="0">
-              <a:buNone/>
-            </a:pPr>
-            <a:r>
-              <a:rPr lang="en-US" sz="1000" dirty="0">
-                <a:solidFill>
-                  <a:srgbClr val="6B7280"/>
-                </a:solidFill>
-                <a:latin typeface="Calibri" pitchFamily="34" charset="0"/>
-                <a:ea typeface="Calibri" pitchFamily="34" charset="-122"/>
-                <a:cs typeface="Calibri" pitchFamily="34" charset="-120"/>
-              </a:rPr>
-              <a:t>Цель</a:t>
-            </a:r>
-            <a:endParaRPr lang="en-US" sz="1000" dirty="0"/>
-          </a:p>
-        </p:txBody>
-      </p:sp>
-      <p:sp>
-        <p:nvSpPr>
-          <p:cNvPr id="7" name="Text 5"/>
-          <p:cNvSpPr txBox="1"/>
-          <p:nvPr/>
-        </p:nvSpPr>
-        <p:spPr>
-          <a:xfrm>
-            <a:off x="2020824" y="274320"/>
-            <a:ext cx="228600" cy="256032"/>
-          </a:xfrm>
-          <a:prstGeom prst="rect">
-            <a:avLst/>
-          </a:prstGeom>
-          <a:noFill/>
-          <a:ln/>
-        </p:spPr>
-        <p:txBody>
-          <a:bodyPr wrap="square" lIns="0" tIns="0" rIns="0" bIns="0" rtlCol="0" anchor="ctr"/>
-          <a:lstStyle/>
-          <a:p>
-            <a:pPr algn="ctr" indent="0" marL="0">
-              <a:buNone/>
-            </a:pPr>
-            <a:r>
-              <a:rPr lang="en-US" sz="1000" dirty="0">
-                <a:solidFill>
-                  <a:srgbClr val="6B7280"/>
-                </a:solidFill>
-                <a:latin typeface="Calibri" pitchFamily="34" charset="0"/>
-                <a:ea typeface="Calibri" pitchFamily="34" charset="-122"/>
-                <a:cs typeface="Calibri" pitchFamily="34" charset="-120"/>
-              </a:rPr>
-              <a:t>→</a:t>
-            </a:r>
-            <a:endParaRPr lang="en-US" sz="1000" dirty="0"/>
-          </a:p>
-        </p:txBody>
-      </p:sp>
-      <p:sp>
-        <p:nvSpPr>
-          <p:cNvPr id="8" name="chain-2"/>
-          <p:cNvSpPr/>
-          <p:nvPr/>
-        </p:nvSpPr>
-        <p:spPr>
-          <a:xfrm>
-            <a:off x="2249424" y="274320"/>
-            <a:ext cx="978408" cy="256032"/>
-          </a:xfrm>
-          <a:prstGeom prst="roundRect">
-            <a:avLst>
-              <a:gd name="adj" fmla="val 28571"/>
-            </a:avLst>
-          </a:prstGeom>
-          <a:solidFill>
-            <a:srgbClr val="FFFFFF"/>
-          </a:solidFill>
-          <a:ln w="12700">
-            <a:solidFill>
-              <a:srgbClr val="E5E7EB"/>
-            </a:solidFill>
-            <a:prstDash val="solid"/>
-          </a:ln>
-        </p:spPr>
-      </p:sp>
-      <p:sp>
-        <p:nvSpPr>
-          <p:cNvPr id="9" name="Text 7"/>
-          <p:cNvSpPr txBox="1"/>
-          <p:nvPr/>
-        </p:nvSpPr>
-        <p:spPr>
-          <a:xfrm>
-            <a:off x="2249424" y="274320"/>
-            <a:ext cx="978408" cy="256032"/>
-          </a:xfrm>
-          <a:prstGeom prst="rect">
-            <a:avLst/>
-          </a:prstGeom>
-          <a:noFill/>
-          <a:ln/>
-        </p:spPr>
-        <p:txBody>
-          <a:bodyPr wrap="square" lIns="0" tIns="0" rIns="0" bIns="0" rtlCol="0" anchor="ctr"/>
-          <a:lstStyle/>
-          <a:p>
-            <a:pPr algn="ctr" indent="0" marL="0">
-              <a:buNone/>
-            </a:pPr>
-            <a:r>
-              <a:rPr lang="en-US" sz="1000" dirty="0">
-                <a:solidFill>
-                  <a:srgbClr val="6B7280"/>
-                </a:solidFill>
-                <a:latin typeface="Calibri" pitchFamily="34" charset="0"/>
-                <a:ea typeface="Calibri" pitchFamily="34" charset="-122"/>
-                <a:cs typeface="Calibri" pitchFamily="34" charset="-120"/>
-              </a:rPr>
-              <a:t>Показатели</a:t>
-            </a:r>
-            <a:endParaRPr lang="en-US" sz="1000" dirty="0"/>
-          </a:p>
-        </p:txBody>
-      </p:sp>
-      <p:sp>
-        <p:nvSpPr>
-          <p:cNvPr id="10" name="Text 8"/>
-          <p:cNvSpPr txBox="1"/>
-          <p:nvPr/>
-        </p:nvSpPr>
-        <p:spPr>
-          <a:xfrm>
-            <a:off x="3227832" y="274320"/>
-            <a:ext cx="228600" cy="256032"/>
-          </a:xfrm>
-          <a:prstGeom prst="rect">
-            <a:avLst/>
-          </a:prstGeom>
-          <a:noFill/>
-          <a:ln/>
-        </p:spPr>
-        <p:txBody>
-          <a:bodyPr wrap="square" lIns="0" tIns="0" rIns="0" bIns="0" rtlCol="0" anchor="ctr"/>
-          <a:lstStyle/>
-          <a:p>
-            <a:pPr algn="ctr" indent="0" marL="0">
-              <a:buNone/>
-            </a:pPr>
-            <a:r>
-              <a:rPr lang="en-US" sz="1000" dirty="0">
-                <a:solidFill>
-                  <a:srgbClr val="6B7280"/>
-                </a:solidFill>
-                <a:latin typeface="Calibri" pitchFamily="34" charset="0"/>
-                <a:ea typeface="Calibri" pitchFamily="34" charset="-122"/>
-                <a:cs typeface="Calibri" pitchFamily="34" charset="-120"/>
-              </a:rPr>
-              <a:t>→</a:t>
-            </a:r>
-            <a:endParaRPr lang="en-US" sz="1000" dirty="0"/>
-          </a:p>
-        </p:txBody>
-      </p:sp>
-      <p:sp>
-        <p:nvSpPr>
-          <p:cNvPr id="11" name="chain-3"/>
-          <p:cNvSpPr/>
-          <p:nvPr/>
-        </p:nvSpPr>
-        <p:spPr>
-          <a:xfrm>
-            <a:off x="3456432" y="274320"/>
-            <a:ext cx="589788" cy="256032"/>
-          </a:xfrm>
-          <a:prstGeom prst="roundRect">
-            <a:avLst>
-              <a:gd name="adj" fmla="val 28571"/>
-            </a:avLst>
-          </a:prstGeom>
-          <a:solidFill>
-            <a:srgbClr val="0F766E"/>
-          </a:solidFill>
-          <a:ln w="12700">
-            <a:solidFill>
-              <a:srgbClr val="0F766E"/>
-            </a:solidFill>
-            <a:prstDash val="solid"/>
-          </a:ln>
-        </p:spPr>
-      </p:sp>
-      <p:sp>
-        <p:nvSpPr>
-          <p:cNvPr id="12" name="Text 10"/>
-          <p:cNvSpPr txBox="1"/>
-          <p:nvPr/>
-        </p:nvSpPr>
-        <p:spPr>
-          <a:xfrm>
-            <a:off x="3456432" y="274320"/>
-            <a:ext cx="589788" cy="256032"/>
-          </a:xfrm>
-          <a:prstGeom prst="rect">
-            <a:avLst/>
-          </a:prstGeom>
-          <a:noFill/>
-          <a:ln/>
-        </p:spPr>
-        <p:txBody>
-          <a:bodyPr wrap="square" lIns="0" tIns="0" rIns="0" bIns="0" rtlCol="0" anchor="ctr"/>
-          <a:lstStyle/>
-          <a:p>
-            <a:pPr algn="ctr" indent="0" marL="0">
-              <a:buNone/>
-            </a:pPr>
-            <a:r>
-              <a:rPr lang="en-US" sz="1000" dirty="0">
-                <a:solidFill>
-                  <a:srgbClr val="FFFFFF"/>
-                </a:solidFill>
-                <a:latin typeface="Calibri" pitchFamily="34" charset="0"/>
-                <a:ea typeface="Calibri" pitchFamily="34" charset="-122"/>
-                <a:cs typeface="Calibri" pitchFamily="34" charset="-120"/>
-              </a:rPr>
-              <a:t>Эпики</a:t>
-            </a:r>
-            <a:endParaRPr lang="en-US" sz="1000" dirty="0"/>
-          </a:p>
-        </p:txBody>
-      </p:sp>
-      <p:sp>
-        <p:nvSpPr>
-          <p:cNvPr id="13" name="Text 0"/>
+          <p:cNvPr id="2" name="Text 0"/>
           <p:cNvSpPr/>
           <p:nvPr>
             <p:ph idx="100" type="title" hasCustomPrompt="1"/>
@@ -10539,7 +6575,7 @@
         </p:nvSpPr>
         <p:spPr>
           <a:xfrm>
-            <a:off x="457200" y="658368"/>
+            <a:off x="457200" y="411480"/>
             <a:ext cx="8229600" cy="914400"/>
           </a:xfrm>
           <a:prstGeom prst="rect">
@@ -10572,13 +6608,13 @@
       </p:sp>
       <p:sp>
         <p:nvSpPr>
-          <p:cNvPr id="14" name="trace-0"/>
+          <p:cNvPr id="3" name="trace-0"/>
           <p:cNvSpPr/>
           <p:nvPr/>
         </p:nvSpPr>
         <p:spPr>
           <a:xfrm>
-            <a:off x="457200" y="1737360"/>
+            <a:off x="457200" y="1600200"/>
             <a:ext cx="1851660" cy="685800"/>
           </a:xfrm>
           <a:prstGeom prst="roundRect">
@@ -10594,13 +6630,13 @@
       </p:sp>
       <p:sp>
         <p:nvSpPr>
-          <p:cNvPr id="15" name="Text 13"/>
+          <p:cNvPr id="4" name="Text 2"/>
           <p:cNvSpPr txBox="1"/>
           <p:nvPr/>
         </p:nvSpPr>
         <p:spPr>
           <a:xfrm>
-            <a:off x="457200" y="1737360"/>
+            <a:off x="457200" y="1600200"/>
             <a:ext cx="1851660" cy="685800"/>
           </a:xfrm>
           <a:prstGeom prst="rect">
@@ -10633,13 +6669,13 @@
       </p:sp>
       <p:sp>
         <p:nvSpPr>
-          <p:cNvPr id="16" name="Text 14"/>
+          <p:cNvPr id="5" name="Text 3"/>
           <p:cNvSpPr txBox="1"/>
           <p:nvPr/>
         </p:nvSpPr>
         <p:spPr>
           <a:xfrm>
-            <a:off x="2308860" y="1737360"/>
+            <a:off x="2308860" y="1600200"/>
             <a:ext cx="274320" cy="685800"/>
           </a:xfrm>
           <a:prstGeom prst="rect">
@@ -10672,13 +6708,13 @@
       </p:sp>
       <p:sp>
         <p:nvSpPr>
-          <p:cNvPr id="17" name="trace-1"/>
+          <p:cNvPr id="6" name="trace-1"/>
           <p:cNvSpPr/>
           <p:nvPr/>
         </p:nvSpPr>
         <p:spPr>
           <a:xfrm>
-            <a:off x="2583180" y="1737360"/>
+            <a:off x="2583180" y="1600200"/>
             <a:ext cx="1851660" cy="685800"/>
           </a:xfrm>
           <a:prstGeom prst="roundRect">
@@ -10694,13 +6730,13 @@
       </p:sp>
       <p:sp>
         <p:nvSpPr>
-          <p:cNvPr id="18" name="Text 16"/>
+          <p:cNvPr id="7" name="Text 5"/>
           <p:cNvSpPr txBox="1"/>
           <p:nvPr/>
         </p:nvSpPr>
         <p:spPr>
           <a:xfrm>
-            <a:off x="2583180" y="1737360"/>
+            <a:off x="2583180" y="1600200"/>
             <a:ext cx="1851660" cy="685800"/>
           </a:xfrm>
           <a:prstGeom prst="rect">
@@ -10733,13 +6769,13 @@
       </p:sp>
       <p:sp>
         <p:nvSpPr>
-          <p:cNvPr id="19" name="Text 17"/>
+          <p:cNvPr id="8" name="Text 6"/>
           <p:cNvSpPr txBox="1"/>
           <p:nvPr/>
         </p:nvSpPr>
         <p:spPr>
           <a:xfrm>
-            <a:off x="4434840" y="1737360"/>
+            <a:off x="4434840" y="1600200"/>
             <a:ext cx="274320" cy="685800"/>
           </a:xfrm>
           <a:prstGeom prst="rect">
@@ -10772,13 +6808,13 @@
       </p:sp>
       <p:sp>
         <p:nvSpPr>
-          <p:cNvPr id="20" name="trace-2"/>
+          <p:cNvPr id="9" name="trace-2"/>
           <p:cNvSpPr/>
           <p:nvPr/>
         </p:nvSpPr>
         <p:spPr>
           <a:xfrm>
-            <a:off x="4709160" y="1737360"/>
+            <a:off x="4709160" y="1600200"/>
             <a:ext cx="1851660" cy="685800"/>
           </a:xfrm>
           <a:prstGeom prst="roundRect">
@@ -10794,13 +6830,13 @@
       </p:sp>
       <p:sp>
         <p:nvSpPr>
-          <p:cNvPr id="21" name="Text 19"/>
+          <p:cNvPr id="10" name="Text 8"/>
           <p:cNvSpPr txBox="1"/>
           <p:nvPr/>
         </p:nvSpPr>
         <p:spPr>
           <a:xfrm>
-            <a:off x="4709160" y="1737360"/>
+            <a:off x="4709160" y="1600200"/>
             <a:ext cx="1851660" cy="685800"/>
           </a:xfrm>
           <a:prstGeom prst="rect">
@@ -10833,13 +6869,13 @@
       </p:sp>
       <p:sp>
         <p:nvSpPr>
-          <p:cNvPr id="22" name="Text 20"/>
+          <p:cNvPr id="11" name="Text 9"/>
           <p:cNvSpPr txBox="1"/>
           <p:nvPr/>
         </p:nvSpPr>
         <p:spPr>
           <a:xfrm>
-            <a:off x="6560820" y="1737360"/>
+            <a:off x="6560820" y="1600200"/>
             <a:ext cx="274320" cy="685800"/>
           </a:xfrm>
           <a:prstGeom prst="rect">
@@ -10872,13 +6908,13 @@
       </p:sp>
       <p:sp>
         <p:nvSpPr>
-          <p:cNvPr id="23" name="trace-3"/>
+          <p:cNvPr id="12" name="trace-3"/>
           <p:cNvSpPr/>
           <p:nvPr/>
         </p:nvSpPr>
         <p:spPr>
           <a:xfrm>
-            <a:off x="6835140" y="1737360"/>
+            <a:off x="6835140" y="1600200"/>
             <a:ext cx="1851660" cy="685800"/>
           </a:xfrm>
           <a:prstGeom prst="roundRect">
@@ -10894,13 +6930,13 @@
       </p:sp>
       <p:sp>
         <p:nvSpPr>
-          <p:cNvPr id="24" name="Text 22"/>
+          <p:cNvPr id="13" name="Text 11"/>
           <p:cNvSpPr txBox="1"/>
           <p:nvPr/>
         </p:nvSpPr>
         <p:spPr>
           <a:xfrm>
-            <a:off x="6835140" y="1737360"/>
+            <a:off x="6835140" y="1600200"/>
             <a:ext cx="1851660" cy="685800"/>
           </a:xfrm>
           <a:prstGeom prst="rect">
@@ -10933,13 +6969,13 @@
       </p:sp>
       <p:sp>
         <p:nvSpPr>
-          <p:cNvPr id="25" name="epic-0"/>
+          <p:cNvPr id="14" name="epic-0"/>
           <p:cNvSpPr/>
           <p:nvPr/>
         </p:nvSpPr>
         <p:spPr>
           <a:xfrm>
-            <a:off x="457200" y="2651760"/>
+            <a:off x="457200" y="2514600"/>
             <a:ext cx="2651760" cy="411480"/>
           </a:xfrm>
           <a:prstGeom prst="roundRect">
@@ -10955,13 +6991,13 @@
       </p:sp>
       <p:sp>
         <p:nvSpPr>
-          <p:cNvPr id="26" name="Text 24"/>
+          <p:cNvPr id="15" name="Text 13"/>
           <p:cNvSpPr txBox="1"/>
           <p:nvPr/>
         </p:nvSpPr>
         <p:spPr>
           <a:xfrm>
-            <a:off x="457200" y="2651760"/>
+            <a:off x="457200" y="2514600"/>
             <a:ext cx="2651760" cy="411480"/>
           </a:xfrm>
           <a:prstGeom prst="rect">
@@ -10994,13 +7030,13 @@
       </p:sp>
       <p:sp>
         <p:nvSpPr>
-          <p:cNvPr id="27" name="epic-1"/>
+          <p:cNvPr id="16" name="epic-1"/>
           <p:cNvSpPr/>
           <p:nvPr/>
         </p:nvSpPr>
         <p:spPr>
           <a:xfrm>
-            <a:off x="3246120" y="2651760"/>
+            <a:off x="3246120" y="2514600"/>
             <a:ext cx="2651760" cy="411480"/>
           </a:xfrm>
           <a:prstGeom prst="roundRect">
@@ -11016,13 +7052,13 @@
       </p:sp>
       <p:sp>
         <p:nvSpPr>
-          <p:cNvPr id="28" name="Text 26"/>
+          <p:cNvPr id="17" name="Text 15"/>
           <p:cNvSpPr txBox="1"/>
           <p:nvPr/>
         </p:nvSpPr>
         <p:spPr>
           <a:xfrm>
-            <a:off x="3246120" y="2651760"/>
+            <a:off x="3246120" y="2514600"/>
             <a:ext cx="2651760" cy="411480"/>
           </a:xfrm>
           <a:prstGeom prst="rect">
@@ -11055,13 +7091,13 @@
       </p:sp>
       <p:sp>
         <p:nvSpPr>
-          <p:cNvPr id="29" name="epic-2"/>
+          <p:cNvPr id="18" name="epic-2"/>
           <p:cNvSpPr/>
           <p:nvPr/>
         </p:nvSpPr>
         <p:spPr>
           <a:xfrm>
-            <a:off x="6035040" y="2651760"/>
+            <a:off x="6035040" y="2514600"/>
             <a:ext cx="2651760" cy="411480"/>
           </a:xfrm>
           <a:prstGeom prst="roundRect">
@@ -11077,13 +7113,13 @@
       </p:sp>
       <p:sp>
         <p:nvSpPr>
-          <p:cNvPr id="30" name="Text 28"/>
+          <p:cNvPr id="19" name="Text 17"/>
           <p:cNvSpPr txBox="1"/>
           <p:nvPr/>
         </p:nvSpPr>
         <p:spPr>
           <a:xfrm>
-            <a:off x="6035040" y="2651760"/>
+            <a:off x="6035040" y="2514600"/>
             <a:ext cx="2651760" cy="411480"/>
           </a:xfrm>
           <a:prstGeom prst="rect">
@@ -11116,13 +7152,13 @@
       </p:sp>
       <p:sp>
         <p:nvSpPr>
-          <p:cNvPr id="31" name="epic-3"/>
+          <p:cNvPr id="20" name="epic-3"/>
           <p:cNvSpPr/>
           <p:nvPr/>
         </p:nvSpPr>
         <p:spPr>
           <a:xfrm>
-            <a:off x="457200" y="3154680"/>
+            <a:off x="457200" y="3017520"/>
             <a:ext cx="2651760" cy="411480"/>
           </a:xfrm>
           <a:prstGeom prst="roundRect">
@@ -11138,13 +7174,13 @@
       </p:sp>
       <p:sp>
         <p:nvSpPr>
-          <p:cNvPr id="32" name="Text 30"/>
+          <p:cNvPr id="21" name="Text 19"/>
           <p:cNvSpPr txBox="1"/>
           <p:nvPr/>
         </p:nvSpPr>
         <p:spPr>
           <a:xfrm>
-            <a:off x="457200" y="3154680"/>
+            <a:off x="457200" y="3017520"/>
             <a:ext cx="2651760" cy="411480"/>
           </a:xfrm>
           <a:prstGeom prst="rect">
@@ -11177,13 +7213,13 @@
       </p:sp>
       <p:sp>
         <p:nvSpPr>
-          <p:cNvPr id="33" name="epic-4"/>
+          <p:cNvPr id="22" name="epic-4"/>
           <p:cNvSpPr/>
           <p:nvPr/>
         </p:nvSpPr>
         <p:spPr>
           <a:xfrm>
-            <a:off x="3246120" y="3154680"/>
+            <a:off x="3246120" y="3017520"/>
             <a:ext cx="2651760" cy="411480"/>
           </a:xfrm>
           <a:prstGeom prst="roundRect">
@@ -11199,13 +7235,13 @@
       </p:sp>
       <p:sp>
         <p:nvSpPr>
-          <p:cNvPr id="34" name="Text 32"/>
+          <p:cNvPr id="23" name="Text 21"/>
           <p:cNvSpPr txBox="1"/>
           <p:nvPr/>
         </p:nvSpPr>
         <p:spPr>
           <a:xfrm>
-            <a:off x="3246120" y="3154680"/>
+            <a:off x="3246120" y="3017520"/>
             <a:ext cx="2651760" cy="411480"/>
           </a:xfrm>
           <a:prstGeom prst="rect">
@@ -11238,13 +7274,13 @@
       </p:sp>
       <p:sp>
         <p:nvSpPr>
-          <p:cNvPr id="35" name="epic-5"/>
+          <p:cNvPr id="24" name="epic-5"/>
           <p:cNvSpPr/>
           <p:nvPr/>
         </p:nvSpPr>
         <p:spPr>
           <a:xfrm>
-            <a:off x="6035040" y="3154680"/>
+            <a:off x="6035040" y="3017520"/>
             <a:ext cx="2651760" cy="411480"/>
           </a:xfrm>
           <a:prstGeom prst="roundRect">
@@ -11260,13 +7296,13 @@
       </p:sp>
       <p:sp>
         <p:nvSpPr>
-          <p:cNvPr id="36" name="Text 34"/>
+          <p:cNvPr id="25" name="Text 23"/>
           <p:cNvSpPr txBox="1"/>
           <p:nvPr/>
         </p:nvSpPr>
         <p:spPr>
           <a:xfrm>
-            <a:off x="6035040" y="3154680"/>
+            <a:off x="6035040" y="3017520"/>
             <a:ext cx="2651760" cy="411480"/>
           </a:xfrm>
           <a:prstGeom prst="rect">
@@ -11299,13 +7335,13 @@
       </p:sp>
       <p:sp>
         <p:nvSpPr>
-          <p:cNvPr id="37" name="step-0"/>
+          <p:cNvPr id="26" name="step-0"/>
           <p:cNvSpPr/>
           <p:nvPr/>
         </p:nvSpPr>
         <p:spPr>
           <a:xfrm>
-            <a:off x="457200" y="3794760"/>
+            <a:off x="457200" y="3657600"/>
             <a:ext cx="1558138" cy="731520"/>
           </a:xfrm>
           <a:prstGeom prst="roundRect">
@@ -11321,13 +7357,13 @@
       </p:sp>
       <p:sp>
         <p:nvSpPr>
-          <p:cNvPr id="38" name="Text 36"/>
+          <p:cNvPr id="27" name="Text 25"/>
           <p:cNvSpPr txBox="1"/>
           <p:nvPr/>
         </p:nvSpPr>
         <p:spPr>
           <a:xfrm>
-            <a:off x="457200" y="3794760"/>
+            <a:off x="457200" y="3657600"/>
             <a:ext cx="1558138" cy="731520"/>
           </a:xfrm>
           <a:prstGeom prst="rect">
@@ -11360,13 +7396,13 @@
       </p:sp>
       <p:sp>
         <p:nvSpPr>
-          <p:cNvPr id="39" name="step-1"/>
+          <p:cNvPr id="28" name="step-1"/>
           <p:cNvSpPr/>
           <p:nvPr/>
         </p:nvSpPr>
         <p:spPr>
           <a:xfrm>
-            <a:off x="2125066" y="3794760"/>
+            <a:off x="2125066" y="3657600"/>
             <a:ext cx="1558138" cy="731520"/>
           </a:xfrm>
           <a:prstGeom prst="roundRect">
@@ -11382,13 +7418,13 @@
       </p:sp>
       <p:sp>
         <p:nvSpPr>
-          <p:cNvPr id="40" name="Text 38"/>
+          <p:cNvPr id="29" name="Text 27"/>
           <p:cNvSpPr txBox="1"/>
           <p:nvPr/>
         </p:nvSpPr>
         <p:spPr>
           <a:xfrm>
-            <a:off x="2125066" y="3794760"/>
+            <a:off x="2125066" y="3657600"/>
             <a:ext cx="1558138" cy="731520"/>
           </a:xfrm>
           <a:prstGeom prst="rect">
@@ -11421,13 +7457,13 @@
       </p:sp>
       <p:sp>
         <p:nvSpPr>
-          <p:cNvPr id="41" name="step-2"/>
+          <p:cNvPr id="30" name="step-2"/>
           <p:cNvSpPr/>
           <p:nvPr/>
         </p:nvSpPr>
         <p:spPr>
           <a:xfrm>
-            <a:off x="3792931" y="3794760"/>
+            <a:off x="3792931" y="3657600"/>
             <a:ext cx="1558138" cy="731520"/>
           </a:xfrm>
           <a:prstGeom prst="roundRect">
@@ -11443,13 +7479,13 @@
       </p:sp>
       <p:sp>
         <p:nvSpPr>
-          <p:cNvPr id="42" name="Text 40"/>
+          <p:cNvPr id="31" name="Text 29"/>
           <p:cNvSpPr txBox="1"/>
           <p:nvPr/>
         </p:nvSpPr>
         <p:spPr>
           <a:xfrm>
-            <a:off x="3792931" y="3794760"/>
+            <a:off x="3792931" y="3657600"/>
             <a:ext cx="1558138" cy="731520"/>
           </a:xfrm>
           <a:prstGeom prst="rect">
@@ -11499,13 +7535,13 @@
       </p:sp>
       <p:sp>
         <p:nvSpPr>
-          <p:cNvPr id="43" name="step-3"/>
+          <p:cNvPr id="32" name="step-3"/>
           <p:cNvSpPr/>
           <p:nvPr/>
         </p:nvSpPr>
         <p:spPr>
           <a:xfrm>
-            <a:off x="5460797" y="3794760"/>
+            <a:off x="5460797" y="3657600"/>
             <a:ext cx="1558138" cy="731520"/>
           </a:xfrm>
           <a:prstGeom prst="roundRect">
@@ -11521,13 +7557,13 @@
       </p:sp>
       <p:sp>
         <p:nvSpPr>
-          <p:cNvPr id="44" name="Text 42"/>
+          <p:cNvPr id="33" name="Text 31"/>
           <p:cNvSpPr txBox="1"/>
           <p:nvPr/>
         </p:nvSpPr>
         <p:spPr>
           <a:xfrm>
-            <a:off x="5460797" y="3794760"/>
+            <a:off x="5460797" y="3657600"/>
             <a:ext cx="1558138" cy="731520"/>
           </a:xfrm>
           <a:prstGeom prst="rect">
@@ -11560,13 +7596,13 @@
       </p:sp>
       <p:sp>
         <p:nvSpPr>
-          <p:cNvPr id="45" name="step-4"/>
+          <p:cNvPr id="34" name="step-4"/>
           <p:cNvSpPr/>
           <p:nvPr/>
         </p:nvSpPr>
         <p:spPr>
           <a:xfrm>
-            <a:off x="7128662" y="3794760"/>
+            <a:off x="7128662" y="3657600"/>
             <a:ext cx="1558138" cy="731520"/>
           </a:xfrm>
           <a:prstGeom prst="roundRect">
@@ -11582,13 +7618,13 @@
       </p:sp>
       <p:sp>
         <p:nvSpPr>
-          <p:cNvPr id="46" name="Text 44"/>
+          <p:cNvPr id="35" name="Text 33"/>
           <p:cNvSpPr txBox="1"/>
           <p:nvPr/>
         </p:nvSpPr>
         <p:spPr>
           <a:xfrm>
-            <a:off x="7128662" y="3794760"/>
+            <a:off x="7128662" y="3657600"/>
             <a:ext cx="1558138" cy="731520"/>
           </a:xfrm>
           <a:prstGeom prst="rect">
@@ -11621,7 +7657,7 @@
       </p:sp>
       <p:sp>
         <p:nvSpPr>
-          <p:cNvPr id="47" name="section-ref"/>
+          <p:cNvPr id="36" name="section-ref"/>
           <p:cNvSpPr txBox="1"/>
           <p:nvPr/>
         </p:nvSpPr>
@@ -11733,18 +7769,395 @@
       </p:grpSpPr>
       <p:sp>
         <p:nvSpPr>
-          <p:cNvPr id="2" name="chain-0"/>
+          <p:cNvPr id="2" name="Text 0"/>
           <p:cNvSpPr/>
-          <p:nvPr/>
-        </p:nvSpPr>
-        <p:spPr>
-          <a:xfrm>
-            <a:off x="457200" y="274320"/>
-            <a:ext cx="822960" cy="256032"/>
+          <p:nvPr>
+            <p:ph idx="100" type="title" hasCustomPrompt="1"/>
+          </p:nvPr>
+        </p:nvSpPr>
+        <p:spPr>
+          <a:xfrm>
+            <a:off x="457200" y="411480"/>
+            <a:ext cx="8229600" cy="914400"/>
+          </a:xfrm>
+          <a:prstGeom prst="rect">
+            <a:avLst/>
+          </a:prstGeom>
+          <a:noFill/>
+          <a:ln/>
+        </p:spPr>
+        <p:txBody>
+          <a:bodyPr wrap="square" lIns="0" tIns="0" rIns="0" bIns="0" rtlCol="0" anchor="t"/>
+          <a:lstStyle/>
+          <a:p>
+            <a:pPr algn="l" indent="0" marL="0">
+              <a:buNone/>
+            </a:pPr>
+            <a:r>
+              <a:rPr lang="en-US" sz="2600" b="1" dirty="0">
+                <a:solidFill>
+                  <a:srgbClr val="111827"/>
+                </a:solidFill>
+                <a:latin typeface="Calibri" pitchFamily="34" charset="0"/>
+                <a:ea typeface="Calibri" pitchFamily="34" charset="-122"/>
+                <a:cs typeface="Calibri" pitchFamily="34" charset="-120"/>
+              </a:rPr>
+              <a:t>Быстро, только своим и по закону</a:t>
+            </a:r>
+            <a:endParaRPr lang="en-US" sz="2600" dirty="0"/>
+          </a:p>
+        </p:txBody>
+      </p:sp>
+      <p:sp>
+        <p:nvSpPr>
+          <p:cNvPr id="3" name="tile-0"/>
+          <p:cNvSpPr/>
+          <p:nvPr/>
+        </p:nvSpPr>
+        <p:spPr>
+          <a:xfrm>
+            <a:off x="457200" y="1600200"/>
+            <a:ext cx="1954530" cy="1005840"/>
           </a:xfrm>
           <a:prstGeom prst="roundRect">
             <a:avLst>
-              <a:gd name="adj" fmla="val 28571"/>
+              <a:gd name="adj" fmla="val 7273"/>
+            </a:avLst>
+          </a:prstGeom>
+          <a:solidFill>
+            <a:srgbClr val="0F172A"/>
+          </a:solidFill>
+          <a:ln/>
+        </p:spPr>
+      </p:sp>
+      <p:sp>
+        <p:nvSpPr>
+          <p:cNvPr id="4" name="Text 2"/>
+          <p:cNvSpPr txBox="1"/>
+          <p:nvPr/>
+        </p:nvSpPr>
+        <p:spPr>
+          <a:xfrm>
+            <a:off x="530352" y="1655064"/>
+            <a:ext cx="1808226" cy="896112"/>
+          </a:xfrm>
+          <a:prstGeom prst="rect">
+            <a:avLst/>
+          </a:prstGeom>
+          <a:noFill/>
+          <a:ln/>
+        </p:spPr>
+        <p:txBody>
+          <a:bodyPr wrap="square" lIns="1016" tIns="1016" rIns="1016" bIns="1016" rtlCol="0" anchor="t"/>
+          <a:lstStyle/>
+          <a:p>
+            <a:pPr algn="l" indent="0" marL="0">
+              <a:spcAft>
+                <a:spcPts val="300"/>
+              </a:spcAft>
+              <a:buNone/>
+            </a:pPr>
+            <a:r>
+              <a:rPr lang="en-US" sz="1000" dirty="0">
+                <a:solidFill>
+                  <a:srgbClr val="94A3B8"/>
+                </a:solidFill>
+                <a:latin typeface="Calibri" pitchFamily="34" charset="0"/>
+                <a:ea typeface="Calibri" pitchFamily="34" charset="-122"/>
+                <a:cs typeface="Calibri" pitchFamily="34" charset="-120"/>
+              </a:rPr>
+              <a:t>Сборка карты</a:t>
+            </a:r>
+            <a:endParaRPr lang="en-US" sz="1400" dirty="0"/>
+          </a:p>
+          <a:p>
+            <a:pPr algn="l" indent="0" marL="0">
+              <a:spcAft>
+                <a:spcPts val="300"/>
+              </a:spcAft>
+              <a:buNone/>
+            </a:pPr>
+            <a:r>
+              <a:rPr lang="en-US" sz="1700" b="1" dirty="0">
+                <a:solidFill>
+                  <a:srgbClr val="FFFFFF"/>
+                </a:solidFill>
+                <a:latin typeface="Calibri" pitchFamily="34" charset="0"/>
+                <a:ea typeface="Calibri" pitchFamily="34" charset="-122"/>
+                <a:cs typeface="Calibri" pitchFamily="34" charset="-120"/>
+              </a:rPr>
+              <a:t>до 10 минут</a:t>
+            </a:r>
+            <a:endParaRPr lang="en-US" sz="1400" dirty="0"/>
+          </a:p>
+        </p:txBody>
+      </p:sp>
+      <p:sp>
+        <p:nvSpPr>
+          <p:cNvPr id="5" name="tile-1"/>
+          <p:cNvSpPr/>
+          <p:nvPr/>
+        </p:nvSpPr>
+        <p:spPr>
+          <a:xfrm>
+            <a:off x="2548890" y="1600200"/>
+            <a:ext cx="1954530" cy="1005840"/>
+          </a:xfrm>
+          <a:prstGeom prst="roundRect">
+            <a:avLst>
+              <a:gd name="adj" fmla="val 7273"/>
+            </a:avLst>
+          </a:prstGeom>
+          <a:solidFill>
+            <a:srgbClr val="0F172A"/>
+          </a:solidFill>
+          <a:ln/>
+        </p:spPr>
+      </p:sp>
+      <p:sp>
+        <p:nvSpPr>
+          <p:cNvPr id="6" name="Text 4"/>
+          <p:cNvSpPr txBox="1"/>
+          <p:nvPr/>
+        </p:nvSpPr>
+        <p:spPr>
+          <a:xfrm>
+            <a:off x="2622042" y="1655064"/>
+            <a:ext cx="1808226" cy="896112"/>
+          </a:xfrm>
+          <a:prstGeom prst="rect">
+            <a:avLst/>
+          </a:prstGeom>
+          <a:noFill/>
+          <a:ln/>
+        </p:spPr>
+        <p:txBody>
+          <a:bodyPr wrap="square" lIns="1016" tIns="1016" rIns="1016" bIns="1016" rtlCol="0" anchor="t"/>
+          <a:lstStyle/>
+          <a:p>
+            <a:pPr algn="l" indent="0" marL="0">
+              <a:spcAft>
+                <a:spcPts val="300"/>
+              </a:spcAft>
+              <a:buNone/>
+            </a:pPr>
+            <a:r>
+              <a:rPr lang="en-US" sz="1000" dirty="0">
+                <a:solidFill>
+                  <a:srgbClr val="94A3B8"/>
+                </a:solidFill>
+                <a:latin typeface="Calibri" pitchFamily="34" charset="0"/>
+                <a:ea typeface="Calibri" pitchFamily="34" charset="-122"/>
+                <a:cs typeface="Calibri" pitchFamily="34" charset="-120"/>
+              </a:rPr>
+              <a:t>Открыть карту в браузере</a:t>
+            </a:r>
+            <a:endParaRPr lang="en-US" sz="1400" dirty="0"/>
+          </a:p>
+          <a:p>
+            <a:pPr algn="l" indent="0" marL="0">
+              <a:spcAft>
+                <a:spcPts val="300"/>
+              </a:spcAft>
+              <a:buNone/>
+            </a:pPr>
+            <a:r>
+              <a:rPr lang="en-US" sz="1700" b="1" dirty="0">
+                <a:solidFill>
+                  <a:srgbClr val="FFFFFF"/>
+                </a:solidFill>
+                <a:latin typeface="Calibri" pitchFamily="34" charset="0"/>
+                <a:ea typeface="Calibri" pitchFamily="34" charset="-122"/>
+                <a:cs typeface="Calibri" pitchFamily="34" charset="-120"/>
+              </a:rPr>
+              <a:t>до 10 секунд</a:t>
+            </a:r>
+            <a:endParaRPr lang="en-US" sz="1400" dirty="0"/>
+          </a:p>
+        </p:txBody>
+      </p:sp>
+      <p:sp>
+        <p:nvSpPr>
+          <p:cNvPr id="7" name="tile-2"/>
+          <p:cNvSpPr/>
+          <p:nvPr/>
+        </p:nvSpPr>
+        <p:spPr>
+          <a:xfrm>
+            <a:off x="4640580" y="1600200"/>
+            <a:ext cx="1954530" cy="1005840"/>
+          </a:xfrm>
+          <a:prstGeom prst="roundRect">
+            <a:avLst>
+              <a:gd name="adj" fmla="val 7273"/>
+            </a:avLst>
+          </a:prstGeom>
+          <a:solidFill>
+            <a:srgbClr val="0F172A"/>
+          </a:solidFill>
+          <a:ln/>
+        </p:spPr>
+      </p:sp>
+      <p:sp>
+        <p:nvSpPr>
+          <p:cNvPr id="8" name="Text 6"/>
+          <p:cNvSpPr txBox="1"/>
+          <p:nvPr/>
+        </p:nvSpPr>
+        <p:spPr>
+          <a:xfrm>
+            <a:off x="4713732" y="1655064"/>
+            <a:ext cx="1808226" cy="896112"/>
+          </a:xfrm>
+          <a:prstGeom prst="rect">
+            <a:avLst/>
+          </a:prstGeom>
+          <a:noFill/>
+          <a:ln/>
+        </p:spPr>
+        <p:txBody>
+          <a:bodyPr wrap="square" lIns="1016" tIns="1016" rIns="1016" bIns="1016" rtlCol="0" anchor="t"/>
+          <a:lstStyle/>
+          <a:p>
+            <a:pPr algn="l" indent="0" marL="0">
+              <a:spcAft>
+                <a:spcPts val="300"/>
+              </a:spcAft>
+              <a:buNone/>
+            </a:pPr>
+            <a:r>
+              <a:rPr lang="en-US" sz="1000" dirty="0">
+                <a:solidFill>
+                  <a:srgbClr val="94A3B8"/>
+                </a:solidFill>
+                <a:latin typeface="Calibri" pitchFamily="34" charset="0"/>
+                <a:ea typeface="Calibri" pitchFamily="34" charset="-122"/>
+                <a:cs typeface="Calibri" pitchFamily="34" charset="-120"/>
+              </a:rPr>
+              <a:t>Сервис доступен</a:t>
+            </a:r>
+            <a:endParaRPr lang="en-US" sz="1400" dirty="0"/>
+          </a:p>
+          <a:p>
+            <a:pPr algn="l" indent="0" marL="0">
+              <a:spcAft>
+                <a:spcPts val="300"/>
+              </a:spcAft>
+              <a:buNone/>
+            </a:pPr>
+            <a:r>
+              <a:rPr lang="en-US" sz="1700" b="1" dirty="0">
+                <a:solidFill>
+                  <a:srgbClr val="FFFFFF"/>
+                </a:solidFill>
+                <a:latin typeface="Calibri" pitchFamily="34" charset="0"/>
+                <a:ea typeface="Calibri" pitchFamily="34" charset="-122"/>
+                <a:cs typeface="Calibri" pitchFamily="34" charset="-120"/>
+              </a:rPr>
+              <a:t>не меньше 99% времени</a:t>
+            </a:r>
+            <a:endParaRPr lang="en-US" sz="1400" dirty="0"/>
+          </a:p>
+        </p:txBody>
+      </p:sp>
+      <p:sp>
+        <p:nvSpPr>
+          <p:cNvPr id="9" name="tile-3"/>
+          <p:cNvSpPr/>
+          <p:nvPr/>
+        </p:nvSpPr>
+        <p:spPr>
+          <a:xfrm>
+            <a:off x="6732270" y="1600200"/>
+            <a:ext cx="1954530" cy="1005840"/>
+          </a:xfrm>
+          <a:prstGeom prst="roundRect">
+            <a:avLst>
+              <a:gd name="adj" fmla="val 7273"/>
+            </a:avLst>
+          </a:prstGeom>
+          <a:solidFill>
+            <a:srgbClr val="0F172A"/>
+          </a:solidFill>
+          <a:ln/>
+        </p:spPr>
+      </p:sp>
+      <p:sp>
+        <p:nvSpPr>
+          <p:cNvPr id="10" name="Text 8"/>
+          <p:cNvSpPr txBox="1"/>
+          <p:nvPr/>
+        </p:nvSpPr>
+        <p:spPr>
+          <a:xfrm>
+            <a:off x="6805422" y="1655064"/>
+            <a:ext cx="1808226" cy="896112"/>
+          </a:xfrm>
+          <a:prstGeom prst="rect">
+            <a:avLst/>
+          </a:prstGeom>
+          <a:noFill/>
+          <a:ln/>
+        </p:spPr>
+        <p:txBody>
+          <a:bodyPr wrap="square" lIns="1016" tIns="1016" rIns="1016" bIns="1016" rtlCol="0" anchor="t"/>
+          <a:lstStyle/>
+          <a:p>
+            <a:pPr algn="l" indent="0" marL="0">
+              <a:spcAft>
+                <a:spcPts val="300"/>
+              </a:spcAft>
+              <a:buNone/>
+            </a:pPr>
+            <a:r>
+              <a:rPr lang="en-US" sz="1000" dirty="0">
+                <a:solidFill>
+                  <a:srgbClr val="94A3B8"/>
+                </a:solidFill>
+                <a:latin typeface="Calibri" pitchFamily="34" charset="0"/>
+                <a:ea typeface="Calibri" pitchFamily="34" charset="-122"/>
+                <a:cs typeface="Calibri" pitchFamily="34" charset="-120"/>
+              </a:rPr>
+              <a:t>Доступность веб-страниц</a:t>
+            </a:r>
+            <a:endParaRPr lang="en-US" sz="1400" dirty="0"/>
+          </a:p>
+          <a:p>
+            <a:pPr algn="l" indent="0" marL="0">
+              <a:spcAft>
+                <a:spcPts val="300"/>
+              </a:spcAft>
+              <a:buNone/>
+            </a:pPr>
+            <a:r>
+              <a:rPr lang="en-US" sz="1700" b="1" dirty="0">
+                <a:solidFill>
+                  <a:srgbClr val="FFFFFF"/>
+                </a:solidFill>
+                <a:latin typeface="Calibri" pitchFamily="34" charset="0"/>
+                <a:ea typeface="Calibri" pitchFamily="34" charset="-122"/>
+                <a:cs typeface="Calibri" pitchFamily="34" charset="-120"/>
+              </a:rPr>
+              <a:t>уровень AA</a:t>
+            </a:r>
+            <a:endParaRPr lang="en-US" sz="1400" dirty="0"/>
+          </a:p>
+        </p:txBody>
+      </p:sp>
+      <p:sp>
+        <p:nvSpPr>
+          <p:cNvPr id="11" name="legal-0"/>
+          <p:cNvSpPr/>
+          <p:nvPr/>
+        </p:nvSpPr>
+        <p:spPr>
+          <a:xfrm>
+            <a:off x="457200" y="2834640"/>
+            <a:ext cx="1954530" cy="1280160"/>
+          </a:xfrm>
+          <a:prstGeom prst="roundRect">
+            <a:avLst>
+              <a:gd name="adj" fmla="val 5714"/>
             </a:avLst>
           </a:prstGeom>
           <a:solidFill>
@@ -11760,14 +8173,14 @@
       </p:sp>
       <p:sp>
         <p:nvSpPr>
-          <p:cNvPr id="3" name="Text 1"/>
+          <p:cNvPr id="12" name="Text 10"/>
           <p:cNvSpPr txBox="1"/>
           <p:nvPr/>
         </p:nvSpPr>
         <p:spPr>
           <a:xfrm>
-            <a:off x="457200" y="274320"/>
-            <a:ext cx="822960" cy="256032"/>
+            <a:off x="530352" y="2889504"/>
+            <a:ext cx="1808226" cy="1170432"/>
           </a:xfrm>
           <a:prstGeom prst="rect">
             <a:avLst/>
@@ -11776,10 +8189,13 @@
           <a:ln/>
         </p:spPr>
         <p:txBody>
-          <a:bodyPr wrap="square" lIns="0" tIns="0" rIns="0" bIns="0" rtlCol="0" anchor="ctr"/>
-          <a:lstStyle/>
-          <a:p>
-            <a:pPr algn="ctr" indent="0" marL="0">
+          <a:bodyPr wrap="square" lIns="1016" tIns="1016" rIns="1016" bIns="1016" rtlCol="0" anchor="t"/>
+          <a:lstStyle/>
+          <a:p>
+            <a:pPr algn="l" indent="0" marL="0">
+              <a:spcAft>
+                <a:spcPts val="300"/>
+              </a:spcAft>
               <a:buNone/>
             </a:pPr>
             <a:r>
@@ -11791,65 +8207,46 @@
                 <a:ea typeface="Calibri" pitchFamily="34" charset="-122"/>
                 <a:cs typeface="Calibri" pitchFamily="34" charset="-120"/>
               </a:rPr>
-              <a:t>Проблема</a:t>
-            </a:r>
-            <a:endParaRPr lang="en-US" sz="1000" dirty="0"/>
-          </a:p>
-        </p:txBody>
-      </p:sp>
-      <p:sp>
-        <p:nvSpPr>
-          <p:cNvPr id="4" name="Text 2"/>
-          <p:cNvSpPr txBox="1"/>
-          <p:nvPr/>
-        </p:nvSpPr>
-        <p:spPr>
-          <a:xfrm>
-            <a:off x="1280160" y="274320"/>
-            <a:ext cx="228600" cy="256032"/>
-          </a:xfrm>
-          <a:prstGeom prst="rect">
-            <a:avLst/>
-          </a:prstGeom>
-          <a:noFill/>
-          <a:ln/>
-        </p:spPr>
-        <p:txBody>
-          <a:bodyPr wrap="square" lIns="0" tIns="0" rIns="0" bIns="0" rtlCol="0" anchor="ctr"/>
-          <a:lstStyle/>
-          <a:p>
-            <a:pPr algn="ctr" indent="0" marL="0">
-              <a:buNone/>
-            </a:pPr>
-            <a:r>
-              <a:rPr lang="en-US" sz="1000" dirty="0">
-                <a:solidFill>
-                  <a:srgbClr val="6B7280"/>
-                </a:solidFill>
-                <a:latin typeface="Calibri" pitchFamily="34" charset="0"/>
-                <a:ea typeface="Calibri" pitchFamily="34" charset="-122"/>
-                <a:cs typeface="Calibri" pitchFamily="34" charset="-120"/>
-              </a:rPr>
-              <a:t>→</a:t>
-            </a:r>
-            <a:endParaRPr lang="en-US" sz="1000" dirty="0"/>
-          </a:p>
-        </p:txBody>
-      </p:sp>
-      <p:sp>
-        <p:nvSpPr>
-          <p:cNvPr id="5" name="chain-1"/>
+              <a:t>Своя съёмка</a:t>
+            </a:r>
+            <a:endParaRPr lang="en-US" sz="1400" dirty="0"/>
+          </a:p>
+          <a:p>
+            <a:pPr algn="l" indent="0" marL="0">
+              <a:spcAft>
+                <a:spcPts val="300"/>
+              </a:spcAft>
+              <a:buNone/>
+            </a:pPr>
+            <a:r>
+              <a:rPr lang="en-US" sz="1400" dirty="0">
+                <a:solidFill>
+                  <a:srgbClr val="111827"/>
+                </a:solidFill>
+                <a:latin typeface="Calibri" pitchFamily="34" charset="0"/>
+                <a:ea typeface="Calibri" pitchFamily="34" charset="-122"/>
+                <a:cs typeface="Calibri" pitchFamily="34" charset="-120"/>
+              </a:rPr>
+              <a:t>Договор с пользователем — регламент Евросоюза о защите данных, статья 6</a:t>
+            </a:r>
+            <a:endParaRPr lang="en-US" sz="1400" dirty="0"/>
+          </a:p>
+        </p:txBody>
+      </p:sp>
+      <p:sp>
+        <p:nvSpPr>
+          <p:cNvPr id="13" name="legal-1"/>
           <p:cNvSpPr/>
           <p:nvPr/>
         </p:nvSpPr>
         <p:spPr>
           <a:xfrm>
-            <a:off x="1508760" y="274320"/>
-            <a:ext cx="512064" cy="256032"/>
+            <a:off x="2548890" y="2834640"/>
+            <a:ext cx="1954530" cy="1280160"/>
           </a:xfrm>
           <a:prstGeom prst="roundRect">
             <a:avLst>
-              <a:gd name="adj" fmla="val 28571"/>
+              <a:gd name="adj" fmla="val 5714"/>
             </a:avLst>
           </a:prstGeom>
           <a:solidFill>
@@ -11865,14 +8262,14 @@
       </p:sp>
       <p:sp>
         <p:nvSpPr>
-          <p:cNvPr id="6" name="Text 4"/>
+          <p:cNvPr id="14" name="Text 12"/>
           <p:cNvSpPr txBox="1"/>
           <p:nvPr/>
         </p:nvSpPr>
         <p:spPr>
           <a:xfrm>
-            <a:off x="1508760" y="274320"/>
-            <a:ext cx="512064" cy="256032"/>
+            <a:off x="2622042" y="2889504"/>
+            <a:ext cx="1808226" cy="1170432"/>
           </a:xfrm>
           <a:prstGeom prst="rect">
             <a:avLst/>
@@ -11881,10 +8278,13 @@
           <a:ln/>
         </p:spPr>
         <p:txBody>
-          <a:bodyPr wrap="square" lIns="0" tIns="0" rIns="0" bIns="0" rtlCol="0" anchor="ctr"/>
-          <a:lstStyle/>
-          <a:p>
-            <a:pPr algn="ctr" indent="0" marL="0">
+          <a:bodyPr wrap="square" lIns="1016" tIns="1016" rIns="1016" bIns="1016" rtlCol="0" anchor="t"/>
+          <a:lstStyle/>
+          <a:p>
+            <a:pPr algn="l" indent="0" marL="0">
+              <a:spcAft>
+                <a:spcPts val="300"/>
+              </a:spcAft>
               <a:buNone/>
             </a:pPr>
             <a:r>
@@ -11896,170 +8296,46 @@
                 <a:ea typeface="Calibri" pitchFamily="34" charset="-122"/>
                 <a:cs typeface="Calibri" pitchFamily="34" charset="-120"/>
               </a:rPr>
-              <a:t>Цель</a:t>
-            </a:r>
-            <a:endParaRPr lang="en-US" sz="1000" dirty="0"/>
-          </a:p>
-        </p:txBody>
-      </p:sp>
-      <p:sp>
-        <p:nvSpPr>
-          <p:cNvPr id="7" name="Text 5"/>
-          <p:cNvSpPr txBox="1"/>
-          <p:nvPr/>
-        </p:nvSpPr>
-        <p:spPr>
-          <a:xfrm>
-            <a:off x="2020824" y="274320"/>
-            <a:ext cx="228600" cy="256032"/>
-          </a:xfrm>
-          <a:prstGeom prst="rect">
-            <a:avLst/>
-          </a:prstGeom>
-          <a:noFill/>
-          <a:ln/>
-        </p:spPr>
-        <p:txBody>
-          <a:bodyPr wrap="square" lIns="0" tIns="0" rIns="0" bIns="0" rtlCol="0" anchor="ctr"/>
-          <a:lstStyle/>
-          <a:p>
-            <a:pPr algn="ctr" indent="0" marL="0">
-              <a:buNone/>
-            </a:pPr>
-            <a:r>
-              <a:rPr lang="en-US" sz="1000" dirty="0">
-                <a:solidFill>
-                  <a:srgbClr val="6B7280"/>
-                </a:solidFill>
-                <a:latin typeface="Calibri" pitchFamily="34" charset="0"/>
-                <a:ea typeface="Calibri" pitchFamily="34" charset="-122"/>
-                <a:cs typeface="Calibri" pitchFamily="34" charset="-120"/>
-              </a:rPr>
-              <a:t>→</a:t>
-            </a:r>
-            <a:endParaRPr lang="en-US" sz="1000" dirty="0"/>
-          </a:p>
-        </p:txBody>
-      </p:sp>
-      <p:sp>
-        <p:nvSpPr>
-          <p:cNvPr id="8" name="chain-2"/>
+              <a:t>Случайные люди в кадре</a:t>
+            </a:r>
+            <a:endParaRPr lang="en-US" sz="1400" dirty="0"/>
+          </a:p>
+          <a:p>
+            <a:pPr algn="l" indent="0" marL="0">
+              <a:spcAft>
+                <a:spcPts val="300"/>
+              </a:spcAft>
+              <a:buNone/>
+            </a:pPr>
+            <a:r>
+              <a:rPr lang="en-US" sz="1400" dirty="0">
+                <a:solidFill>
+                  <a:srgbClr val="111827"/>
+                </a:solidFill>
+                <a:latin typeface="Calibri" pitchFamily="34" charset="0"/>
+                <a:ea typeface="Calibri" pitchFamily="34" charset="-122"/>
+                <a:cs typeface="Calibri" pitchFamily="34" charset="-120"/>
+              </a:rPr>
+              <a:t>Законный интерес; лица крупным планом не публикуются</a:t>
+            </a:r>
+            <a:endParaRPr lang="en-US" sz="1400" dirty="0"/>
+          </a:p>
+        </p:txBody>
+      </p:sp>
+      <p:sp>
+        <p:nvSpPr>
+          <p:cNvPr id="15" name="legal-2"/>
           <p:cNvSpPr/>
           <p:nvPr/>
         </p:nvSpPr>
         <p:spPr>
           <a:xfrm>
-            <a:off x="2249424" y="274320"/>
-            <a:ext cx="978408" cy="256032"/>
+            <a:off x="4640580" y="2834640"/>
+            <a:ext cx="1954530" cy="1280160"/>
           </a:xfrm>
           <a:prstGeom prst="roundRect">
             <a:avLst>
-              <a:gd name="adj" fmla="val 28571"/>
-            </a:avLst>
-          </a:prstGeom>
-          <a:solidFill>
-            <a:srgbClr val="0F766E"/>
-          </a:solidFill>
-          <a:ln w="12700">
-            <a:solidFill>
-              <a:srgbClr val="0F766E"/>
-            </a:solidFill>
-            <a:prstDash val="solid"/>
-          </a:ln>
-        </p:spPr>
-      </p:sp>
-      <p:sp>
-        <p:nvSpPr>
-          <p:cNvPr id="9" name="Text 7"/>
-          <p:cNvSpPr txBox="1"/>
-          <p:nvPr/>
-        </p:nvSpPr>
-        <p:spPr>
-          <a:xfrm>
-            <a:off x="2249424" y="274320"/>
-            <a:ext cx="978408" cy="256032"/>
-          </a:xfrm>
-          <a:prstGeom prst="rect">
-            <a:avLst/>
-          </a:prstGeom>
-          <a:noFill/>
-          <a:ln/>
-        </p:spPr>
-        <p:txBody>
-          <a:bodyPr wrap="square" lIns="0" tIns="0" rIns="0" bIns="0" rtlCol="0" anchor="ctr"/>
-          <a:lstStyle/>
-          <a:p>
-            <a:pPr algn="ctr" indent="0" marL="0">
-              <a:buNone/>
-            </a:pPr>
-            <a:r>
-              <a:rPr lang="en-US" sz="1000" dirty="0">
-                <a:solidFill>
-                  <a:srgbClr val="FFFFFF"/>
-                </a:solidFill>
-                <a:latin typeface="Calibri" pitchFamily="34" charset="0"/>
-                <a:ea typeface="Calibri" pitchFamily="34" charset="-122"/>
-                <a:cs typeface="Calibri" pitchFamily="34" charset="-120"/>
-              </a:rPr>
-              <a:t>Показатели</a:t>
-            </a:r>
-            <a:endParaRPr lang="en-US" sz="1000" dirty="0"/>
-          </a:p>
-        </p:txBody>
-      </p:sp>
-      <p:sp>
-        <p:nvSpPr>
-          <p:cNvPr id="10" name="Text 8"/>
-          <p:cNvSpPr txBox="1"/>
-          <p:nvPr/>
-        </p:nvSpPr>
-        <p:spPr>
-          <a:xfrm>
-            <a:off x="3227832" y="274320"/>
-            <a:ext cx="228600" cy="256032"/>
-          </a:xfrm>
-          <a:prstGeom prst="rect">
-            <a:avLst/>
-          </a:prstGeom>
-          <a:noFill/>
-          <a:ln/>
-        </p:spPr>
-        <p:txBody>
-          <a:bodyPr wrap="square" lIns="0" tIns="0" rIns="0" bIns="0" rtlCol="0" anchor="ctr"/>
-          <a:lstStyle/>
-          <a:p>
-            <a:pPr algn="ctr" indent="0" marL="0">
-              <a:buNone/>
-            </a:pPr>
-            <a:r>
-              <a:rPr lang="en-US" sz="1000" dirty="0">
-                <a:solidFill>
-                  <a:srgbClr val="6B7280"/>
-                </a:solidFill>
-                <a:latin typeface="Calibri" pitchFamily="34" charset="0"/>
-                <a:ea typeface="Calibri" pitchFamily="34" charset="-122"/>
-                <a:cs typeface="Calibri" pitchFamily="34" charset="-120"/>
-              </a:rPr>
-              <a:t>→</a:t>
-            </a:r>
-            <a:endParaRPr lang="en-US" sz="1000" dirty="0"/>
-          </a:p>
-        </p:txBody>
-      </p:sp>
-      <p:sp>
-        <p:nvSpPr>
-          <p:cNvPr id="11" name="chain-3"/>
-          <p:cNvSpPr/>
-          <p:nvPr/>
-        </p:nvSpPr>
-        <p:spPr>
-          <a:xfrm>
-            <a:off x="3456432" y="274320"/>
-            <a:ext cx="589788" cy="256032"/>
-          </a:xfrm>
-          <a:prstGeom prst="roundRect">
-            <a:avLst>
-              <a:gd name="adj" fmla="val 28571"/>
+              <a:gd name="adj" fmla="val 5714"/>
             </a:avLst>
           </a:prstGeom>
           <a:solidFill>
@@ -12075,116 +8351,14 @@
       </p:sp>
       <p:sp>
         <p:nvSpPr>
-          <p:cNvPr id="12" name="Text 10"/>
+          <p:cNvPr id="16" name="Text 14"/>
           <p:cNvSpPr txBox="1"/>
           <p:nvPr/>
         </p:nvSpPr>
         <p:spPr>
           <a:xfrm>
-            <a:off x="3456432" y="274320"/>
-            <a:ext cx="589788" cy="256032"/>
-          </a:xfrm>
-          <a:prstGeom prst="rect">
-            <a:avLst/>
-          </a:prstGeom>
-          <a:noFill/>
-          <a:ln/>
-        </p:spPr>
-        <p:txBody>
-          <a:bodyPr wrap="square" lIns="0" tIns="0" rIns="0" bIns="0" rtlCol="0" anchor="ctr"/>
-          <a:lstStyle/>
-          <a:p>
-            <a:pPr algn="ctr" indent="0" marL="0">
-              <a:buNone/>
-            </a:pPr>
-            <a:r>
-              <a:rPr lang="en-US" sz="1000" dirty="0">
-                <a:solidFill>
-                  <a:srgbClr val="6B7280"/>
-                </a:solidFill>
-                <a:latin typeface="Calibri" pitchFamily="34" charset="0"/>
-                <a:ea typeface="Calibri" pitchFamily="34" charset="-122"/>
-                <a:cs typeface="Calibri" pitchFamily="34" charset="-120"/>
-              </a:rPr>
-              <a:t>Эпики</a:t>
-            </a:r>
-            <a:endParaRPr lang="en-US" sz="1000" dirty="0"/>
-          </a:p>
-        </p:txBody>
-      </p:sp>
-      <p:sp>
-        <p:nvSpPr>
-          <p:cNvPr id="13" name="Text 0"/>
-          <p:cNvSpPr/>
-          <p:nvPr>
-            <p:ph idx="100" type="title" hasCustomPrompt="1"/>
-          </p:nvPr>
-        </p:nvSpPr>
-        <p:spPr>
-          <a:xfrm>
-            <a:off x="457200" y="658368"/>
-            <a:ext cx="8229600" cy="914400"/>
-          </a:xfrm>
-          <a:prstGeom prst="rect">
-            <a:avLst/>
-          </a:prstGeom>
-          <a:noFill/>
-          <a:ln/>
-        </p:spPr>
-        <p:txBody>
-          <a:bodyPr wrap="square" lIns="0" tIns="0" rIns="0" bIns="0" rtlCol="0" anchor="t"/>
-          <a:lstStyle/>
-          <a:p>
-            <a:pPr algn="l" indent="0" marL="0">
-              <a:buNone/>
-            </a:pPr>
-            <a:r>
-              <a:rPr lang="en-US" sz="2600" b="1" dirty="0">
-                <a:solidFill>
-                  <a:srgbClr val="111827"/>
-                </a:solidFill>
-                <a:latin typeface="Calibri" pitchFamily="34" charset="0"/>
-                <a:ea typeface="Calibri" pitchFamily="34" charset="-122"/>
-                <a:cs typeface="Calibri" pitchFamily="34" charset="-120"/>
-              </a:rPr>
-              <a:t>Быстро, только своим и по закону</a:t>
-            </a:r>
-            <a:endParaRPr lang="en-US" sz="2600" dirty="0"/>
-          </a:p>
-        </p:txBody>
-      </p:sp>
-      <p:sp>
-        <p:nvSpPr>
-          <p:cNvPr id="14" name="tile-0"/>
-          <p:cNvSpPr/>
-          <p:nvPr/>
-        </p:nvSpPr>
-        <p:spPr>
-          <a:xfrm>
-            <a:off x="457200" y="1737360"/>
-            <a:ext cx="1954530" cy="1005840"/>
-          </a:xfrm>
-          <a:prstGeom prst="roundRect">
-            <a:avLst>
-              <a:gd name="adj" fmla="val 7273"/>
-            </a:avLst>
-          </a:prstGeom>
-          <a:solidFill>
-            <a:srgbClr val="0F172A"/>
-          </a:solidFill>
-          <a:ln/>
-        </p:spPr>
-      </p:sp>
-      <p:sp>
-        <p:nvSpPr>
-          <p:cNvPr id="15" name="Text 13"/>
-          <p:cNvSpPr txBox="1"/>
-          <p:nvPr/>
-        </p:nvSpPr>
-        <p:spPr>
-          <a:xfrm>
-            <a:off x="530352" y="1792224"/>
-            <a:ext cx="1808226" cy="896112"/>
+            <a:off x="4713732" y="2889504"/>
+            <a:ext cx="1808226" cy="1170432"/>
           </a:xfrm>
           <a:prstGeom prst="rect">
             <a:avLst/>
@@ -12205,13 +8379,13 @@
             <a:r>
               <a:rPr lang="en-US" sz="1000" dirty="0">
                 <a:solidFill>
-                  <a:srgbClr val="94A3B8"/>
-                </a:solidFill>
-                <a:latin typeface="Calibri" pitchFamily="34" charset="0"/>
-                <a:ea typeface="Calibri" pitchFamily="34" charset="-122"/>
-                <a:cs typeface="Calibri" pitchFamily="34" charset="-120"/>
-              </a:rPr>
-              <a:t>Сборка карты</a:t>
+                  <a:srgbClr val="6B7280"/>
+                </a:solidFill>
+                <a:latin typeface="Calibri" pitchFamily="34" charset="0"/>
+                <a:ea typeface="Calibri" pitchFamily="34" charset="-122"/>
+                <a:cs typeface="Calibri" pitchFamily="34" charset="-120"/>
+              </a:rPr>
+              <a:t>Хранение</a:t>
             </a:r>
             <a:endParaRPr lang="en-US" sz="1400" dirty="0"/>
           </a:p>
@@ -12223,15 +8397,15 @@
               <a:buNone/>
             </a:pPr>
             <a:r>
-              <a:rPr lang="en-US" sz="1700" b="1" dirty="0">
-                <a:solidFill>
-                  <a:srgbClr val="FFFFFF"/>
-                </a:solidFill>
-                <a:latin typeface="Calibri" pitchFamily="34" charset="0"/>
-                <a:ea typeface="Calibri" pitchFamily="34" charset="-122"/>
-                <a:cs typeface="Calibri" pitchFamily="34" charset="-120"/>
-              </a:rPr>
-              <a:t>до 10 минут</a:t>
+              <a:rPr lang="en-US" sz="1400" dirty="0">
+                <a:solidFill>
+                  <a:srgbClr val="111827"/>
+                </a:solidFill>
+                <a:latin typeface="Calibri" pitchFamily="34" charset="0"/>
+                <a:ea typeface="Calibri" pitchFamily="34" charset="-122"/>
+                <a:cs typeface="Calibri" pitchFamily="34" charset="-120"/>
+              </a:rPr>
+              <a:t>До 90 дней, удаление по запросу — до 30 дней</a:t>
             </a:r>
             <a:endParaRPr lang="en-US" sz="1400" dirty="0"/>
           </a:p>
@@ -12239,265 +8413,13 @@
       </p:sp>
       <p:sp>
         <p:nvSpPr>
-          <p:cNvPr id="16" name="tile-1"/>
+          <p:cNvPr id="17" name="legal-3"/>
           <p:cNvSpPr/>
           <p:nvPr/>
         </p:nvSpPr>
         <p:spPr>
           <a:xfrm>
-            <a:off x="2548890" y="1737360"/>
-            <a:ext cx="1954530" cy="1005840"/>
-          </a:xfrm>
-          <a:prstGeom prst="roundRect">
-            <a:avLst>
-              <a:gd name="adj" fmla="val 7273"/>
-            </a:avLst>
-          </a:prstGeom>
-          <a:solidFill>
-            <a:srgbClr val="0F172A"/>
-          </a:solidFill>
-          <a:ln/>
-        </p:spPr>
-      </p:sp>
-      <p:sp>
-        <p:nvSpPr>
-          <p:cNvPr id="17" name="Text 15"/>
-          <p:cNvSpPr txBox="1"/>
-          <p:nvPr/>
-        </p:nvSpPr>
-        <p:spPr>
-          <a:xfrm>
-            <a:off x="2622042" y="1792224"/>
-            <a:ext cx="1808226" cy="896112"/>
-          </a:xfrm>
-          <a:prstGeom prst="rect">
-            <a:avLst/>
-          </a:prstGeom>
-          <a:noFill/>
-          <a:ln/>
-        </p:spPr>
-        <p:txBody>
-          <a:bodyPr wrap="square" lIns="1016" tIns="1016" rIns="1016" bIns="1016" rtlCol="0" anchor="t"/>
-          <a:lstStyle/>
-          <a:p>
-            <a:pPr algn="l" indent="0" marL="0">
-              <a:spcAft>
-                <a:spcPts val="300"/>
-              </a:spcAft>
-              <a:buNone/>
-            </a:pPr>
-            <a:r>
-              <a:rPr lang="en-US" sz="1000" dirty="0">
-                <a:solidFill>
-                  <a:srgbClr val="94A3B8"/>
-                </a:solidFill>
-                <a:latin typeface="Calibri" pitchFamily="34" charset="0"/>
-                <a:ea typeface="Calibri" pitchFamily="34" charset="-122"/>
-                <a:cs typeface="Calibri" pitchFamily="34" charset="-120"/>
-              </a:rPr>
-              <a:t>Открыть карту в браузере</a:t>
-            </a:r>
-            <a:endParaRPr lang="en-US" sz="1400" dirty="0"/>
-          </a:p>
-          <a:p>
-            <a:pPr algn="l" indent="0" marL="0">
-              <a:spcAft>
-                <a:spcPts val="300"/>
-              </a:spcAft>
-              <a:buNone/>
-            </a:pPr>
-            <a:r>
-              <a:rPr lang="en-US" sz="1700" b="1" dirty="0">
-                <a:solidFill>
-                  <a:srgbClr val="FFFFFF"/>
-                </a:solidFill>
-                <a:latin typeface="Calibri" pitchFamily="34" charset="0"/>
-                <a:ea typeface="Calibri" pitchFamily="34" charset="-122"/>
-                <a:cs typeface="Calibri" pitchFamily="34" charset="-120"/>
-              </a:rPr>
-              <a:t>до 10 секунд</a:t>
-            </a:r>
-            <a:endParaRPr lang="en-US" sz="1400" dirty="0"/>
-          </a:p>
-        </p:txBody>
-      </p:sp>
-      <p:sp>
-        <p:nvSpPr>
-          <p:cNvPr id="18" name="tile-2"/>
-          <p:cNvSpPr/>
-          <p:nvPr/>
-        </p:nvSpPr>
-        <p:spPr>
-          <a:xfrm>
-            <a:off x="4640580" y="1737360"/>
-            <a:ext cx="1954530" cy="1005840"/>
-          </a:xfrm>
-          <a:prstGeom prst="roundRect">
-            <a:avLst>
-              <a:gd name="adj" fmla="val 7273"/>
-            </a:avLst>
-          </a:prstGeom>
-          <a:solidFill>
-            <a:srgbClr val="0F172A"/>
-          </a:solidFill>
-          <a:ln/>
-        </p:spPr>
-      </p:sp>
-      <p:sp>
-        <p:nvSpPr>
-          <p:cNvPr id="19" name="Text 17"/>
-          <p:cNvSpPr txBox="1"/>
-          <p:nvPr/>
-        </p:nvSpPr>
-        <p:spPr>
-          <a:xfrm>
-            <a:off x="4713732" y="1792224"/>
-            <a:ext cx="1808226" cy="896112"/>
-          </a:xfrm>
-          <a:prstGeom prst="rect">
-            <a:avLst/>
-          </a:prstGeom>
-          <a:noFill/>
-          <a:ln/>
-        </p:spPr>
-        <p:txBody>
-          <a:bodyPr wrap="square" lIns="1016" tIns="1016" rIns="1016" bIns="1016" rtlCol="0" anchor="t"/>
-          <a:lstStyle/>
-          <a:p>
-            <a:pPr algn="l" indent="0" marL="0">
-              <a:spcAft>
-                <a:spcPts val="300"/>
-              </a:spcAft>
-              <a:buNone/>
-            </a:pPr>
-            <a:r>
-              <a:rPr lang="en-US" sz="1000" dirty="0">
-                <a:solidFill>
-                  <a:srgbClr val="94A3B8"/>
-                </a:solidFill>
-                <a:latin typeface="Calibri" pitchFamily="34" charset="0"/>
-                <a:ea typeface="Calibri" pitchFamily="34" charset="-122"/>
-                <a:cs typeface="Calibri" pitchFamily="34" charset="-120"/>
-              </a:rPr>
-              <a:t>Сервис доступен</a:t>
-            </a:r>
-            <a:endParaRPr lang="en-US" sz="1400" dirty="0"/>
-          </a:p>
-          <a:p>
-            <a:pPr algn="l" indent="0" marL="0">
-              <a:spcAft>
-                <a:spcPts val="300"/>
-              </a:spcAft>
-              <a:buNone/>
-            </a:pPr>
-            <a:r>
-              <a:rPr lang="en-US" sz="1700" b="1" dirty="0">
-                <a:solidFill>
-                  <a:srgbClr val="FFFFFF"/>
-                </a:solidFill>
-                <a:latin typeface="Calibri" pitchFamily="34" charset="0"/>
-                <a:ea typeface="Calibri" pitchFamily="34" charset="-122"/>
-                <a:cs typeface="Calibri" pitchFamily="34" charset="-120"/>
-              </a:rPr>
-              <a:t>не меньше 99% времени</a:t>
-            </a:r>
-            <a:endParaRPr lang="en-US" sz="1400" dirty="0"/>
-          </a:p>
-        </p:txBody>
-      </p:sp>
-      <p:sp>
-        <p:nvSpPr>
-          <p:cNvPr id="20" name="tile-3"/>
-          <p:cNvSpPr/>
-          <p:nvPr/>
-        </p:nvSpPr>
-        <p:spPr>
-          <a:xfrm>
-            <a:off x="6732270" y="1737360"/>
-            <a:ext cx="1954530" cy="1005840"/>
-          </a:xfrm>
-          <a:prstGeom prst="roundRect">
-            <a:avLst>
-              <a:gd name="adj" fmla="val 7273"/>
-            </a:avLst>
-          </a:prstGeom>
-          <a:solidFill>
-            <a:srgbClr val="0F172A"/>
-          </a:solidFill>
-          <a:ln/>
-        </p:spPr>
-      </p:sp>
-      <p:sp>
-        <p:nvSpPr>
-          <p:cNvPr id="21" name="Text 19"/>
-          <p:cNvSpPr txBox="1"/>
-          <p:nvPr/>
-        </p:nvSpPr>
-        <p:spPr>
-          <a:xfrm>
-            <a:off x="6805422" y="1792224"/>
-            <a:ext cx="1808226" cy="896112"/>
-          </a:xfrm>
-          <a:prstGeom prst="rect">
-            <a:avLst/>
-          </a:prstGeom>
-          <a:noFill/>
-          <a:ln/>
-        </p:spPr>
-        <p:txBody>
-          <a:bodyPr wrap="square" lIns="1016" tIns="1016" rIns="1016" bIns="1016" rtlCol="0" anchor="t"/>
-          <a:lstStyle/>
-          <a:p>
-            <a:pPr algn="l" indent="0" marL="0">
-              <a:spcAft>
-                <a:spcPts val="300"/>
-              </a:spcAft>
-              <a:buNone/>
-            </a:pPr>
-            <a:r>
-              <a:rPr lang="en-US" sz="1000" dirty="0">
-                <a:solidFill>
-                  <a:srgbClr val="94A3B8"/>
-                </a:solidFill>
-                <a:latin typeface="Calibri" pitchFamily="34" charset="0"/>
-                <a:ea typeface="Calibri" pitchFamily="34" charset="-122"/>
-                <a:cs typeface="Calibri" pitchFamily="34" charset="-120"/>
-              </a:rPr>
-              <a:t>Доступность веб-страниц</a:t>
-            </a:r>
-            <a:endParaRPr lang="en-US" sz="1400" dirty="0"/>
-          </a:p>
-          <a:p>
-            <a:pPr algn="l" indent="0" marL="0">
-              <a:spcAft>
-                <a:spcPts val="300"/>
-              </a:spcAft>
-              <a:buNone/>
-            </a:pPr>
-            <a:r>
-              <a:rPr lang="en-US" sz="1700" b="1" dirty="0">
-                <a:solidFill>
-                  <a:srgbClr val="FFFFFF"/>
-                </a:solidFill>
-                <a:latin typeface="Calibri" pitchFamily="34" charset="0"/>
-                <a:ea typeface="Calibri" pitchFamily="34" charset="-122"/>
-                <a:cs typeface="Calibri" pitchFamily="34" charset="-120"/>
-              </a:rPr>
-              <a:t>уровень AA</a:t>
-            </a:r>
-            <a:endParaRPr lang="en-US" sz="1400" dirty="0"/>
-          </a:p>
-        </p:txBody>
-      </p:sp>
-      <p:sp>
-        <p:nvSpPr>
-          <p:cNvPr id="22" name="legal-0"/>
-          <p:cNvSpPr/>
-          <p:nvPr/>
-        </p:nvSpPr>
-        <p:spPr>
-          <a:xfrm>
-            <a:off x="457200" y="2971800"/>
+            <a:off x="6732270" y="2834640"/>
             <a:ext cx="1954530" cy="1280160"/>
           </a:xfrm>
           <a:prstGeom prst="roundRect">
@@ -12518,13 +8440,13 @@
       </p:sp>
       <p:sp>
         <p:nvSpPr>
-          <p:cNvPr id="23" name="Text 21"/>
+          <p:cNvPr id="18" name="Text 16"/>
           <p:cNvSpPr txBox="1"/>
           <p:nvPr/>
         </p:nvSpPr>
         <p:spPr>
           <a:xfrm>
-            <a:off x="530352" y="3026664"/>
+            <a:off x="6805422" y="2889504"/>
             <a:ext cx="1808226" cy="1170432"/>
           </a:xfrm>
           <a:prstGeom prst="rect">
@@ -12552,7 +8474,7 @@
                 <a:ea typeface="Calibri" pitchFamily="34" charset="-122"/>
                 <a:cs typeface="Calibri" pitchFamily="34" charset="-120"/>
               </a:rPr>
-              <a:t>Своя съёмка</a:t>
+              <a:t>Библиотеки</a:t>
             </a:r>
             <a:endParaRPr lang="en-US" sz="1400" dirty="0"/>
           </a:p>
@@ -12572,7 +8494,7 @@
                 <a:ea typeface="Calibri" pitchFamily="34" charset="-122"/>
                 <a:cs typeface="Calibri" pitchFamily="34" charset="-120"/>
               </a:rPr>
-              <a:t>Договор с пользователем — регламент Евросоюза о защите данных, статья 6</a:t>
+              <a:t>Только открытые лицензии</a:t>
             </a:r>
             <a:endParaRPr lang="en-US" sz="1400" dirty="0"/>
           </a:p>
@@ -12580,274 +8502,7 @@
       </p:sp>
       <p:sp>
         <p:nvSpPr>
-          <p:cNvPr id="24" name="legal-1"/>
-          <p:cNvSpPr/>
-          <p:nvPr/>
-        </p:nvSpPr>
-        <p:spPr>
-          <a:xfrm>
-            <a:off x="2548890" y="2971800"/>
-            <a:ext cx="1954530" cy="1280160"/>
-          </a:xfrm>
-          <a:prstGeom prst="roundRect">
-            <a:avLst>
-              <a:gd name="adj" fmla="val 5714"/>
-            </a:avLst>
-          </a:prstGeom>
-          <a:solidFill>
-            <a:srgbClr val="FFFFFF"/>
-          </a:solidFill>
-          <a:ln w="12700">
-            <a:solidFill>
-              <a:srgbClr val="E5E7EB"/>
-            </a:solidFill>
-            <a:prstDash val="solid"/>
-          </a:ln>
-        </p:spPr>
-      </p:sp>
-      <p:sp>
-        <p:nvSpPr>
-          <p:cNvPr id="25" name="Text 23"/>
-          <p:cNvSpPr txBox="1"/>
-          <p:nvPr/>
-        </p:nvSpPr>
-        <p:spPr>
-          <a:xfrm>
-            <a:off x="2622042" y="3026664"/>
-            <a:ext cx="1808226" cy="1170432"/>
-          </a:xfrm>
-          <a:prstGeom prst="rect">
-            <a:avLst/>
-          </a:prstGeom>
-          <a:noFill/>
-          <a:ln/>
-        </p:spPr>
-        <p:txBody>
-          <a:bodyPr wrap="square" lIns="1016" tIns="1016" rIns="1016" bIns="1016" rtlCol="0" anchor="t"/>
-          <a:lstStyle/>
-          <a:p>
-            <a:pPr algn="l" indent="0" marL="0">
-              <a:spcAft>
-                <a:spcPts val="300"/>
-              </a:spcAft>
-              <a:buNone/>
-            </a:pPr>
-            <a:r>
-              <a:rPr lang="en-US" sz="1000" dirty="0">
-                <a:solidFill>
-                  <a:srgbClr val="6B7280"/>
-                </a:solidFill>
-                <a:latin typeface="Calibri" pitchFamily="34" charset="0"/>
-                <a:ea typeface="Calibri" pitchFamily="34" charset="-122"/>
-                <a:cs typeface="Calibri" pitchFamily="34" charset="-120"/>
-              </a:rPr>
-              <a:t>Случайные люди в кадре</a:t>
-            </a:r>
-            <a:endParaRPr lang="en-US" sz="1400" dirty="0"/>
-          </a:p>
-          <a:p>
-            <a:pPr algn="l" indent="0" marL="0">
-              <a:spcAft>
-                <a:spcPts val="300"/>
-              </a:spcAft>
-              <a:buNone/>
-            </a:pPr>
-            <a:r>
-              <a:rPr lang="en-US" sz="1400" dirty="0">
-                <a:solidFill>
-                  <a:srgbClr val="111827"/>
-                </a:solidFill>
-                <a:latin typeface="Calibri" pitchFamily="34" charset="0"/>
-                <a:ea typeface="Calibri" pitchFamily="34" charset="-122"/>
-                <a:cs typeface="Calibri" pitchFamily="34" charset="-120"/>
-              </a:rPr>
-              <a:t>Законный интерес; лица крупным планом не публикуются</a:t>
-            </a:r>
-            <a:endParaRPr lang="en-US" sz="1400" dirty="0"/>
-          </a:p>
-        </p:txBody>
-      </p:sp>
-      <p:sp>
-        <p:nvSpPr>
-          <p:cNvPr id="26" name="legal-2"/>
-          <p:cNvSpPr/>
-          <p:nvPr/>
-        </p:nvSpPr>
-        <p:spPr>
-          <a:xfrm>
-            <a:off x="4640580" y="2971800"/>
-            <a:ext cx="1954530" cy="1280160"/>
-          </a:xfrm>
-          <a:prstGeom prst="roundRect">
-            <a:avLst>
-              <a:gd name="adj" fmla="val 5714"/>
-            </a:avLst>
-          </a:prstGeom>
-          <a:solidFill>
-            <a:srgbClr val="FFFFFF"/>
-          </a:solidFill>
-          <a:ln w="12700">
-            <a:solidFill>
-              <a:srgbClr val="E5E7EB"/>
-            </a:solidFill>
-            <a:prstDash val="solid"/>
-          </a:ln>
-        </p:spPr>
-      </p:sp>
-      <p:sp>
-        <p:nvSpPr>
-          <p:cNvPr id="27" name="Text 25"/>
-          <p:cNvSpPr txBox="1"/>
-          <p:nvPr/>
-        </p:nvSpPr>
-        <p:spPr>
-          <a:xfrm>
-            <a:off x="4713732" y="3026664"/>
-            <a:ext cx="1808226" cy="1170432"/>
-          </a:xfrm>
-          <a:prstGeom prst="rect">
-            <a:avLst/>
-          </a:prstGeom>
-          <a:noFill/>
-          <a:ln/>
-        </p:spPr>
-        <p:txBody>
-          <a:bodyPr wrap="square" lIns="1016" tIns="1016" rIns="1016" bIns="1016" rtlCol="0" anchor="t"/>
-          <a:lstStyle/>
-          <a:p>
-            <a:pPr algn="l" indent="0" marL="0">
-              <a:spcAft>
-                <a:spcPts val="300"/>
-              </a:spcAft>
-              <a:buNone/>
-            </a:pPr>
-            <a:r>
-              <a:rPr lang="en-US" sz="1000" dirty="0">
-                <a:solidFill>
-                  <a:srgbClr val="6B7280"/>
-                </a:solidFill>
-                <a:latin typeface="Calibri" pitchFamily="34" charset="0"/>
-                <a:ea typeface="Calibri" pitchFamily="34" charset="-122"/>
-                <a:cs typeface="Calibri" pitchFamily="34" charset="-120"/>
-              </a:rPr>
-              <a:t>Хранение</a:t>
-            </a:r>
-            <a:endParaRPr lang="en-US" sz="1400" dirty="0"/>
-          </a:p>
-          <a:p>
-            <a:pPr algn="l" indent="0" marL="0">
-              <a:spcAft>
-                <a:spcPts val="300"/>
-              </a:spcAft>
-              <a:buNone/>
-            </a:pPr>
-            <a:r>
-              <a:rPr lang="en-US" sz="1400" dirty="0">
-                <a:solidFill>
-                  <a:srgbClr val="111827"/>
-                </a:solidFill>
-                <a:latin typeface="Calibri" pitchFamily="34" charset="0"/>
-                <a:ea typeface="Calibri" pitchFamily="34" charset="-122"/>
-                <a:cs typeface="Calibri" pitchFamily="34" charset="-120"/>
-              </a:rPr>
-              <a:t>До 90 дней, удаление по запросу — до 30 дней</a:t>
-            </a:r>
-            <a:endParaRPr lang="en-US" sz="1400" dirty="0"/>
-          </a:p>
-        </p:txBody>
-      </p:sp>
-      <p:sp>
-        <p:nvSpPr>
-          <p:cNvPr id="28" name="legal-3"/>
-          <p:cNvSpPr/>
-          <p:nvPr/>
-        </p:nvSpPr>
-        <p:spPr>
-          <a:xfrm>
-            <a:off x="6732270" y="2971800"/>
-            <a:ext cx="1954530" cy="1280160"/>
-          </a:xfrm>
-          <a:prstGeom prst="roundRect">
-            <a:avLst>
-              <a:gd name="adj" fmla="val 5714"/>
-            </a:avLst>
-          </a:prstGeom>
-          <a:solidFill>
-            <a:srgbClr val="FFFFFF"/>
-          </a:solidFill>
-          <a:ln w="12700">
-            <a:solidFill>
-              <a:srgbClr val="E5E7EB"/>
-            </a:solidFill>
-            <a:prstDash val="solid"/>
-          </a:ln>
-        </p:spPr>
-      </p:sp>
-      <p:sp>
-        <p:nvSpPr>
-          <p:cNvPr id="29" name="Text 27"/>
-          <p:cNvSpPr txBox="1"/>
-          <p:nvPr/>
-        </p:nvSpPr>
-        <p:spPr>
-          <a:xfrm>
-            <a:off x="6805422" y="3026664"/>
-            <a:ext cx="1808226" cy="1170432"/>
-          </a:xfrm>
-          <a:prstGeom prst="rect">
-            <a:avLst/>
-          </a:prstGeom>
-          <a:noFill/>
-          <a:ln/>
-        </p:spPr>
-        <p:txBody>
-          <a:bodyPr wrap="square" lIns="1016" tIns="1016" rIns="1016" bIns="1016" rtlCol="0" anchor="t"/>
-          <a:lstStyle/>
-          <a:p>
-            <a:pPr algn="l" indent="0" marL="0">
-              <a:spcAft>
-                <a:spcPts val="300"/>
-              </a:spcAft>
-              <a:buNone/>
-            </a:pPr>
-            <a:r>
-              <a:rPr lang="en-US" sz="1000" dirty="0">
-                <a:solidFill>
-                  <a:srgbClr val="6B7280"/>
-                </a:solidFill>
-                <a:latin typeface="Calibri" pitchFamily="34" charset="0"/>
-                <a:ea typeface="Calibri" pitchFamily="34" charset="-122"/>
-                <a:cs typeface="Calibri" pitchFamily="34" charset="-120"/>
-              </a:rPr>
-              <a:t>Библиотеки</a:t>
-            </a:r>
-            <a:endParaRPr lang="en-US" sz="1400" dirty="0"/>
-          </a:p>
-          <a:p>
-            <a:pPr algn="l" indent="0" marL="0">
-              <a:spcAft>
-                <a:spcPts val="300"/>
-              </a:spcAft>
-              <a:buNone/>
-            </a:pPr>
-            <a:r>
-              <a:rPr lang="en-US" sz="1400" dirty="0">
-                <a:solidFill>
-                  <a:srgbClr val="111827"/>
-                </a:solidFill>
-                <a:latin typeface="Calibri" pitchFamily="34" charset="0"/>
-                <a:ea typeface="Calibri" pitchFamily="34" charset="-122"/>
-                <a:cs typeface="Calibri" pitchFamily="34" charset="-120"/>
-              </a:rPr>
-              <a:t>Только открытые лицензии</a:t>
-            </a:r>
-            <a:endParaRPr lang="en-US" sz="1400" dirty="0"/>
-          </a:p>
-        </p:txBody>
-      </p:sp>
-      <p:sp>
-        <p:nvSpPr>
-          <p:cNvPr id="30" name="section-ref"/>
+          <p:cNvPr id="19" name="section-ref"/>
           <p:cNvSpPr txBox="1"/>
           <p:nvPr/>
         </p:nvSpPr>
@@ -12959,388 +8614,7 @@
       </p:grpSpPr>
       <p:sp>
         <p:nvSpPr>
-          <p:cNvPr id="2" name="chain-0"/>
-          <p:cNvSpPr/>
-          <p:nvPr/>
-        </p:nvSpPr>
-        <p:spPr>
-          <a:xfrm>
-            <a:off x="457200" y="274320"/>
-            <a:ext cx="822960" cy="256032"/>
-          </a:xfrm>
-          <a:prstGeom prst="roundRect">
-            <a:avLst>
-              <a:gd name="adj" fmla="val 28571"/>
-            </a:avLst>
-          </a:prstGeom>
-          <a:solidFill>
-            <a:srgbClr val="FFFFFF"/>
-          </a:solidFill>
-          <a:ln w="12700">
-            <a:solidFill>
-              <a:srgbClr val="E5E7EB"/>
-            </a:solidFill>
-            <a:prstDash val="solid"/>
-          </a:ln>
-        </p:spPr>
-      </p:sp>
-      <p:sp>
-        <p:nvSpPr>
-          <p:cNvPr id="3" name="Text 1"/>
-          <p:cNvSpPr txBox="1"/>
-          <p:nvPr/>
-        </p:nvSpPr>
-        <p:spPr>
-          <a:xfrm>
-            <a:off x="457200" y="274320"/>
-            <a:ext cx="822960" cy="256032"/>
-          </a:xfrm>
-          <a:prstGeom prst="rect">
-            <a:avLst/>
-          </a:prstGeom>
-          <a:noFill/>
-          <a:ln/>
-        </p:spPr>
-        <p:txBody>
-          <a:bodyPr wrap="square" lIns="0" tIns="0" rIns="0" bIns="0" rtlCol="0" anchor="ctr"/>
-          <a:lstStyle/>
-          <a:p>
-            <a:pPr algn="ctr" indent="0" marL="0">
-              <a:buNone/>
-            </a:pPr>
-            <a:r>
-              <a:rPr lang="en-US" sz="1000" dirty="0">
-                <a:solidFill>
-                  <a:srgbClr val="6B7280"/>
-                </a:solidFill>
-                <a:latin typeface="Calibri" pitchFamily="34" charset="0"/>
-                <a:ea typeface="Calibri" pitchFamily="34" charset="-122"/>
-                <a:cs typeface="Calibri" pitchFamily="34" charset="-120"/>
-              </a:rPr>
-              <a:t>Проблема</a:t>
-            </a:r>
-            <a:endParaRPr lang="en-US" sz="1000" dirty="0"/>
-          </a:p>
-        </p:txBody>
-      </p:sp>
-      <p:sp>
-        <p:nvSpPr>
-          <p:cNvPr id="4" name="Text 2"/>
-          <p:cNvSpPr txBox="1"/>
-          <p:nvPr/>
-        </p:nvSpPr>
-        <p:spPr>
-          <a:xfrm>
-            <a:off x="1280160" y="274320"/>
-            <a:ext cx="228600" cy="256032"/>
-          </a:xfrm>
-          <a:prstGeom prst="rect">
-            <a:avLst/>
-          </a:prstGeom>
-          <a:noFill/>
-          <a:ln/>
-        </p:spPr>
-        <p:txBody>
-          <a:bodyPr wrap="square" lIns="0" tIns="0" rIns="0" bIns="0" rtlCol="0" anchor="ctr"/>
-          <a:lstStyle/>
-          <a:p>
-            <a:pPr algn="ctr" indent="0" marL="0">
-              <a:buNone/>
-            </a:pPr>
-            <a:r>
-              <a:rPr lang="en-US" sz="1000" dirty="0">
-                <a:solidFill>
-                  <a:srgbClr val="6B7280"/>
-                </a:solidFill>
-                <a:latin typeface="Calibri" pitchFamily="34" charset="0"/>
-                <a:ea typeface="Calibri" pitchFamily="34" charset="-122"/>
-                <a:cs typeface="Calibri" pitchFamily="34" charset="-120"/>
-              </a:rPr>
-              <a:t>→</a:t>
-            </a:r>
-            <a:endParaRPr lang="en-US" sz="1000" dirty="0"/>
-          </a:p>
-        </p:txBody>
-      </p:sp>
-      <p:sp>
-        <p:nvSpPr>
-          <p:cNvPr id="5" name="chain-1"/>
-          <p:cNvSpPr/>
-          <p:nvPr/>
-        </p:nvSpPr>
-        <p:spPr>
-          <a:xfrm>
-            <a:off x="1508760" y="274320"/>
-            <a:ext cx="512064" cy="256032"/>
-          </a:xfrm>
-          <a:prstGeom prst="roundRect">
-            <a:avLst>
-              <a:gd name="adj" fmla="val 28571"/>
-            </a:avLst>
-          </a:prstGeom>
-          <a:solidFill>
-            <a:srgbClr val="FFFFFF"/>
-          </a:solidFill>
-          <a:ln w="12700">
-            <a:solidFill>
-              <a:srgbClr val="E5E7EB"/>
-            </a:solidFill>
-            <a:prstDash val="solid"/>
-          </a:ln>
-        </p:spPr>
-      </p:sp>
-      <p:sp>
-        <p:nvSpPr>
-          <p:cNvPr id="6" name="Text 4"/>
-          <p:cNvSpPr txBox="1"/>
-          <p:nvPr/>
-        </p:nvSpPr>
-        <p:spPr>
-          <a:xfrm>
-            <a:off x="1508760" y="274320"/>
-            <a:ext cx="512064" cy="256032"/>
-          </a:xfrm>
-          <a:prstGeom prst="rect">
-            <a:avLst/>
-          </a:prstGeom>
-          <a:noFill/>
-          <a:ln/>
-        </p:spPr>
-        <p:txBody>
-          <a:bodyPr wrap="square" lIns="0" tIns="0" rIns="0" bIns="0" rtlCol="0" anchor="ctr"/>
-          <a:lstStyle/>
-          <a:p>
-            <a:pPr algn="ctr" indent="0" marL="0">
-              <a:buNone/>
-            </a:pPr>
-            <a:r>
-              <a:rPr lang="en-US" sz="1000" dirty="0">
-                <a:solidFill>
-                  <a:srgbClr val="6B7280"/>
-                </a:solidFill>
-                <a:latin typeface="Calibri" pitchFamily="34" charset="0"/>
-                <a:ea typeface="Calibri" pitchFamily="34" charset="-122"/>
-                <a:cs typeface="Calibri" pitchFamily="34" charset="-120"/>
-              </a:rPr>
-              <a:t>Цель</a:t>
-            </a:r>
-            <a:endParaRPr lang="en-US" sz="1000" dirty="0"/>
-          </a:p>
-        </p:txBody>
-      </p:sp>
-      <p:sp>
-        <p:nvSpPr>
-          <p:cNvPr id="7" name="Text 5"/>
-          <p:cNvSpPr txBox="1"/>
-          <p:nvPr/>
-        </p:nvSpPr>
-        <p:spPr>
-          <a:xfrm>
-            <a:off x="2020824" y="274320"/>
-            <a:ext cx="228600" cy="256032"/>
-          </a:xfrm>
-          <a:prstGeom prst="rect">
-            <a:avLst/>
-          </a:prstGeom>
-          <a:noFill/>
-          <a:ln/>
-        </p:spPr>
-        <p:txBody>
-          <a:bodyPr wrap="square" lIns="0" tIns="0" rIns="0" bIns="0" rtlCol="0" anchor="ctr"/>
-          <a:lstStyle/>
-          <a:p>
-            <a:pPr algn="ctr" indent="0" marL="0">
-              <a:buNone/>
-            </a:pPr>
-            <a:r>
-              <a:rPr lang="en-US" sz="1000" dirty="0">
-                <a:solidFill>
-                  <a:srgbClr val="6B7280"/>
-                </a:solidFill>
-                <a:latin typeface="Calibri" pitchFamily="34" charset="0"/>
-                <a:ea typeface="Calibri" pitchFamily="34" charset="-122"/>
-                <a:cs typeface="Calibri" pitchFamily="34" charset="-120"/>
-              </a:rPr>
-              <a:t>→</a:t>
-            </a:r>
-            <a:endParaRPr lang="en-US" sz="1000" dirty="0"/>
-          </a:p>
-        </p:txBody>
-      </p:sp>
-      <p:sp>
-        <p:nvSpPr>
-          <p:cNvPr id="8" name="chain-2"/>
-          <p:cNvSpPr/>
-          <p:nvPr/>
-        </p:nvSpPr>
-        <p:spPr>
-          <a:xfrm>
-            <a:off x="2249424" y="274320"/>
-            <a:ext cx="978408" cy="256032"/>
-          </a:xfrm>
-          <a:prstGeom prst="roundRect">
-            <a:avLst>
-              <a:gd name="adj" fmla="val 28571"/>
-            </a:avLst>
-          </a:prstGeom>
-          <a:solidFill>
-            <a:srgbClr val="FFFFFF"/>
-          </a:solidFill>
-          <a:ln w="12700">
-            <a:solidFill>
-              <a:srgbClr val="E5E7EB"/>
-            </a:solidFill>
-            <a:prstDash val="solid"/>
-          </a:ln>
-        </p:spPr>
-      </p:sp>
-      <p:sp>
-        <p:nvSpPr>
-          <p:cNvPr id="9" name="Text 7"/>
-          <p:cNvSpPr txBox="1"/>
-          <p:nvPr/>
-        </p:nvSpPr>
-        <p:spPr>
-          <a:xfrm>
-            <a:off x="2249424" y="274320"/>
-            <a:ext cx="978408" cy="256032"/>
-          </a:xfrm>
-          <a:prstGeom prst="rect">
-            <a:avLst/>
-          </a:prstGeom>
-          <a:noFill/>
-          <a:ln/>
-        </p:spPr>
-        <p:txBody>
-          <a:bodyPr wrap="square" lIns="0" tIns="0" rIns="0" bIns="0" rtlCol="0" anchor="ctr"/>
-          <a:lstStyle/>
-          <a:p>
-            <a:pPr algn="ctr" indent="0" marL="0">
-              <a:buNone/>
-            </a:pPr>
-            <a:r>
-              <a:rPr lang="en-US" sz="1000" dirty="0">
-                <a:solidFill>
-                  <a:srgbClr val="6B7280"/>
-                </a:solidFill>
-                <a:latin typeface="Calibri" pitchFamily="34" charset="0"/>
-                <a:ea typeface="Calibri" pitchFamily="34" charset="-122"/>
-                <a:cs typeface="Calibri" pitchFamily="34" charset="-120"/>
-              </a:rPr>
-              <a:t>Показатели</a:t>
-            </a:r>
-            <a:endParaRPr lang="en-US" sz="1000" dirty="0"/>
-          </a:p>
-        </p:txBody>
-      </p:sp>
-      <p:sp>
-        <p:nvSpPr>
-          <p:cNvPr id="10" name="Text 8"/>
-          <p:cNvSpPr txBox="1"/>
-          <p:nvPr/>
-        </p:nvSpPr>
-        <p:spPr>
-          <a:xfrm>
-            <a:off x="3227832" y="274320"/>
-            <a:ext cx="228600" cy="256032"/>
-          </a:xfrm>
-          <a:prstGeom prst="rect">
-            <a:avLst/>
-          </a:prstGeom>
-          <a:noFill/>
-          <a:ln/>
-        </p:spPr>
-        <p:txBody>
-          <a:bodyPr wrap="square" lIns="0" tIns="0" rIns="0" bIns="0" rtlCol="0" anchor="ctr"/>
-          <a:lstStyle/>
-          <a:p>
-            <a:pPr algn="ctr" indent="0" marL="0">
-              <a:buNone/>
-            </a:pPr>
-            <a:r>
-              <a:rPr lang="en-US" sz="1000" dirty="0">
-                <a:solidFill>
-                  <a:srgbClr val="6B7280"/>
-                </a:solidFill>
-                <a:latin typeface="Calibri" pitchFamily="34" charset="0"/>
-                <a:ea typeface="Calibri" pitchFamily="34" charset="-122"/>
-                <a:cs typeface="Calibri" pitchFamily="34" charset="-120"/>
-              </a:rPr>
-              <a:t>→</a:t>
-            </a:r>
-            <a:endParaRPr lang="en-US" sz="1000" dirty="0"/>
-          </a:p>
-        </p:txBody>
-      </p:sp>
-      <p:sp>
-        <p:nvSpPr>
-          <p:cNvPr id="11" name="chain-3"/>
-          <p:cNvSpPr/>
-          <p:nvPr/>
-        </p:nvSpPr>
-        <p:spPr>
-          <a:xfrm>
-            <a:off x="3456432" y="274320"/>
-            <a:ext cx="589788" cy="256032"/>
-          </a:xfrm>
-          <a:prstGeom prst="roundRect">
-            <a:avLst>
-              <a:gd name="adj" fmla="val 28571"/>
-            </a:avLst>
-          </a:prstGeom>
-          <a:solidFill>
-            <a:srgbClr val="0F766E"/>
-          </a:solidFill>
-          <a:ln w="12700">
-            <a:solidFill>
-              <a:srgbClr val="0F766E"/>
-            </a:solidFill>
-            <a:prstDash val="solid"/>
-          </a:ln>
-        </p:spPr>
-      </p:sp>
-      <p:sp>
-        <p:nvSpPr>
-          <p:cNvPr id="12" name="Text 10"/>
-          <p:cNvSpPr txBox="1"/>
-          <p:nvPr/>
-        </p:nvSpPr>
-        <p:spPr>
-          <a:xfrm>
-            <a:off x="3456432" y="274320"/>
-            <a:ext cx="589788" cy="256032"/>
-          </a:xfrm>
-          <a:prstGeom prst="rect">
-            <a:avLst/>
-          </a:prstGeom>
-          <a:noFill/>
-          <a:ln/>
-        </p:spPr>
-        <p:txBody>
-          <a:bodyPr wrap="square" lIns="0" tIns="0" rIns="0" bIns="0" rtlCol="0" anchor="ctr"/>
-          <a:lstStyle/>
-          <a:p>
-            <a:pPr algn="ctr" indent="0" marL="0">
-              <a:buNone/>
-            </a:pPr>
-            <a:r>
-              <a:rPr lang="en-US" sz="1000" dirty="0">
-                <a:solidFill>
-                  <a:srgbClr val="FFFFFF"/>
-                </a:solidFill>
-                <a:latin typeface="Calibri" pitchFamily="34" charset="0"/>
-                <a:ea typeface="Calibri" pitchFamily="34" charset="-122"/>
-                <a:cs typeface="Calibri" pitchFamily="34" charset="-120"/>
-              </a:rPr>
-              <a:t>Эпики</a:t>
-            </a:r>
-            <a:endParaRPr lang="en-US" sz="1000" dirty="0"/>
-          </a:p>
-        </p:txBody>
-      </p:sp>
-      <p:sp>
-        <p:nvSpPr>
-          <p:cNvPr id="13" name="Text 0"/>
+          <p:cNvPr id="2" name="Text 0"/>
           <p:cNvSpPr/>
           <p:nvPr>
             <p:ph idx="100" type="title" hasCustomPrompt="1"/>
@@ -13348,7 +8622,7 @@
         </p:nvSpPr>
         <p:spPr>
           <a:xfrm>
-            <a:off x="457200" y="658368"/>
+            <a:off x="457200" y="411480"/>
             <a:ext cx="8229600" cy="914400"/>
           </a:xfrm>
           <a:prstGeom prst="rect">
@@ -13381,13 +8655,13 @@
       </p:sp>
       <p:sp>
         <p:nvSpPr>
-          <p:cNvPr id="14" name="node-0"/>
+          <p:cNvPr id="3" name="node-0"/>
           <p:cNvSpPr/>
           <p:nvPr/>
         </p:nvSpPr>
         <p:spPr>
           <a:xfrm>
-            <a:off x="457200" y="1828800"/>
+            <a:off x="457200" y="1691640"/>
             <a:ext cx="1463040" cy="1325880"/>
           </a:xfrm>
           <a:prstGeom prst="roundRect">
@@ -13408,13 +8682,13 @@
       </p:sp>
       <p:sp>
         <p:nvSpPr>
-          <p:cNvPr id="15" name="Text 13"/>
+          <p:cNvPr id="4" name="Text 2"/>
           <p:cNvSpPr txBox="1"/>
           <p:nvPr/>
         </p:nvSpPr>
         <p:spPr>
           <a:xfrm>
-            <a:off x="457200" y="1828800"/>
+            <a:off x="457200" y="1691640"/>
             <a:ext cx="1463040" cy="1325880"/>
           </a:xfrm>
           <a:prstGeom prst="rect">
@@ -13481,13 +8755,13 @@
       </p:sp>
       <p:sp>
         <p:nvSpPr>
-          <p:cNvPr id="16" name="Text 14"/>
+          <p:cNvPr id="5" name="Text 3"/>
           <p:cNvSpPr txBox="1"/>
           <p:nvPr/>
         </p:nvSpPr>
         <p:spPr>
           <a:xfrm>
-            <a:off x="1920240" y="1828800"/>
+            <a:off x="1920240" y="1691640"/>
             <a:ext cx="502920" cy="1325880"/>
           </a:xfrm>
           <a:prstGeom prst="rect">
@@ -13520,13 +8794,13 @@
       </p:sp>
       <p:sp>
         <p:nvSpPr>
-          <p:cNvPr id="17" name="node-1"/>
+          <p:cNvPr id="6" name="node-1"/>
           <p:cNvSpPr/>
           <p:nvPr/>
         </p:nvSpPr>
         <p:spPr>
           <a:xfrm>
-            <a:off x="2423160" y="1828800"/>
+            <a:off x="2423160" y="1691640"/>
             <a:ext cx="1463040" cy="1325880"/>
           </a:xfrm>
           <a:prstGeom prst="roundRect">
@@ -13547,13 +8821,13 @@
       </p:sp>
       <p:sp>
         <p:nvSpPr>
-          <p:cNvPr id="18" name="Text 16"/>
+          <p:cNvPr id="7" name="Text 5"/>
           <p:cNvSpPr txBox="1"/>
           <p:nvPr/>
         </p:nvSpPr>
         <p:spPr>
           <a:xfrm>
-            <a:off x="2423160" y="1828800"/>
+            <a:off x="2423160" y="1691640"/>
             <a:ext cx="1463040" cy="1325880"/>
           </a:xfrm>
           <a:prstGeom prst="rect">
@@ -13620,13 +8894,13 @@
       </p:sp>
       <p:sp>
         <p:nvSpPr>
-          <p:cNvPr id="19" name="Text 17"/>
+          <p:cNvPr id="8" name="Text 6"/>
           <p:cNvSpPr txBox="1"/>
           <p:nvPr/>
         </p:nvSpPr>
         <p:spPr>
           <a:xfrm>
-            <a:off x="3886200" y="1828800"/>
+            <a:off x="3886200" y="1691640"/>
             <a:ext cx="502920" cy="1325880"/>
           </a:xfrm>
           <a:prstGeom prst="rect">
@@ -13659,13 +8933,13 @@
       </p:sp>
       <p:sp>
         <p:nvSpPr>
-          <p:cNvPr id="20" name="node-2"/>
+          <p:cNvPr id="9" name="node-2"/>
           <p:cNvSpPr/>
           <p:nvPr/>
         </p:nvSpPr>
         <p:spPr>
           <a:xfrm>
-            <a:off x="4389120" y="1828800"/>
+            <a:off x="4389120" y="1691640"/>
             <a:ext cx="1463040" cy="1325880"/>
           </a:xfrm>
           <a:prstGeom prst="roundRect">
@@ -13686,13 +8960,13 @@
       </p:sp>
       <p:sp>
         <p:nvSpPr>
-          <p:cNvPr id="21" name="Text 19"/>
+          <p:cNvPr id="10" name="Text 8"/>
           <p:cNvSpPr txBox="1"/>
           <p:nvPr/>
         </p:nvSpPr>
         <p:spPr>
           <a:xfrm>
-            <a:off x="4389120" y="1828800"/>
+            <a:off x="4389120" y="1691640"/>
             <a:ext cx="1463040" cy="1325880"/>
           </a:xfrm>
           <a:prstGeom prst="rect">
@@ -13759,13 +9033,13 @@
       </p:sp>
       <p:sp>
         <p:nvSpPr>
-          <p:cNvPr id="22" name="external-0"/>
+          <p:cNvPr id="11" name="external-0"/>
           <p:cNvSpPr/>
           <p:nvPr/>
         </p:nvSpPr>
         <p:spPr>
           <a:xfrm>
-            <a:off x="457200" y="3337560"/>
+            <a:off x="457200" y="3200400"/>
             <a:ext cx="2606040" cy="457200"/>
           </a:xfrm>
           <a:prstGeom prst="roundRect">
@@ -13781,13 +9055,13 @@
       </p:sp>
       <p:sp>
         <p:nvSpPr>
-          <p:cNvPr id="23" name="Text 21"/>
+          <p:cNvPr id="12" name="Text 10"/>
           <p:cNvSpPr txBox="1"/>
           <p:nvPr/>
         </p:nvSpPr>
         <p:spPr>
           <a:xfrm>
-            <a:off x="457200" y="3337560"/>
+            <a:off x="457200" y="3200400"/>
             <a:ext cx="2606040" cy="457200"/>
           </a:xfrm>
           <a:prstGeom prst="rect">
@@ -13820,13 +9094,13 @@
       </p:sp>
       <p:sp>
         <p:nvSpPr>
-          <p:cNvPr id="24" name="external-1"/>
+          <p:cNvPr id="13" name="external-1"/>
           <p:cNvSpPr/>
           <p:nvPr/>
         </p:nvSpPr>
         <p:spPr>
           <a:xfrm>
-            <a:off x="3246120" y="3337560"/>
+            <a:off x="3246120" y="3200400"/>
             <a:ext cx="2606040" cy="457200"/>
           </a:xfrm>
           <a:prstGeom prst="roundRect">
@@ -13842,13 +9116,13 @@
       </p:sp>
       <p:sp>
         <p:nvSpPr>
-          <p:cNvPr id="25" name="Text 23"/>
+          <p:cNvPr id="14" name="Text 12"/>
           <p:cNvSpPr txBox="1"/>
           <p:nvPr/>
         </p:nvSpPr>
         <p:spPr>
           <a:xfrm>
-            <a:off x="3246120" y="3337560"/>
+            <a:off x="3246120" y="3200400"/>
             <a:ext cx="2606040" cy="457200"/>
           </a:xfrm>
           <a:prstGeom prst="rect">
@@ -13881,13 +9155,13 @@
       </p:sp>
       <p:sp>
         <p:nvSpPr>
-          <p:cNvPr id="26" name="risk-0"/>
+          <p:cNvPr id="15" name="risk-0"/>
           <p:cNvSpPr/>
           <p:nvPr/>
         </p:nvSpPr>
         <p:spPr>
           <a:xfrm>
-            <a:off x="6126480" y="1737360"/>
+            <a:off x="6126480" y="1600200"/>
             <a:ext cx="2560320" cy="868680"/>
           </a:xfrm>
           <a:prstGeom prst="roundRect">
@@ -13903,13 +9177,13 @@
       </p:sp>
       <p:sp>
         <p:nvSpPr>
-          <p:cNvPr id="27" name="Text 25"/>
+          <p:cNvPr id="16" name="Text 14"/>
           <p:cNvSpPr txBox="1"/>
           <p:nvPr/>
         </p:nvSpPr>
         <p:spPr>
           <a:xfrm>
-            <a:off x="6172200" y="1773936"/>
+            <a:off x="6172200" y="1636776"/>
             <a:ext cx="2468880" cy="795528"/>
           </a:xfrm>
           <a:prstGeom prst="rect">
@@ -13959,13 +9233,13 @@
       </p:sp>
       <p:sp>
         <p:nvSpPr>
-          <p:cNvPr id="28" name="risk-1"/>
+          <p:cNvPr id="17" name="risk-1"/>
           <p:cNvSpPr/>
           <p:nvPr/>
         </p:nvSpPr>
         <p:spPr>
           <a:xfrm>
-            <a:off x="6126480" y="2715768"/>
+            <a:off x="6126480" y="2578608"/>
             <a:ext cx="2560320" cy="868680"/>
           </a:xfrm>
           <a:prstGeom prst="roundRect">
@@ -13981,13 +9255,13 @@
       </p:sp>
       <p:sp>
         <p:nvSpPr>
-          <p:cNvPr id="29" name="Text 27"/>
+          <p:cNvPr id="18" name="Text 16"/>
           <p:cNvSpPr txBox="1"/>
           <p:nvPr/>
         </p:nvSpPr>
         <p:spPr>
           <a:xfrm>
-            <a:off x="6172200" y="2752344"/>
+            <a:off x="6172200" y="2615184"/>
             <a:ext cx="2468880" cy="795528"/>
           </a:xfrm>
           <a:prstGeom prst="rect">
@@ -14037,13 +9311,13 @@
       </p:sp>
       <p:sp>
         <p:nvSpPr>
-          <p:cNvPr id="30" name="risk-2"/>
+          <p:cNvPr id="19" name="risk-2"/>
           <p:cNvSpPr/>
           <p:nvPr/>
         </p:nvSpPr>
         <p:spPr>
           <a:xfrm>
-            <a:off x="6126480" y="3694176"/>
+            <a:off x="6126480" y="3557016"/>
             <a:ext cx="2560320" cy="868680"/>
           </a:xfrm>
           <a:prstGeom prst="roundRect">
@@ -14059,13 +9333,13 @@
       </p:sp>
       <p:sp>
         <p:nvSpPr>
-          <p:cNvPr id="31" name="Text 29"/>
+          <p:cNvPr id="20" name="Text 18"/>
           <p:cNvSpPr txBox="1"/>
           <p:nvPr/>
         </p:nvSpPr>
         <p:spPr>
           <a:xfrm>
-            <a:off x="6172200" y="3730752"/>
+            <a:off x="6172200" y="3593592"/>
             <a:ext cx="2468880" cy="795528"/>
           </a:xfrm>
           <a:prstGeom prst="rect">
@@ -14115,7 +9389,7 @@
       </p:sp>
       <p:sp>
         <p:nvSpPr>
-          <p:cNvPr id="32" name="section-ref"/>
+          <p:cNvPr id="21" name="section-ref"/>
           <p:cNvSpPr txBox="1"/>
           <p:nvPr/>
         </p:nvSpPr>
